--- a/ADMIN/34장/34장_ASM_인스턴스_관리.pptx
+++ b/ADMIN/34장/34장_ASM_인스턴스_관리.pptx
@@ -4,51 +4,54 @@
   <p:sldMasterIdLst>
     <p:sldMasterId id="2147483648" r:id="rId1"/>
   </p:sldMasterIdLst>
+  <p:notesMasterIdLst>
+    <p:notesMasterId r:id="rId44"/>
+  </p:notesMasterIdLst>
   <p:sldIdLst>
-    <p:sldId id="256" r:id="rId7"/>
-    <p:sldId id="257" r:id="rId8"/>
-    <p:sldId id="258" r:id="rId9"/>
-    <p:sldId id="259" r:id="rId10"/>
-    <p:sldId id="260" r:id="rId11"/>
-    <p:sldId id="261" r:id="rId13"/>
-    <p:sldId id="262" r:id="rId14"/>
-    <p:sldId id="263" r:id="rId15"/>
-    <p:sldId id="264" r:id="rId16"/>
-    <p:sldId id="265" r:id="rId17"/>
-    <p:sldId id="266" r:id="rId18"/>
-    <p:sldId id="267" r:id="rId19"/>
-    <p:sldId id="268" r:id="rId20"/>
-    <p:sldId id="269" r:id="rId21"/>
-    <p:sldId id="270" r:id="rId22"/>
-    <p:sldId id="271" r:id="rId23"/>
-    <p:sldId id="272" r:id="rId24"/>
-    <p:sldId id="273" r:id="rId25"/>
-    <p:sldId id="274" r:id="rId26"/>
-    <p:sldId id="275" r:id="rId27"/>
-    <p:sldId id="276" r:id="rId28"/>
-    <p:sldId id="277" r:id="rId29"/>
-    <p:sldId id="278" r:id="rId30"/>
-    <p:sldId id="279" r:id="rId31"/>
-    <p:sldId id="280" r:id="rId32"/>
-    <p:sldId id="281" r:id="rId33"/>
-    <p:sldId id="282" r:id="rId34"/>
-    <p:sldId id="283" r:id="rId35"/>
-    <p:sldId id="284" r:id="rId36"/>
-    <p:sldId id="285" r:id="rId37"/>
-    <p:sldId id="286" r:id="rId38"/>
-    <p:sldId id="287" r:id="rId39"/>
-    <p:sldId id="288" r:id="rId40"/>
-    <p:sldId id="289" r:id="rId41"/>
-    <p:sldId id="290" r:id="rId42"/>
-    <p:sldId id="291" r:id="rId43"/>
-    <p:sldId id="292" r:id="rId44"/>
-    <p:sldId id="293" r:id="rId45"/>
-    <p:sldId id="294" r:id="rId46"/>
-    <p:sldId id="295" r:id="rId47"/>
-    <p:sldId id="296" r:id="rId48"/>
-    <p:sldId id="297" r:id="rId49"/>
+    <p:sldId id="256" r:id="rId2"/>
+    <p:sldId id="257" r:id="rId3"/>
+    <p:sldId id="258" r:id="rId4"/>
+    <p:sldId id="259" r:id="rId5"/>
+    <p:sldId id="260" r:id="rId6"/>
+    <p:sldId id="261" r:id="rId7"/>
+    <p:sldId id="262" r:id="rId8"/>
+    <p:sldId id="263" r:id="rId9"/>
+    <p:sldId id="264" r:id="rId10"/>
+    <p:sldId id="265" r:id="rId11"/>
+    <p:sldId id="266" r:id="rId12"/>
+    <p:sldId id="267" r:id="rId13"/>
+    <p:sldId id="268" r:id="rId14"/>
+    <p:sldId id="269" r:id="rId15"/>
+    <p:sldId id="270" r:id="rId16"/>
+    <p:sldId id="271" r:id="rId17"/>
+    <p:sldId id="272" r:id="rId18"/>
+    <p:sldId id="273" r:id="rId19"/>
+    <p:sldId id="274" r:id="rId20"/>
+    <p:sldId id="275" r:id="rId21"/>
+    <p:sldId id="276" r:id="rId22"/>
+    <p:sldId id="277" r:id="rId23"/>
+    <p:sldId id="278" r:id="rId24"/>
+    <p:sldId id="279" r:id="rId25"/>
+    <p:sldId id="280" r:id="rId26"/>
+    <p:sldId id="281" r:id="rId27"/>
+    <p:sldId id="282" r:id="rId28"/>
+    <p:sldId id="283" r:id="rId29"/>
+    <p:sldId id="284" r:id="rId30"/>
+    <p:sldId id="285" r:id="rId31"/>
+    <p:sldId id="286" r:id="rId32"/>
+    <p:sldId id="287" r:id="rId33"/>
+    <p:sldId id="288" r:id="rId34"/>
+    <p:sldId id="289" r:id="rId35"/>
+    <p:sldId id="290" r:id="rId36"/>
+    <p:sldId id="291" r:id="rId37"/>
+    <p:sldId id="292" r:id="rId38"/>
+    <p:sldId id="293" r:id="rId39"/>
+    <p:sldId id="294" r:id="rId40"/>
+    <p:sldId id="295" r:id="rId41"/>
+    <p:sldId id="296" r:id="rId42"/>
+    <p:sldId id="297" r:id="rId43"/>
   </p:sldIdLst>
-  <p:sldSz cx="12192000" cy="6858000" type="screen4x3"/>
+  <p:sldSz cx="12192000" cy="6858000"/>
   <p:notesSz cx="6858000" cy="9144000"/>
   <p:defaultTextStyle>
     <a:defPPr>
@@ -145,11 +148,27 @@
       </a:defRPr>
     </a:lvl9pPr>
   </p:defaultTextStyle>
+  <p:extLst>
+    <p:ext uri="{EFAFB233-063F-42B5-8137-9DF3F51BA10A}">
+      <p15:sldGuideLst xmlns:p15="http://schemas.microsoft.com/office/powerpoint/2012/main">
+        <p15:guide id="1" orient="horz" pos="2160">
+          <p15:clr>
+            <a:srgbClr val="A4A3A4"/>
+          </p15:clr>
+        </p15:guide>
+        <p15:guide id="2" pos="2880">
+          <p15:clr>
+            <a:srgbClr val="A4A3A4"/>
+          </p15:clr>
+        </p15:guide>
+      </p15:sldGuideLst>
+    </p:ext>
+  </p:extLst>
 </p:presentation>
 </file>
 
 <file path=ppt/notesMasters/notesMaster1.xml><?xml version="1.0" encoding="utf-8"?>
-<p:notesMaster xmlns:a="http://schemas.openxmlformats.org/drawingml/2006/main" xmlns:p="http://schemas.openxmlformats.org/presentationml/2006/main" xmlns:r="http://schemas.openxmlformats.org/officeDocument/2006/relationships">
+<p:notesMaster xmlns:a="http://schemas.openxmlformats.org/drawingml/2006/main" xmlns:r="http://schemas.openxmlformats.org/officeDocument/2006/relationships" xmlns:p="http://schemas.openxmlformats.org/presentationml/2006/main">
   <p:cSld>
     <p:bg>
       <p:bgRef idx="1001">
@@ -172,7 +191,7 @@
       </p:grpSpPr>
       <p:sp>
         <p:nvSpPr>
-          <p:cNvPr id="2" name="Header Placeholder 1"/>
+          <p:cNvPr id="2" name="머리글 개체 틀 1"/>
           <p:cNvSpPr>
             <a:spLocks noGrp="1"/>
           </p:cNvSpPr>
@@ -183,7 +202,7 @@
         <p:spPr>
           <a:xfrm>
             <a:off x="0" y="0"/>
-            <a:ext cx="2971800" cy="457200"/>
+            <a:ext cx="2971800" cy="458788"/>
           </a:xfrm>
           <a:prstGeom prst="rect">
             <a:avLst/>
@@ -197,13 +216,13 @@
             </a:lvl1pPr>
           </a:lstStyle>
           <a:p>
-            <a:endParaRPr lang="en-US"/>
-          </a:p>
-        </p:txBody>
-      </p:sp>
-      <p:sp>
-        <p:nvSpPr>
-          <p:cNvPr id="3" name="Date Placeholder 2"/>
+            <a:endParaRPr lang="ko-KR" altLang="en-US"/>
+          </a:p>
+        </p:txBody>
+      </p:sp>
+      <p:sp>
+        <p:nvSpPr>
+          <p:cNvPr id="3" name="날짜 개체 틀 2"/>
           <p:cNvSpPr>
             <a:spLocks noGrp="1"/>
           </p:cNvSpPr>
@@ -214,7 +233,7 @@
         <p:spPr>
           <a:xfrm>
             <a:off x="3884613" y="0"/>
-            <a:ext cx="2971800" cy="457200"/>
+            <a:ext cx="2971800" cy="458788"/>
           </a:xfrm>
           <a:prstGeom prst="rect">
             <a:avLst/>
@@ -228,17 +247,17 @@
             </a:lvl1pPr>
           </a:lstStyle>
           <a:p>
-            <a:fld id="{0F89C1C7-3DCD-1040-A9CF-14679D8B5DDD}" type="datetimeFigureOut">
-              <a:rPr lang="en-US" smtClean="0"/>
-              <a:t>10/17/16</a:t>
+            <a:fld id="{B7578048-EC0B-493B-9417-48F6515EF7C0}" type="datetimeFigureOut">
+              <a:rPr lang="ko-KR" altLang="en-US" smtClean="0"/>
+              <a:t>2026-08-12</a:t>
             </a:fld>
-            <a:endParaRPr lang="en-US"/>
-          </a:p>
-        </p:txBody>
-      </p:sp>
-      <p:sp>
-        <p:nvSpPr>
-          <p:cNvPr id="4" name="Slide Image Placeholder 3"/>
+            <a:endParaRPr lang="ko-KR" altLang="en-US"/>
+          </a:p>
+        </p:txBody>
+      </p:sp>
+      <p:sp>
+        <p:nvSpPr>
+          <p:cNvPr id="4" name="슬라이드 이미지 개체 틀 3"/>
           <p:cNvSpPr>
             <a:spLocks noGrp="1" noRot="1" noChangeAspect="1"/>
           </p:cNvSpPr>
@@ -248,8 +267,8 @@
         </p:nvSpPr>
         <p:spPr>
           <a:xfrm>
-            <a:off x="1143000" y="685800"/>
-            <a:ext cx="4572000" cy="3429000"/>
+            <a:off x="685800" y="1143000"/>
+            <a:ext cx="5486400" cy="3086100"/>
           </a:xfrm>
           <a:prstGeom prst="rect">
             <a:avLst/>
@@ -265,13 +284,13 @@
           <a:bodyPr vert="horz" lIns="91440" tIns="45720" rIns="91440" bIns="45720" rtlCol="0" anchor="ctr"/>
           <a:lstStyle/>
           <a:p>
-            <a:endParaRPr lang="en-US"/>
-          </a:p>
-        </p:txBody>
-      </p:sp>
-      <p:sp>
-        <p:nvSpPr>
-          <p:cNvPr id="5" name="Notes Placeholder 4"/>
+            <a:endParaRPr lang="ko-KR" altLang="en-US"/>
+          </a:p>
+        </p:txBody>
+      </p:sp>
+      <p:sp>
+        <p:nvSpPr>
+          <p:cNvPr id="5" name="슬라이드 노트 개체 틀 4"/>
           <p:cNvSpPr>
             <a:spLocks noGrp="1"/>
           </p:cNvSpPr>
@@ -281,8 +300,8 @@
         </p:nvSpPr>
         <p:spPr>
           <a:xfrm>
-            <a:off x="685800" y="4343400"/>
-            <a:ext cx="5486400" cy="4114800"/>
+            <a:off x="685800" y="4400550"/>
+            <a:ext cx="5486400" cy="3600450"/>
           </a:xfrm>
           <a:prstGeom prst="rect">
             <a:avLst/>
@@ -294,44 +313,43 @@
           <a:p>
             <a:pPr lvl="0"/>
             <a:r>
-              <a:rPr lang="en-US" smtClean="0"/>
-              <a:t>Click to edit Master text styles</a:t>
+              <a:rPr lang="ko-KR" altLang="en-US"/>
+              <a:t>마스터 텍스트 스타일을 편집하려면 클릭</a:t>
             </a:r>
           </a:p>
           <a:p>
             <a:pPr lvl="1"/>
             <a:r>
-              <a:rPr lang="en-US" smtClean="0"/>
-              <a:t>Second level</a:t>
+              <a:rPr lang="ko-KR" altLang="en-US"/>
+              <a:t>두 번째 수준</a:t>
             </a:r>
           </a:p>
           <a:p>
             <a:pPr lvl="2"/>
             <a:r>
-              <a:rPr lang="en-US" smtClean="0"/>
-              <a:t>Third level</a:t>
+              <a:rPr lang="ko-KR" altLang="en-US"/>
+              <a:t>세 번째 수준</a:t>
             </a:r>
           </a:p>
           <a:p>
             <a:pPr lvl="3"/>
             <a:r>
-              <a:rPr lang="en-US" smtClean="0"/>
-              <a:t>Fourth level</a:t>
+              <a:rPr lang="ko-KR" altLang="en-US"/>
+              <a:t>네 번째 수준</a:t>
             </a:r>
           </a:p>
           <a:p>
             <a:pPr lvl="4"/>
             <a:r>
-              <a:rPr lang="en-US" smtClean="0"/>
-              <a:t>Fifth level</a:t>
-            </a:r>
-            <a:endParaRPr lang="en-US"/>
-          </a:p>
-        </p:txBody>
-      </p:sp>
-      <p:sp>
-        <p:nvSpPr>
-          <p:cNvPr id="6" name="Footer Placeholder 5"/>
+              <a:rPr lang="ko-KR" altLang="en-US"/>
+              <a:t>다섯 번째 수준</a:t>
+            </a:r>
+          </a:p>
+        </p:txBody>
+      </p:sp>
+      <p:sp>
+        <p:nvSpPr>
+          <p:cNvPr id="6" name="바닥글 개체 틀 5"/>
           <p:cNvSpPr>
             <a:spLocks noGrp="1"/>
           </p:cNvSpPr>
@@ -342,7 +360,7 @@
         <p:spPr>
           <a:xfrm>
             <a:off x="0" y="8685213"/>
-            <a:ext cx="2971800" cy="457200"/>
+            <a:ext cx="2971800" cy="458787"/>
           </a:xfrm>
           <a:prstGeom prst="rect">
             <a:avLst/>
@@ -356,13 +374,13 @@
             </a:lvl1pPr>
           </a:lstStyle>
           <a:p>
-            <a:endParaRPr lang="en-US"/>
-          </a:p>
-        </p:txBody>
-      </p:sp>
-      <p:sp>
-        <p:nvSpPr>
-          <p:cNvPr id="7" name="Slide Number Placeholder 6"/>
+            <a:endParaRPr lang="ko-KR" altLang="en-US"/>
+          </a:p>
+        </p:txBody>
+      </p:sp>
+      <p:sp>
+        <p:nvSpPr>
+          <p:cNvPr id="7" name="슬라이드 번호 개체 틀 6"/>
           <p:cNvSpPr>
             <a:spLocks noGrp="1"/>
           </p:cNvSpPr>
@@ -373,7 +391,7 @@
         <p:spPr>
           <a:xfrm>
             <a:off x="3884613" y="8685213"/>
-            <a:ext cx="2971800" cy="457200"/>
+            <a:ext cx="2971800" cy="458787"/>
           </a:xfrm>
           <a:prstGeom prst="rect">
             <a:avLst/>
@@ -387,24 +405,24 @@
             </a:lvl1pPr>
           </a:lstStyle>
           <a:p>
-            <a:fld id="{BB5E49A5-4136-284D-997B-48E1D791AD67}" type="slidenum">
-              <a:rPr lang="en-US" smtClean="0"/>
+            <a:fld id="{51EB5607-FEDC-4061-A402-94494F3F82E1}" type="slidenum">
+              <a:rPr lang="ko-KR" altLang="en-US" smtClean="0"/>
               <a:t>‹#›</a:t>
             </a:fld>
-            <a:endParaRPr lang="en-US"/>
+            <a:endParaRPr lang="ko-KR" altLang="en-US"/>
           </a:p>
         </p:txBody>
       </p:sp>
     </p:spTree>
     <p:extLst>
       <p:ext uri="{BB962C8B-B14F-4D97-AF65-F5344CB8AC3E}">
-        <p14:creationId xmlns:p14="http://schemas.microsoft.com/office/powerpoint/2010/main" val="2623252185"/>
+        <p14:creationId xmlns:p14="http://schemas.microsoft.com/office/powerpoint/2010/main" val="3840974215"/>
       </p:ext>
     </p:extLst>
   </p:cSld>
   <p:clrMap bg1="lt1" tx1="dk1" bg2="lt2" tx2="dk2" accent1="accent1" accent2="accent2" accent3="accent3" accent4="accent4" accent5="accent5" accent6="accent6" hlink="hlink" folHlink="folHlink"/>
   <p:notesStyle>
-    <a:lvl1pPr marL="0" algn="l" defTabSz="457200" rtl="0" eaLnBrk="1" latinLnBrk="0" hangingPunct="1">
+    <a:lvl1pPr marL="0" algn="l" defTabSz="914400" rtl="0" eaLnBrk="1" latinLnBrk="1" hangingPunct="1">
       <a:defRPr sz="1200" kern="1200">
         <a:solidFill>
           <a:schemeClr val="tx1"/>
@@ -414,7 +432,7 @@
         <a:cs typeface="+mn-cs"/>
       </a:defRPr>
     </a:lvl1pPr>
-    <a:lvl2pPr marL="457200" algn="l" defTabSz="457200" rtl="0" eaLnBrk="1" latinLnBrk="0" hangingPunct="1">
+    <a:lvl2pPr marL="457200" algn="l" defTabSz="914400" rtl="0" eaLnBrk="1" latinLnBrk="1" hangingPunct="1">
       <a:defRPr sz="1200" kern="1200">
         <a:solidFill>
           <a:schemeClr val="tx1"/>
@@ -424,7 +442,7 @@
         <a:cs typeface="+mn-cs"/>
       </a:defRPr>
     </a:lvl2pPr>
-    <a:lvl3pPr marL="914400" algn="l" defTabSz="457200" rtl="0" eaLnBrk="1" latinLnBrk="0" hangingPunct="1">
+    <a:lvl3pPr marL="914400" algn="l" defTabSz="914400" rtl="0" eaLnBrk="1" latinLnBrk="1" hangingPunct="1">
       <a:defRPr sz="1200" kern="1200">
         <a:solidFill>
           <a:schemeClr val="tx1"/>
@@ -434,7 +452,7 @@
         <a:cs typeface="+mn-cs"/>
       </a:defRPr>
     </a:lvl3pPr>
-    <a:lvl4pPr marL="1371600" algn="l" defTabSz="457200" rtl="0" eaLnBrk="1" latinLnBrk="0" hangingPunct="1">
+    <a:lvl4pPr marL="1371600" algn="l" defTabSz="914400" rtl="0" eaLnBrk="1" latinLnBrk="1" hangingPunct="1">
       <a:defRPr sz="1200" kern="1200">
         <a:solidFill>
           <a:schemeClr val="tx1"/>
@@ -444,7 +462,7 @@
         <a:cs typeface="+mn-cs"/>
       </a:defRPr>
     </a:lvl4pPr>
-    <a:lvl5pPr marL="1828800" algn="l" defTabSz="457200" rtl="0" eaLnBrk="1" latinLnBrk="0" hangingPunct="1">
+    <a:lvl5pPr marL="1828800" algn="l" defTabSz="914400" rtl="0" eaLnBrk="1" latinLnBrk="1" hangingPunct="1">
       <a:defRPr sz="1200" kern="1200">
         <a:solidFill>
           <a:schemeClr val="tx1"/>
@@ -454,7 +472,7 @@
         <a:cs typeface="+mn-cs"/>
       </a:defRPr>
     </a:lvl5pPr>
-    <a:lvl6pPr marL="2286000" algn="l" defTabSz="457200" rtl="0" eaLnBrk="1" latinLnBrk="0" hangingPunct="1">
+    <a:lvl6pPr marL="2286000" algn="l" defTabSz="914400" rtl="0" eaLnBrk="1" latinLnBrk="1" hangingPunct="1">
       <a:defRPr sz="1200" kern="1200">
         <a:solidFill>
           <a:schemeClr val="tx1"/>
@@ -464,7 +482,7 @@
         <a:cs typeface="+mn-cs"/>
       </a:defRPr>
     </a:lvl6pPr>
-    <a:lvl7pPr marL="2743200" algn="l" defTabSz="457200" rtl="0" eaLnBrk="1" latinLnBrk="0" hangingPunct="1">
+    <a:lvl7pPr marL="2743200" algn="l" defTabSz="914400" rtl="0" eaLnBrk="1" latinLnBrk="1" hangingPunct="1">
       <a:defRPr sz="1200" kern="1200">
         <a:solidFill>
           <a:schemeClr val="tx1"/>
@@ -474,7 +492,7 @@
         <a:cs typeface="+mn-cs"/>
       </a:defRPr>
     </a:lvl7pPr>
-    <a:lvl8pPr marL="3200400" algn="l" defTabSz="457200" rtl="0" eaLnBrk="1" latinLnBrk="0" hangingPunct="1">
+    <a:lvl8pPr marL="3200400" algn="l" defTabSz="914400" rtl="0" eaLnBrk="1" latinLnBrk="1" hangingPunct="1">
       <a:defRPr sz="1200" kern="1200">
         <a:solidFill>
           <a:schemeClr val="tx1"/>
@@ -484,7 +502,7 @@
         <a:cs typeface="+mn-cs"/>
       </a:defRPr>
     </a:lvl8pPr>
-    <a:lvl9pPr marL="3657600" algn="l" defTabSz="457200" rtl="0" eaLnBrk="1" latinLnBrk="0" hangingPunct="1">
+    <a:lvl9pPr marL="3657600" algn="l" defTabSz="914400" rtl="0" eaLnBrk="1" latinLnBrk="1" hangingPunct="1">
       <a:defRPr sz="1200" kern="1200">
         <a:solidFill>
           <a:schemeClr val="tx1"/>
@@ -499,7 +517,7 @@
 </file>
 
 <file path=ppt/notesSlides/notesSlide1.xml><?xml version="1.0" encoding="utf-8"?>
-<p:notes xmlns:a="http://schemas.openxmlformats.org/drawingml/2006/main" xmlns:p="http://schemas.openxmlformats.org/presentationml/2006/main" xmlns:r="http://schemas.openxmlformats.org/officeDocument/2006/relationships">
+<p:notes xmlns:a="http://schemas.openxmlformats.org/drawingml/2006/main" xmlns:r="http://schemas.openxmlformats.org/officeDocument/2006/relationships" xmlns:p="http://schemas.openxmlformats.org/presentationml/2006/main">
   <p:cSld>
     <p:spTree>
       <p:nvGrpSpPr>
@@ -519,7 +537,7 @@
         <p:nvSpPr>
           <p:cNvPr id="2" name="Slide Image Placeholder 1"/>
           <p:cNvSpPr>
-            <a:spLocks noGrp="1"/>
+            <a:spLocks noGrp="1" noRot="1" noChangeAspect="1"/>
           </p:cNvSpPr>
           <p:nvPr>
             <p:ph type="sldImg" idx="2"/>
@@ -534,7 +552,7 @@
             <a:spLocks noGrp="1"/>
           </p:cNvSpPr>
           <p:nvPr>
-            <p:ph type="body" idx="3" sz="quarter"/>
+            <p:ph type="body" sz="quarter" idx="3"/>
           </p:nvPr>
         </p:nvSpPr>
         <p:spPr/>
@@ -555,7 +573,7 @@
             <a:spLocks noGrp="1"/>
           </p:cNvSpPr>
           <p:nvPr>
-            <p:ph type="sldNum" idx="5" sz="quarter"/>
+            <p:ph type="sldNum" sz="quarter" idx="5"/>
           </p:nvPr>
         </p:nvSpPr>
         <p:spPr/>
@@ -569,7 +587,7 @@
 </file>
 
 <file path=ppt/notesSlides/notesSlide10.xml><?xml version="1.0" encoding="utf-8"?>
-<p:notes xmlns:a="http://schemas.openxmlformats.org/drawingml/2006/main" xmlns:p="http://schemas.openxmlformats.org/presentationml/2006/main" xmlns:r="http://schemas.openxmlformats.org/officeDocument/2006/relationships">
+<p:notes xmlns:a="http://schemas.openxmlformats.org/drawingml/2006/main" xmlns:r="http://schemas.openxmlformats.org/officeDocument/2006/relationships" xmlns:p="http://schemas.openxmlformats.org/presentationml/2006/main">
   <p:cSld>
     <p:spTree>
       <p:nvGrpSpPr>
@@ -589,7 +607,7 @@
         <p:nvSpPr>
           <p:cNvPr id="2" name="Slide Image Placeholder 1"/>
           <p:cNvSpPr>
-            <a:spLocks noGrp="1"/>
+            <a:spLocks noGrp="1" noRot="1" noChangeAspect="1"/>
           </p:cNvSpPr>
           <p:nvPr>
             <p:ph type="sldImg" idx="2"/>
@@ -604,7 +622,7 @@
             <a:spLocks noGrp="1"/>
           </p:cNvSpPr>
           <p:nvPr>
-            <p:ph type="body" idx="3" sz="quarter"/>
+            <p:ph type="body" sz="quarter" idx="3"/>
           </p:nvPr>
         </p:nvSpPr>
         <p:spPr/>
@@ -625,7 +643,7 @@
             <a:spLocks noGrp="1"/>
           </p:cNvSpPr>
           <p:nvPr>
-            <p:ph type="sldNum" idx="5" sz="quarter"/>
+            <p:ph type="sldNum" sz="quarter" idx="5"/>
           </p:nvPr>
         </p:nvSpPr>
         <p:spPr/>
@@ -639,7 +657,7 @@
 </file>
 
 <file path=ppt/notesSlides/notesSlide11.xml><?xml version="1.0" encoding="utf-8"?>
-<p:notes xmlns:a="http://schemas.openxmlformats.org/drawingml/2006/main" xmlns:p="http://schemas.openxmlformats.org/presentationml/2006/main" xmlns:r="http://schemas.openxmlformats.org/officeDocument/2006/relationships">
+<p:notes xmlns:a="http://schemas.openxmlformats.org/drawingml/2006/main" xmlns:r="http://schemas.openxmlformats.org/officeDocument/2006/relationships" xmlns:p="http://schemas.openxmlformats.org/presentationml/2006/main">
   <p:cSld>
     <p:spTree>
       <p:nvGrpSpPr>
@@ -659,7 +677,7 @@
         <p:nvSpPr>
           <p:cNvPr id="2" name="Slide Image Placeholder 1"/>
           <p:cNvSpPr>
-            <a:spLocks noGrp="1"/>
+            <a:spLocks noGrp="1" noRot="1" noChangeAspect="1"/>
           </p:cNvSpPr>
           <p:nvPr>
             <p:ph type="sldImg" idx="2"/>
@@ -674,7 +692,7 @@
             <a:spLocks noGrp="1"/>
           </p:cNvSpPr>
           <p:nvPr>
-            <p:ph type="body" idx="3" sz="quarter"/>
+            <p:ph type="body" sz="quarter" idx="3"/>
           </p:nvPr>
         </p:nvSpPr>
         <p:spPr/>
@@ -695,7 +713,7 @@
             <a:spLocks noGrp="1"/>
           </p:cNvSpPr>
           <p:nvPr>
-            <p:ph type="sldNum" idx="5" sz="quarter"/>
+            <p:ph type="sldNum" sz="quarter" idx="5"/>
           </p:nvPr>
         </p:nvSpPr>
         <p:spPr/>
@@ -709,7 +727,7 @@
 </file>
 
 <file path=ppt/notesSlides/notesSlide12.xml><?xml version="1.0" encoding="utf-8"?>
-<p:notes xmlns:a="http://schemas.openxmlformats.org/drawingml/2006/main" xmlns:p="http://schemas.openxmlformats.org/presentationml/2006/main" xmlns:r="http://schemas.openxmlformats.org/officeDocument/2006/relationships">
+<p:notes xmlns:a="http://schemas.openxmlformats.org/drawingml/2006/main" xmlns:r="http://schemas.openxmlformats.org/officeDocument/2006/relationships" xmlns:p="http://schemas.openxmlformats.org/presentationml/2006/main">
   <p:cSld>
     <p:spTree>
       <p:nvGrpSpPr>
@@ -729,7 +747,7 @@
         <p:nvSpPr>
           <p:cNvPr id="2" name="Slide Image Placeholder 1"/>
           <p:cNvSpPr>
-            <a:spLocks noGrp="1"/>
+            <a:spLocks noGrp="1" noRot="1" noChangeAspect="1"/>
           </p:cNvSpPr>
           <p:nvPr>
             <p:ph type="sldImg" idx="2"/>
@@ -744,7 +762,7 @@
             <a:spLocks noGrp="1"/>
           </p:cNvSpPr>
           <p:nvPr>
-            <p:ph type="body" idx="3" sz="quarter"/>
+            <p:ph type="body" sz="quarter" idx="3"/>
           </p:nvPr>
         </p:nvSpPr>
         <p:spPr/>
@@ -765,7 +783,7 @@
             <a:spLocks noGrp="1"/>
           </p:cNvSpPr>
           <p:nvPr>
-            <p:ph type="sldNum" idx="5" sz="quarter"/>
+            <p:ph type="sldNum" sz="quarter" idx="5"/>
           </p:nvPr>
         </p:nvSpPr>
         <p:spPr/>
@@ -779,7 +797,7 @@
 </file>
 
 <file path=ppt/notesSlides/notesSlide13.xml><?xml version="1.0" encoding="utf-8"?>
-<p:notes xmlns:a="http://schemas.openxmlformats.org/drawingml/2006/main" xmlns:p="http://schemas.openxmlformats.org/presentationml/2006/main" xmlns:r="http://schemas.openxmlformats.org/officeDocument/2006/relationships">
+<p:notes xmlns:a="http://schemas.openxmlformats.org/drawingml/2006/main" xmlns:r="http://schemas.openxmlformats.org/officeDocument/2006/relationships" xmlns:p="http://schemas.openxmlformats.org/presentationml/2006/main">
   <p:cSld>
     <p:spTree>
       <p:nvGrpSpPr>
@@ -799,7 +817,7 @@
         <p:nvSpPr>
           <p:cNvPr id="2" name="Slide Image Placeholder 1"/>
           <p:cNvSpPr>
-            <a:spLocks noGrp="1"/>
+            <a:spLocks noGrp="1" noRot="1" noChangeAspect="1"/>
           </p:cNvSpPr>
           <p:nvPr>
             <p:ph type="sldImg" idx="2"/>
@@ -814,7 +832,7 @@
             <a:spLocks noGrp="1"/>
           </p:cNvSpPr>
           <p:nvPr>
-            <p:ph type="body" idx="3" sz="quarter"/>
+            <p:ph type="body" sz="quarter" idx="3"/>
           </p:nvPr>
         </p:nvSpPr>
         <p:spPr/>
@@ -835,7 +853,7 @@
             <a:spLocks noGrp="1"/>
           </p:cNvSpPr>
           <p:nvPr>
-            <p:ph type="sldNum" idx="5" sz="quarter"/>
+            <p:ph type="sldNum" sz="quarter" idx="5"/>
           </p:nvPr>
         </p:nvSpPr>
         <p:spPr/>
@@ -849,7 +867,7 @@
 </file>
 
 <file path=ppt/notesSlides/notesSlide14.xml><?xml version="1.0" encoding="utf-8"?>
-<p:notes xmlns:a="http://schemas.openxmlformats.org/drawingml/2006/main" xmlns:p="http://schemas.openxmlformats.org/presentationml/2006/main" xmlns:r="http://schemas.openxmlformats.org/officeDocument/2006/relationships">
+<p:notes xmlns:a="http://schemas.openxmlformats.org/drawingml/2006/main" xmlns:r="http://schemas.openxmlformats.org/officeDocument/2006/relationships" xmlns:p="http://schemas.openxmlformats.org/presentationml/2006/main">
   <p:cSld>
     <p:spTree>
       <p:nvGrpSpPr>
@@ -869,7 +887,7 @@
         <p:nvSpPr>
           <p:cNvPr id="2" name="Slide Image Placeholder 1"/>
           <p:cNvSpPr>
-            <a:spLocks noGrp="1"/>
+            <a:spLocks noGrp="1" noRot="1" noChangeAspect="1"/>
           </p:cNvSpPr>
           <p:nvPr>
             <p:ph type="sldImg" idx="2"/>
@@ -884,7 +902,7 @@
             <a:spLocks noGrp="1"/>
           </p:cNvSpPr>
           <p:nvPr>
-            <p:ph type="body" idx="3" sz="quarter"/>
+            <p:ph type="body" sz="quarter" idx="3"/>
           </p:nvPr>
         </p:nvSpPr>
         <p:spPr/>
@@ -905,7 +923,7 @@
             <a:spLocks noGrp="1"/>
           </p:cNvSpPr>
           <p:nvPr>
-            <p:ph type="sldNum" idx="5" sz="quarter"/>
+            <p:ph type="sldNum" sz="quarter" idx="5"/>
           </p:nvPr>
         </p:nvSpPr>
         <p:spPr/>
@@ -919,7 +937,7 @@
 </file>
 
 <file path=ppt/notesSlides/notesSlide15.xml><?xml version="1.0" encoding="utf-8"?>
-<p:notes xmlns:a="http://schemas.openxmlformats.org/drawingml/2006/main" xmlns:p="http://schemas.openxmlformats.org/presentationml/2006/main" xmlns:r="http://schemas.openxmlformats.org/officeDocument/2006/relationships">
+<p:notes xmlns:a="http://schemas.openxmlformats.org/drawingml/2006/main" xmlns:r="http://schemas.openxmlformats.org/officeDocument/2006/relationships" xmlns:p="http://schemas.openxmlformats.org/presentationml/2006/main">
   <p:cSld>
     <p:spTree>
       <p:nvGrpSpPr>
@@ -939,7 +957,7 @@
         <p:nvSpPr>
           <p:cNvPr id="2" name="Slide Image Placeholder 1"/>
           <p:cNvSpPr>
-            <a:spLocks noGrp="1"/>
+            <a:spLocks noGrp="1" noRot="1" noChangeAspect="1"/>
           </p:cNvSpPr>
           <p:nvPr>
             <p:ph type="sldImg" idx="2"/>
@@ -954,7 +972,7 @@
             <a:spLocks noGrp="1"/>
           </p:cNvSpPr>
           <p:nvPr>
-            <p:ph type="body" idx="3" sz="quarter"/>
+            <p:ph type="body" sz="quarter" idx="3"/>
           </p:nvPr>
         </p:nvSpPr>
         <p:spPr/>
@@ -975,7 +993,7 @@
             <a:spLocks noGrp="1"/>
           </p:cNvSpPr>
           <p:nvPr>
-            <p:ph type="sldNum" idx="5" sz="quarter"/>
+            <p:ph type="sldNum" sz="quarter" idx="5"/>
           </p:nvPr>
         </p:nvSpPr>
         <p:spPr/>
@@ -989,7 +1007,7 @@
 </file>
 
 <file path=ppt/notesSlides/notesSlide16.xml><?xml version="1.0" encoding="utf-8"?>
-<p:notes xmlns:a="http://schemas.openxmlformats.org/drawingml/2006/main" xmlns:p="http://schemas.openxmlformats.org/presentationml/2006/main" xmlns:r="http://schemas.openxmlformats.org/officeDocument/2006/relationships">
+<p:notes xmlns:a="http://schemas.openxmlformats.org/drawingml/2006/main" xmlns:r="http://schemas.openxmlformats.org/officeDocument/2006/relationships" xmlns:p="http://schemas.openxmlformats.org/presentationml/2006/main">
   <p:cSld>
     <p:spTree>
       <p:nvGrpSpPr>
@@ -1009,7 +1027,7 @@
         <p:nvSpPr>
           <p:cNvPr id="2" name="Slide Image Placeholder 1"/>
           <p:cNvSpPr>
-            <a:spLocks noGrp="1"/>
+            <a:spLocks noGrp="1" noRot="1" noChangeAspect="1"/>
           </p:cNvSpPr>
           <p:nvPr>
             <p:ph type="sldImg" idx="2"/>
@@ -1024,7 +1042,7 @@
             <a:spLocks noGrp="1"/>
           </p:cNvSpPr>
           <p:nvPr>
-            <p:ph type="body" idx="3" sz="quarter"/>
+            <p:ph type="body" sz="quarter" idx="3"/>
           </p:nvPr>
         </p:nvSpPr>
         <p:spPr/>
@@ -1045,7 +1063,7 @@
             <a:spLocks noGrp="1"/>
           </p:cNvSpPr>
           <p:nvPr>
-            <p:ph type="sldNum" idx="5" sz="quarter"/>
+            <p:ph type="sldNum" sz="quarter" idx="5"/>
           </p:nvPr>
         </p:nvSpPr>
         <p:spPr/>
@@ -1059,7 +1077,7 @@
 </file>
 
 <file path=ppt/notesSlides/notesSlide17.xml><?xml version="1.0" encoding="utf-8"?>
-<p:notes xmlns:a="http://schemas.openxmlformats.org/drawingml/2006/main" xmlns:p="http://schemas.openxmlformats.org/presentationml/2006/main" xmlns:r="http://schemas.openxmlformats.org/officeDocument/2006/relationships">
+<p:notes xmlns:a="http://schemas.openxmlformats.org/drawingml/2006/main" xmlns:r="http://schemas.openxmlformats.org/officeDocument/2006/relationships" xmlns:p="http://schemas.openxmlformats.org/presentationml/2006/main">
   <p:cSld>
     <p:spTree>
       <p:nvGrpSpPr>
@@ -1079,7 +1097,7 @@
         <p:nvSpPr>
           <p:cNvPr id="2" name="Slide Image Placeholder 1"/>
           <p:cNvSpPr>
-            <a:spLocks noGrp="1"/>
+            <a:spLocks noGrp="1" noRot="1" noChangeAspect="1"/>
           </p:cNvSpPr>
           <p:nvPr>
             <p:ph type="sldImg" idx="2"/>
@@ -1094,7 +1112,7 @@
             <a:spLocks noGrp="1"/>
           </p:cNvSpPr>
           <p:nvPr>
-            <p:ph type="body" idx="3" sz="quarter"/>
+            <p:ph type="body" sz="quarter" idx="3"/>
           </p:nvPr>
         </p:nvSpPr>
         <p:spPr/>
@@ -1115,7 +1133,7 @@
             <a:spLocks noGrp="1"/>
           </p:cNvSpPr>
           <p:nvPr>
-            <p:ph type="sldNum" idx="5" sz="quarter"/>
+            <p:ph type="sldNum" sz="quarter" idx="5"/>
           </p:nvPr>
         </p:nvSpPr>
         <p:spPr/>
@@ -1129,7 +1147,7 @@
 </file>
 
 <file path=ppt/notesSlides/notesSlide18.xml><?xml version="1.0" encoding="utf-8"?>
-<p:notes xmlns:a="http://schemas.openxmlformats.org/drawingml/2006/main" xmlns:p="http://schemas.openxmlformats.org/presentationml/2006/main" xmlns:r="http://schemas.openxmlformats.org/officeDocument/2006/relationships">
+<p:notes xmlns:a="http://schemas.openxmlformats.org/drawingml/2006/main" xmlns:r="http://schemas.openxmlformats.org/officeDocument/2006/relationships" xmlns:p="http://schemas.openxmlformats.org/presentationml/2006/main">
   <p:cSld>
     <p:spTree>
       <p:nvGrpSpPr>
@@ -1149,7 +1167,7 @@
         <p:nvSpPr>
           <p:cNvPr id="2" name="Slide Image Placeholder 1"/>
           <p:cNvSpPr>
-            <a:spLocks noGrp="1"/>
+            <a:spLocks noGrp="1" noRot="1" noChangeAspect="1"/>
           </p:cNvSpPr>
           <p:nvPr>
             <p:ph type="sldImg" idx="2"/>
@@ -1164,7 +1182,7 @@
             <a:spLocks noGrp="1"/>
           </p:cNvSpPr>
           <p:nvPr>
-            <p:ph type="body" idx="3" sz="quarter"/>
+            <p:ph type="body" sz="quarter" idx="3"/>
           </p:nvPr>
         </p:nvSpPr>
         <p:spPr/>
@@ -1185,7 +1203,7 @@
             <a:spLocks noGrp="1"/>
           </p:cNvSpPr>
           <p:nvPr>
-            <p:ph type="sldNum" idx="5" sz="quarter"/>
+            <p:ph type="sldNum" sz="quarter" idx="5"/>
           </p:nvPr>
         </p:nvSpPr>
         <p:spPr/>
@@ -1199,7 +1217,7 @@
 </file>
 
 <file path=ppt/notesSlides/notesSlide19.xml><?xml version="1.0" encoding="utf-8"?>
-<p:notes xmlns:a="http://schemas.openxmlformats.org/drawingml/2006/main" xmlns:p="http://schemas.openxmlformats.org/presentationml/2006/main" xmlns:r="http://schemas.openxmlformats.org/officeDocument/2006/relationships">
+<p:notes xmlns:a="http://schemas.openxmlformats.org/drawingml/2006/main" xmlns:r="http://schemas.openxmlformats.org/officeDocument/2006/relationships" xmlns:p="http://schemas.openxmlformats.org/presentationml/2006/main">
   <p:cSld>
     <p:spTree>
       <p:nvGrpSpPr>
@@ -1219,7 +1237,7 @@
         <p:nvSpPr>
           <p:cNvPr id="2" name="Slide Image Placeholder 1"/>
           <p:cNvSpPr>
-            <a:spLocks noGrp="1"/>
+            <a:spLocks noGrp="1" noRot="1" noChangeAspect="1"/>
           </p:cNvSpPr>
           <p:nvPr>
             <p:ph type="sldImg" idx="2"/>
@@ -1234,7 +1252,7 @@
             <a:spLocks noGrp="1"/>
           </p:cNvSpPr>
           <p:nvPr>
-            <p:ph type="body" idx="3" sz="quarter"/>
+            <p:ph type="body" sz="quarter" idx="3"/>
           </p:nvPr>
         </p:nvSpPr>
         <p:spPr/>
@@ -1255,7 +1273,7 @@
             <a:spLocks noGrp="1"/>
           </p:cNvSpPr>
           <p:nvPr>
-            <p:ph type="sldNum" idx="5" sz="quarter"/>
+            <p:ph type="sldNum" sz="quarter" idx="5"/>
           </p:nvPr>
         </p:nvSpPr>
         <p:spPr/>
@@ -1269,7 +1287,7 @@
 </file>
 
 <file path=ppt/notesSlides/notesSlide2.xml><?xml version="1.0" encoding="utf-8"?>
-<p:notes xmlns:a="http://schemas.openxmlformats.org/drawingml/2006/main" xmlns:p="http://schemas.openxmlformats.org/presentationml/2006/main" xmlns:r="http://schemas.openxmlformats.org/officeDocument/2006/relationships">
+<p:notes xmlns:a="http://schemas.openxmlformats.org/drawingml/2006/main" xmlns:r="http://schemas.openxmlformats.org/officeDocument/2006/relationships" xmlns:p="http://schemas.openxmlformats.org/presentationml/2006/main">
   <p:cSld>
     <p:spTree>
       <p:nvGrpSpPr>
@@ -1289,7 +1307,7 @@
         <p:nvSpPr>
           <p:cNvPr id="2" name="Slide Image Placeholder 1"/>
           <p:cNvSpPr>
-            <a:spLocks noGrp="1"/>
+            <a:spLocks noGrp="1" noRot="1" noChangeAspect="1"/>
           </p:cNvSpPr>
           <p:nvPr>
             <p:ph type="sldImg" idx="2"/>
@@ -1304,7 +1322,7 @@
             <a:spLocks noGrp="1"/>
           </p:cNvSpPr>
           <p:nvPr>
-            <p:ph type="body" idx="3" sz="quarter"/>
+            <p:ph type="body" sz="quarter" idx="3"/>
           </p:nvPr>
         </p:nvSpPr>
         <p:spPr/>
@@ -1325,7 +1343,7 @@
             <a:spLocks noGrp="1"/>
           </p:cNvSpPr>
           <p:nvPr>
-            <p:ph type="sldNum" idx="5" sz="quarter"/>
+            <p:ph type="sldNum" sz="quarter" idx="5"/>
           </p:nvPr>
         </p:nvSpPr>
         <p:spPr/>
@@ -1339,7 +1357,7 @@
 </file>
 
 <file path=ppt/notesSlides/notesSlide20.xml><?xml version="1.0" encoding="utf-8"?>
-<p:notes xmlns:a="http://schemas.openxmlformats.org/drawingml/2006/main" xmlns:p="http://schemas.openxmlformats.org/presentationml/2006/main" xmlns:r="http://schemas.openxmlformats.org/officeDocument/2006/relationships">
+<p:notes xmlns:a="http://schemas.openxmlformats.org/drawingml/2006/main" xmlns:r="http://schemas.openxmlformats.org/officeDocument/2006/relationships" xmlns:p="http://schemas.openxmlformats.org/presentationml/2006/main">
   <p:cSld>
     <p:spTree>
       <p:nvGrpSpPr>
@@ -1359,7 +1377,7 @@
         <p:nvSpPr>
           <p:cNvPr id="2" name="Slide Image Placeholder 1"/>
           <p:cNvSpPr>
-            <a:spLocks noGrp="1"/>
+            <a:spLocks noGrp="1" noRot="1" noChangeAspect="1"/>
           </p:cNvSpPr>
           <p:nvPr>
             <p:ph type="sldImg" idx="2"/>
@@ -1374,7 +1392,7 @@
             <a:spLocks noGrp="1"/>
           </p:cNvSpPr>
           <p:nvPr>
-            <p:ph type="body" idx="3" sz="quarter"/>
+            <p:ph type="body" sz="quarter" idx="3"/>
           </p:nvPr>
         </p:nvSpPr>
         <p:spPr/>
@@ -1395,7 +1413,7 @@
             <a:spLocks noGrp="1"/>
           </p:cNvSpPr>
           <p:nvPr>
-            <p:ph type="sldNum" idx="5" sz="quarter"/>
+            <p:ph type="sldNum" sz="quarter" idx="5"/>
           </p:nvPr>
         </p:nvSpPr>
         <p:spPr/>
@@ -1409,7 +1427,7 @@
 </file>
 
 <file path=ppt/notesSlides/notesSlide21.xml><?xml version="1.0" encoding="utf-8"?>
-<p:notes xmlns:a="http://schemas.openxmlformats.org/drawingml/2006/main" xmlns:p="http://schemas.openxmlformats.org/presentationml/2006/main" xmlns:r="http://schemas.openxmlformats.org/officeDocument/2006/relationships">
+<p:notes xmlns:a="http://schemas.openxmlformats.org/drawingml/2006/main" xmlns:r="http://schemas.openxmlformats.org/officeDocument/2006/relationships" xmlns:p="http://schemas.openxmlformats.org/presentationml/2006/main">
   <p:cSld>
     <p:spTree>
       <p:nvGrpSpPr>
@@ -1429,7 +1447,7 @@
         <p:nvSpPr>
           <p:cNvPr id="2" name="Slide Image Placeholder 1"/>
           <p:cNvSpPr>
-            <a:spLocks noGrp="1"/>
+            <a:spLocks noGrp="1" noRot="1" noChangeAspect="1"/>
           </p:cNvSpPr>
           <p:nvPr>
             <p:ph type="sldImg" idx="2"/>
@@ -1444,7 +1462,7 @@
             <a:spLocks noGrp="1"/>
           </p:cNvSpPr>
           <p:nvPr>
-            <p:ph type="body" idx="3" sz="quarter"/>
+            <p:ph type="body" sz="quarter" idx="3"/>
           </p:nvPr>
         </p:nvSpPr>
         <p:spPr/>
@@ -1465,7 +1483,7 @@
             <a:spLocks noGrp="1"/>
           </p:cNvSpPr>
           <p:nvPr>
-            <p:ph type="sldNum" idx="5" sz="quarter"/>
+            <p:ph type="sldNum" sz="quarter" idx="5"/>
           </p:nvPr>
         </p:nvSpPr>
         <p:spPr/>
@@ -1479,7 +1497,7 @@
 </file>
 
 <file path=ppt/notesSlides/notesSlide22.xml><?xml version="1.0" encoding="utf-8"?>
-<p:notes xmlns:a="http://schemas.openxmlformats.org/drawingml/2006/main" xmlns:p="http://schemas.openxmlformats.org/presentationml/2006/main" xmlns:r="http://schemas.openxmlformats.org/officeDocument/2006/relationships">
+<p:notes xmlns:a="http://schemas.openxmlformats.org/drawingml/2006/main" xmlns:r="http://schemas.openxmlformats.org/officeDocument/2006/relationships" xmlns:p="http://schemas.openxmlformats.org/presentationml/2006/main">
   <p:cSld>
     <p:spTree>
       <p:nvGrpSpPr>
@@ -1499,7 +1517,7 @@
         <p:nvSpPr>
           <p:cNvPr id="2" name="Slide Image Placeholder 1"/>
           <p:cNvSpPr>
-            <a:spLocks noGrp="1"/>
+            <a:spLocks noGrp="1" noRot="1" noChangeAspect="1"/>
           </p:cNvSpPr>
           <p:nvPr>
             <p:ph type="sldImg" idx="2"/>
@@ -1514,7 +1532,7 @@
             <a:spLocks noGrp="1"/>
           </p:cNvSpPr>
           <p:nvPr>
-            <p:ph type="body" idx="3" sz="quarter"/>
+            <p:ph type="body" sz="quarter" idx="3"/>
           </p:nvPr>
         </p:nvSpPr>
         <p:spPr/>
@@ -1535,7 +1553,7 @@
             <a:spLocks noGrp="1"/>
           </p:cNvSpPr>
           <p:nvPr>
-            <p:ph type="sldNum" idx="5" sz="quarter"/>
+            <p:ph type="sldNum" sz="quarter" idx="5"/>
           </p:nvPr>
         </p:nvSpPr>
         <p:spPr/>
@@ -1549,7 +1567,7 @@
 </file>
 
 <file path=ppt/notesSlides/notesSlide23.xml><?xml version="1.0" encoding="utf-8"?>
-<p:notes xmlns:a="http://schemas.openxmlformats.org/drawingml/2006/main" xmlns:p="http://schemas.openxmlformats.org/presentationml/2006/main" xmlns:r="http://schemas.openxmlformats.org/officeDocument/2006/relationships">
+<p:notes xmlns:a="http://schemas.openxmlformats.org/drawingml/2006/main" xmlns:r="http://schemas.openxmlformats.org/officeDocument/2006/relationships" xmlns:p="http://schemas.openxmlformats.org/presentationml/2006/main">
   <p:cSld>
     <p:spTree>
       <p:nvGrpSpPr>
@@ -1569,7 +1587,7 @@
         <p:nvSpPr>
           <p:cNvPr id="2" name="Slide Image Placeholder 1"/>
           <p:cNvSpPr>
-            <a:spLocks noGrp="1"/>
+            <a:spLocks noGrp="1" noRot="1" noChangeAspect="1"/>
           </p:cNvSpPr>
           <p:nvPr>
             <p:ph type="sldImg" idx="2"/>
@@ -1584,7 +1602,7 @@
             <a:spLocks noGrp="1"/>
           </p:cNvSpPr>
           <p:nvPr>
-            <p:ph type="body" idx="3" sz="quarter"/>
+            <p:ph type="body" sz="quarter" idx="3"/>
           </p:nvPr>
         </p:nvSpPr>
         <p:spPr/>
@@ -1605,7 +1623,7 @@
             <a:spLocks noGrp="1"/>
           </p:cNvSpPr>
           <p:nvPr>
-            <p:ph type="sldNum" idx="5" sz="quarter"/>
+            <p:ph type="sldNum" sz="quarter" idx="5"/>
           </p:nvPr>
         </p:nvSpPr>
         <p:spPr/>
@@ -1619,7 +1637,7 @@
 </file>
 
 <file path=ppt/notesSlides/notesSlide24.xml><?xml version="1.0" encoding="utf-8"?>
-<p:notes xmlns:a="http://schemas.openxmlformats.org/drawingml/2006/main" xmlns:p="http://schemas.openxmlformats.org/presentationml/2006/main" xmlns:r="http://schemas.openxmlformats.org/officeDocument/2006/relationships">
+<p:notes xmlns:a="http://schemas.openxmlformats.org/drawingml/2006/main" xmlns:r="http://schemas.openxmlformats.org/officeDocument/2006/relationships" xmlns:p="http://schemas.openxmlformats.org/presentationml/2006/main">
   <p:cSld>
     <p:spTree>
       <p:nvGrpSpPr>
@@ -1639,7 +1657,7 @@
         <p:nvSpPr>
           <p:cNvPr id="2" name="Slide Image Placeholder 1"/>
           <p:cNvSpPr>
-            <a:spLocks noGrp="1"/>
+            <a:spLocks noGrp="1" noRot="1" noChangeAspect="1"/>
           </p:cNvSpPr>
           <p:nvPr>
             <p:ph type="sldImg" idx="2"/>
@@ -1654,7 +1672,7 @@
             <a:spLocks noGrp="1"/>
           </p:cNvSpPr>
           <p:nvPr>
-            <p:ph type="body" idx="3" sz="quarter"/>
+            <p:ph type="body" sz="quarter" idx="3"/>
           </p:nvPr>
         </p:nvSpPr>
         <p:spPr/>
@@ -1675,7 +1693,7 @@
             <a:spLocks noGrp="1"/>
           </p:cNvSpPr>
           <p:nvPr>
-            <p:ph type="sldNum" idx="5" sz="quarter"/>
+            <p:ph type="sldNum" sz="quarter" idx="5"/>
           </p:nvPr>
         </p:nvSpPr>
         <p:spPr/>
@@ -1689,7 +1707,7 @@
 </file>
 
 <file path=ppt/notesSlides/notesSlide25.xml><?xml version="1.0" encoding="utf-8"?>
-<p:notes xmlns:a="http://schemas.openxmlformats.org/drawingml/2006/main" xmlns:p="http://schemas.openxmlformats.org/presentationml/2006/main" xmlns:r="http://schemas.openxmlformats.org/officeDocument/2006/relationships">
+<p:notes xmlns:a="http://schemas.openxmlformats.org/drawingml/2006/main" xmlns:r="http://schemas.openxmlformats.org/officeDocument/2006/relationships" xmlns:p="http://schemas.openxmlformats.org/presentationml/2006/main">
   <p:cSld>
     <p:spTree>
       <p:nvGrpSpPr>
@@ -1709,7 +1727,7 @@
         <p:nvSpPr>
           <p:cNvPr id="2" name="Slide Image Placeholder 1"/>
           <p:cNvSpPr>
-            <a:spLocks noGrp="1"/>
+            <a:spLocks noGrp="1" noRot="1" noChangeAspect="1"/>
           </p:cNvSpPr>
           <p:nvPr>
             <p:ph type="sldImg" idx="2"/>
@@ -1724,7 +1742,7 @@
             <a:spLocks noGrp="1"/>
           </p:cNvSpPr>
           <p:nvPr>
-            <p:ph type="body" idx="3" sz="quarter"/>
+            <p:ph type="body" sz="quarter" idx="3"/>
           </p:nvPr>
         </p:nvSpPr>
         <p:spPr/>
@@ -1745,7 +1763,7 @@
             <a:spLocks noGrp="1"/>
           </p:cNvSpPr>
           <p:nvPr>
-            <p:ph type="sldNum" idx="5" sz="quarter"/>
+            <p:ph type="sldNum" sz="quarter" idx="5"/>
           </p:nvPr>
         </p:nvSpPr>
         <p:spPr/>
@@ -1759,7 +1777,7 @@
 </file>
 
 <file path=ppt/notesSlides/notesSlide3.xml><?xml version="1.0" encoding="utf-8"?>
-<p:notes xmlns:a="http://schemas.openxmlformats.org/drawingml/2006/main" xmlns:p="http://schemas.openxmlformats.org/presentationml/2006/main" xmlns:r="http://schemas.openxmlformats.org/officeDocument/2006/relationships">
+<p:notes xmlns:a="http://schemas.openxmlformats.org/drawingml/2006/main" xmlns:r="http://schemas.openxmlformats.org/officeDocument/2006/relationships" xmlns:p="http://schemas.openxmlformats.org/presentationml/2006/main">
   <p:cSld>
     <p:spTree>
       <p:nvGrpSpPr>
@@ -1779,7 +1797,7 @@
         <p:nvSpPr>
           <p:cNvPr id="2" name="Slide Image Placeholder 1"/>
           <p:cNvSpPr>
-            <a:spLocks noGrp="1"/>
+            <a:spLocks noGrp="1" noRot="1" noChangeAspect="1"/>
           </p:cNvSpPr>
           <p:nvPr>
             <p:ph type="sldImg" idx="2"/>
@@ -1794,7 +1812,7 @@
             <a:spLocks noGrp="1"/>
           </p:cNvSpPr>
           <p:nvPr>
-            <p:ph type="body" idx="3" sz="quarter"/>
+            <p:ph type="body" sz="quarter" idx="3"/>
           </p:nvPr>
         </p:nvSpPr>
         <p:spPr/>
@@ -1815,7 +1833,7 @@
             <a:spLocks noGrp="1"/>
           </p:cNvSpPr>
           <p:nvPr>
-            <p:ph type="sldNum" idx="5" sz="quarter"/>
+            <p:ph type="sldNum" sz="quarter" idx="5"/>
           </p:nvPr>
         </p:nvSpPr>
         <p:spPr/>
@@ -1829,7 +1847,7 @@
 </file>
 
 <file path=ppt/notesSlides/notesSlide4.xml><?xml version="1.0" encoding="utf-8"?>
-<p:notes xmlns:a="http://schemas.openxmlformats.org/drawingml/2006/main" xmlns:p="http://schemas.openxmlformats.org/presentationml/2006/main" xmlns:r="http://schemas.openxmlformats.org/officeDocument/2006/relationships">
+<p:notes xmlns:a="http://schemas.openxmlformats.org/drawingml/2006/main" xmlns:r="http://schemas.openxmlformats.org/officeDocument/2006/relationships" xmlns:p="http://schemas.openxmlformats.org/presentationml/2006/main">
   <p:cSld>
     <p:spTree>
       <p:nvGrpSpPr>
@@ -1849,7 +1867,7 @@
         <p:nvSpPr>
           <p:cNvPr id="2" name="Slide Image Placeholder 1"/>
           <p:cNvSpPr>
-            <a:spLocks noGrp="1"/>
+            <a:spLocks noGrp="1" noRot="1" noChangeAspect="1"/>
           </p:cNvSpPr>
           <p:nvPr>
             <p:ph type="sldImg" idx="2"/>
@@ -1864,7 +1882,7 @@
             <a:spLocks noGrp="1"/>
           </p:cNvSpPr>
           <p:nvPr>
-            <p:ph type="body" idx="3" sz="quarter"/>
+            <p:ph type="body" sz="quarter" idx="3"/>
           </p:nvPr>
         </p:nvSpPr>
         <p:spPr/>
@@ -1885,7 +1903,7 @@
             <a:spLocks noGrp="1"/>
           </p:cNvSpPr>
           <p:nvPr>
-            <p:ph type="sldNum" idx="5" sz="quarter"/>
+            <p:ph type="sldNum" sz="quarter" idx="5"/>
           </p:nvPr>
         </p:nvSpPr>
         <p:spPr/>
@@ -1899,7 +1917,7 @@
 </file>
 
 <file path=ppt/notesSlides/notesSlide5.xml><?xml version="1.0" encoding="utf-8"?>
-<p:notes xmlns:a="http://schemas.openxmlformats.org/drawingml/2006/main" xmlns:p="http://schemas.openxmlformats.org/presentationml/2006/main" xmlns:r="http://schemas.openxmlformats.org/officeDocument/2006/relationships">
+<p:notes xmlns:a="http://schemas.openxmlformats.org/drawingml/2006/main" xmlns:r="http://schemas.openxmlformats.org/officeDocument/2006/relationships" xmlns:p="http://schemas.openxmlformats.org/presentationml/2006/main">
   <p:cSld>
     <p:spTree>
       <p:nvGrpSpPr>
@@ -1919,7 +1937,7 @@
         <p:nvSpPr>
           <p:cNvPr id="2" name="Slide Image Placeholder 1"/>
           <p:cNvSpPr>
-            <a:spLocks noGrp="1"/>
+            <a:spLocks noGrp="1" noRot="1" noChangeAspect="1"/>
           </p:cNvSpPr>
           <p:nvPr>
             <p:ph type="sldImg" idx="2"/>
@@ -1934,7 +1952,7 @@
             <a:spLocks noGrp="1"/>
           </p:cNvSpPr>
           <p:nvPr>
-            <p:ph type="body" idx="3" sz="quarter"/>
+            <p:ph type="body" sz="quarter" idx="3"/>
           </p:nvPr>
         </p:nvSpPr>
         <p:spPr/>
@@ -1955,7 +1973,7 @@
             <a:spLocks noGrp="1"/>
           </p:cNvSpPr>
           <p:nvPr>
-            <p:ph type="sldNum" idx="5" sz="quarter"/>
+            <p:ph type="sldNum" sz="quarter" idx="5"/>
           </p:nvPr>
         </p:nvSpPr>
         <p:spPr/>
@@ -1969,7 +1987,7 @@
 </file>
 
 <file path=ppt/notesSlides/notesSlide6.xml><?xml version="1.0" encoding="utf-8"?>
-<p:notes xmlns:a="http://schemas.openxmlformats.org/drawingml/2006/main" xmlns:p="http://schemas.openxmlformats.org/presentationml/2006/main" xmlns:r="http://schemas.openxmlformats.org/officeDocument/2006/relationships">
+<p:notes xmlns:a="http://schemas.openxmlformats.org/drawingml/2006/main" xmlns:r="http://schemas.openxmlformats.org/officeDocument/2006/relationships" xmlns:p="http://schemas.openxmlformats.org/presentationml/2006/main">
   <p:cSld>
     <p:spTree>
       <p:nvGrpSpPr>
@@ -1989,7 +2007,7 @@
         <p:nvSpPr>
           <p:cNvPr id="2" name="Slide Image Placeholder 1"/>
           <p:cNvSpPr>
-            <a:spLocks noGrp="1"/>
+            <a:spLocks noGrp="1" noRot="1" noChangeAspect="1"/>
           </p:cNvSpPr>
           <p:nvPr>
             <p:ph type="sldImg" idx="2"/>
@@ -2004,7 +2022,7 @@
             <a:spLocks noGrp="1"/>
           </p:cNvSpPr>
           <p:nvPr>
-            <p:ph type="body" idx="3" sz="quarter"/>
+            <p:ph type="body" sz="quarter" idx="3"/>
           </p:nvPr>
         </p:nvSpPr>
         <p:spPr/>
@@ -2025,7 +2043,7 @@
             <a:spLocks noGrp="1"/>
           </p:cNvSpPr>
           <p:nvPr>
-            <p:ph type="sldNum" idx="5" sz="quarter"/>
+            <p:ph type="sldNum" sz="quarter" idx="5"/>
           </p:nvPr>
         </p:nvSpPr>
         <p:spPr/>
@@ -2039,7 +2057,7 @@
 </file>
 
 <file path=ppt/notesSlides/notesSlide7.xml><?xml version="1.0" encoding="utf-8"?>
-<p:notes xmlns:a="http://schemas.openxmlformats.org/drawingml/2006/main" xmlns:p="http://schemas.openxmlformats.org/presentationml/2006/main" xmlns:r="http://schemas.openxmlformats.org/officeDocument/2006/relationships">
+<p:notes xmlns:a="http://schemas.openxmlformats.org/drawingml/2006/main" xmlns:r="http://schemas.openxmlformats.org/officeDocument/2006/relationships" xmlns:p="http://schemas.openxmlformats.org/presentationml/2006/main">
   <p:cSld>
     <p:spTree>
       <p:nvGrpSpPr>
@@ -2059,7 +2077,7 @@
         <p:nvSpPr>
           <p:cNvPr id="2" name="Slide Image Placeholder 1"/>
           <p:cNvSpPr>
-            <a:spLocks noGrp="1"/>
+            <a:spLocks noGrp="1" noRot="1" noChangeAspect="1"/>
           </p:cNvSpPr>
           <p:nvPr>
             <p:ph type="sldImg" idx="2"/>
@@ -2074,7 +2092,7 @@
             <a:spLocks noGrp="1"/>
           </p:cNvSpPr>
           <p:nvPr>
-            <p:ph type="body" idx="3" sz="quarter"/>
+            <p:ph type="body" sz="quarter" idx="3"/>
           </p:nvPr>
         </p:nvSpPr>
         <p:spPr/>
@@ -2095,7 +2113,7 @@
             <a:spLocks noGrp="1"/>
           </p:cNvSpPr>
           <p:nvPr>
-            <p:ph type="sldNum" idx="5" sz="quarter"/>
+            <p:ph type="sldNum" sz="quarter" idx="5"/>
           </p:nvPr>
         </p:nvSpPr>
         <p:spPr/>
@@ -2109,7 +2127,7 @@
 </file>
 
 <file path=ppt/notesSlides/notesSlide8.xml><?xml version="1.0" encoding="utf-8"?>
-<p:notes xmlns:a="http://schemas.openxmlformats.org/drawingml/2006/main" xmlns:p="http://schemas.openxmlformats.org/presentationml/2006/main" xmlns:r="http://schemas.openxmlformats.org/officeDocument/2006/relationships">
+<p:notes xmlns:a="http://schemas.openxmlformats.org/drawingml/2006/main" xmlns:r="http://schemas.openxmlformats.org/officeDocument/2006/relationships" xmlns:p="http://schemas.openxmlformats.org/presentationml/2006/main">
   <p:cSld>
     <p:spTree>
       <p:nvGrpSpPr>
@@ -2129,7 +2147,7 @@
         <p:nvSpPr>
           <p:cNvPr id="2" name="Slide Image Placeholder 1"/>
           <p:cNvSpPr>
-            <a:spLocks noGrp="1"/>
+            <a:spLocks noGrp="1" noRot="1" noChangeAspect="1"/>
           </p:cNvSpPr>
           <p:nvPr>
             <p:ph type="sldImg" idx="2"/>
@@ -2144,7 +2162,7 @@
             <a:spLocks noGrp="1"/>
           </p:cNvSpPr>
           <p:nvPr>
-            <p:ph type="body" idx="3" sz="quarter"/>
+            <p:ph type="body" sz="quarter" idx="3"/>
           </p:nvPr>
         </p:nvSpPr>
         <p:spPr/>
@@ -2165,7 +2183,7 @@
             <a:spLocks noGrp="1"/>
           </p:cNvSpPr>
           <p:nvPr>
-            <p:ph type="sldNum" idx="5" sz="quarter"/>
+            <p:ph type="sldNum" sz="quarter" idx="5"/>
           </p:nvPr>
         </p:nvSpPr>
         <p:spPr/>
@@ -2179,7 +2197,7 @@
 </file>
 
 <file path=ppt/notesSlides/notesSlide9.xml><?xml version="1.0" encoding="utf-8"?>
-<p:notes xmlns:a="http://schemas.openxmlformats.org/drawingml/2006/main" xmlns:p="http://schemas.openxmlformats.org/presentationml/2006/main" xmlns:r="http://schemas.openxmlformats.org/officeDocument/2006/relationships">
+<p:notes xmlns:a="http://schemas.openxmlformats.org/drawingml/2006/main" xmlns:r="http://schemas.openxmlformats.org/officeDocument/2006/relationships" xmlns:p="http://schemas.openxmlformats.org/presentationml/2006/main">
   <p:cSld>
     <p:spTree>
       <p:nvGrpSpPr>
@@ -2199,7 +2217,7 @@
         <p:nvSpPr>
           <p:cNvPr id="2" name="Slide Image Placeholder 1"/>
           <p:cNvSpPr>
-            <a:spLocks noGrp="1"/>
+            <a:spLocks noGrp="1" noRot="1" noChangeAspect="1"/>
           </p:cNvSpPr>
           <p:nvPr>
             <p:ph type="sldImg" idx="2"/>
@@ -2214,7 +2232,7 @@
             <a:spLocks noGrp="1"/>
           </p:cNvSpPr>
           <p:nvPr>
-            <p:ph type="body" idx="3" sz="quarter"/>
+            <p:ph type="body" sz="quarter" idx="3"/>
           </p:nvPr>
         </p:nvSpPr>
         <p:spPr/>
@@ -2235,7 +2253,7 @@
             <a:spLocks noGrp="1"/>
           </p:cNvSpPr>
           <p:nvPr>
-            <p:ph type="sldNum" idx="5" sz="quarter"/>
+            <p:ph type="sldNum" sz="quarter" idx="5"/>
           </p:nvPr>
         </p:nvSpPr>
         <p:spPr/>
@@ -2286,10 +2304,9 @@
           <a:lstStyle/>
           <a:p>
             <a:r>
-              <a:rPr lang="en-US" smtClean="0"/>
+              <a:rPr lang="en-US"/>
               <a:t>Click to edit Master title style</a:t>
             </a:r>
-            <a:endParaRPr lang="en-US"/>
           </a:p>
         </p:txBody>
       </p:sp>
@@ -2405,10 +2422,9 @@
           </a:lstStyle>
           <a:p>
             <a:r>
-              <a:rPr lang="en-US" smtClean="0"/>
+              <a:rPr lang="en-US"/>
               <a:t>Click to edit Master subtitle style</a:t>
             </a:r>
-            <a:endParaRPr lang="en-US"/>
           </a:p>
         </p:txBody>
       </p:sp>
@@ -2429,7 +2445,7 @@
           <a:p>
             <a:fld id="{5BCAD085-E8A6-8845-BD4E-CB4CCA059FC4}" type="datetimeFigureOut">
               <a:rPr lang="en-US" smtClean="0"/>
-              <a:t>1/27/13</a:t>
+              <a:t>8/12/2026</a:t>
             </a:fld>
             <a:endParaRPr lang="en-US"/>
           </a:p>
@@ -2523,10 +2539,9 @@
           <a:lstStyle/>
           <a:p>
             <a:r>
-              <a:rPr lang="en-US" smtClean="0"/>
+              <a:rPr lang="en-US"/>
               <a:t>Click to edit Master title style</a:t>
             </a:r>
-            <a:endParaRPr lang="en-US"/>
           </a:p>
         </p:txBody>
       </p:sp>
@@ -2547,38 +2562,37 @@
           <a:p>
             <a:pPr lvl="0"/>
             <a:r>
-              <a:rPr lang="en-US" smtClean="0"/>
+              <a:rPr lang="en-US"/>
               <a:t>Click to edit Master text styles</a:t>
             </a:r>
           </a:p>
           <a:p>
             <a:pPr lvl="1"/>
             <a:r>
-              <a:rPr lang="en-US" smtClean="0"/>
+              <a:rPr lang="en-US"/>
               <a:t>Second level</a:t>
             </a:r>
           </a:p>
           <a:p>
             <a:pPr lvl="2"/>
             <a:r>
-              <a:rPr lang="en-US" smtClean="0"/>
+              <a:rPr lang="en-US"/>
               <a:t>Third level</a:t>
             </a:r>
           </a:p>
           <a:p>
             <a:pPr lvl="3"/>
             <a:r>
-              <a:rPr lang="en-US" smtClean="0"/>
+              <a:rPr lang="en-US"/>
               <a:t>Fourth level</a:t>
             </a:r>
           </a:p>
           <a:p>
             <a:pPr lvl="4"/>
             <a:r>
-              <a:rPr lang="en-US" smtClean="0"/>
+              <a:rPr lang="en-US"/>
               <a:t>Fifth level</a:t>
             </a:r>
-            <a:endParaRPr lang="en-US"/>
           </a:p>
         </p:txBody>
       </p:sp>
@@ -2599,7 +2613,7 @@
           <a:p>
             <a:fld id="{5BCAD085-E8A6-8845-BD4E-CB4CCA059FC4}" type="datetimeFigureOut">
               <a:rPr lang="en-US" smtClean="0"/>
-              <a:t>1/27/13</a:t>
+              <a:t>8/12/2026</a:t>
             </a:fld>
             <a:endParaRPr lang="en-US"/>
           </a:p>
@@ -2698,10 +2712,9 @@
           <a:lstStyle/>
           <a:p>
             <a:r>
-              <a:rPr lang="en-US" smtClean="0"/>
+              <a:rPr lang="en-US"/>
               <a:t>Click to edit Master title style</a:t>
             </a:r>
-            <a:endParaRPr lang="en-US"/>
           </a:p>
         </p:txBody>
       </p:sp>
@@ -2727,38 +2740,37 @@
           <a:p>
             <a:pPr lvl="0"/>
             <a:r>
-              <a:rPr lang="en-US" smtClean="0"/>
+              <a:rPr lang="en-US"/>
               <a:t>Click to edit Master text styles</a:t>
             </a:r>
           </a:p>
           <a:p>
             <a:pPr lvl="1"/>
             <a:r>
-              <a:rPr lang="en-US" smtClean="0"/>
+              <a:rPr lang="en-US"/>
               <a:t>Second level</a:t>
             </a:r>
           </a:p>
           <a:p>
             <a:pPr lvl="2"/>
             <a:r>
-              <a:rPr lang="en-US" smtClean="0"/>
+              <a:rPr lang="en-US"/>
               <a:t>Third level</a:t>
             </a:r>
           </a:p>
           <a:p>
             <a:pPr lvl="3"/>
             <a:r>
-              <a:rPr lang="en-US" smtClean="0"/>
+              <a:rPr lang="en-US"/>
               <a:t>Fourth level</a:t>
             </a:r>
           </a:p>
           <a:p>
             <a:pPr lvl="4"/>
             <a:r>
-              <a:rPr lang="en-US" smtClean="0"/>
+              <a:rPr lang="en-US"/>
               <a:t>Fifth level</a:t>
             </a:r>
-            <a:endParaRPr lang="en-US"/>
           </a:p>
         </p:txBody>
       </p:sp>
@@ -2779,7 +2791,7 @@
           <a:p>
             <a:fld id="{5BCAD085-E8A6-8845-BD4E-CB4CCA059FC4}" type="datetimeFigureOut">
               <a:rPr lang="en-US" smtClean="0"/>
-              <a:t>1/27/13</a:t>
+              <a:t>8/12/2026</a:t>
             </a:fld>
             <a:endParaRPr lang="en-US"/>
           </a:p>
@@ -2873,10 +2885,9 @@
           <a:lstStyle/>
           <a:p>
             <a:r>
-              <a:rPr lang="en-US" smtClean="0"/>
+              <a:rPr lang="en-US"/>
               <a:t>Click to edit Master title style</a:t>
             </a:r>
-            <a:endParaRPr lang="en-US"/>
           </a:p>
         </p:txBody>
       </p:sp>
@@ -2897,38 +2908,37 @@
           <a:p>
             <a:pPr lvl="0"/>
             <a:r>
-              <a:rPr lang="en-US" smtClean="0"/>
+              <a:rPr lang="en-US"/>
               <a:t>Click to edit Master text styles</a:t>
             </a:r>
           </a:p>
           <a:p>
             <a:pPr lvl="1"/>
             <a:r>
-              <a:rPr lang="en-US" smtClean="0"/>
+              <a:rPr lang="en-US"/>
               <a:t>Second level</a:t>
             </a:r>
           </a:p>
           <a:p>
             <a:pPr lvl="2"/>
             <a:r>
-              <a:rPr lang="en-US" smtClean="0"/>
+              <a:rPr lang="en-US"/>
               <a:t>Third level</a:t>
             </a:r>
           </a:p>
           <a:p>
             <a:pPr lvl="3"/>
             <a:r>
-              <a:rPr lang="en-US" smtClean="0"/>
+              <a:rPr lang="en-US"/>
               <a:t>Fourth level</a:t>
             </a:r>
           </a:p>
           <a:p>
             <a:pPr lvl="4"/>
             <a:r>
-              <a:rPr lang="en-US" smtClean="0"/>
+              <a:rPr lang="en-US"/>
               <a:t>Fifth level</a:t>
             </a:r>
-            <a:endParaRPr lang="en-US"/>
           </a:p>
         </p:txBody>
       </p:sp>
@@ -2949,7 +2959,7 @@
           <a:p>
             <a:fld id="{5BCAD085-E8A6-8845-BD4E-CB4CCA059FC4}" type="datetimeFigureOut">
               <a:rPr lang="en-US" smtClean="0"/>
-              <a:t>1/27/13</a:t>
+              <a:t>8/12/2026</a:t>
             </a:fld>
             <a:endParaRPr lang="en-US"/>
           </a:p>
@@ -3052,10 +3062,9 @@
           </a:lstStyle>
           <a:p>
             <a:r>
-              <a:rPr lang="en-US" smtClean="0"/>
+              <a:rPr lang="en-US"/>
               <a:t>Click to edit Master title style</a:t>
             </a:r>
-            <a:endParaRPr lang="en-US"/>
           </a:p>
         </p:txBody>
       </p:sp>
@@ -3172,7 +3181,7 @@
           <a:p>
             <a:pPr lvl="0"/>
             <a:r>
-              <a:rPr lang="en-US" smtClean="0"/>
+              <a:rPr lang="en-US"/>
               <a:t>Click to edit Master text styles</a:t>
             </a:r>
           </a:p>
@@ -3195,7 +3204,7 @@
           <a:p>
             <a:fld id="{5BCAD085-E8A6-8845-BD4E-CB4CCA059FC4}" type="datetimeFigureOut">
               <a:rPr lang="en-US" smtClean="0"/>
-              <a:t>1/27/13</a:t>
+              <a:t>8/12/2026</a:t>
             </a:fld>
             <a:endParaRPr lang="en-US"/>
           </a:p>
@@ -3289,10 +3298,9 @@
           <a:lstStyle/>
           <a:p>
             <a:r>
-              <a:rPr lang="en-US" smtClean="0"/>
+              <a:rPr lang="en-US"/>
               <a:t>Click to edit Master title style</a:t>
             </a:r>
-            <a:endParaRPr lang="en-US"/>
           </a:p>
         </p:txBody>
       </p:sp>
@@ -3346,38 +3354,37 @@
           <a:p>
             <a:pPr lvl="0"/>
             <a:r>
-              <a:rPr lang="en-US" smtClean="0"/>
+              <a:rPr lang="en-US"/>
               <a:t>Click to edit Master text styles</a:t>
             </a:r>
           </a:p>
           <a:p>
             <a:pPr lvl="1"/>
             <a:r>
-              <a:rPr lang="en-US" smtClean="0"/>
+              <a:rPr lang="en-US"/>
               <a:t>Second level</a:t>
             </a:r>
           </a:p>
           <a:p>
             <a:pPr lvl="2"/>
             <a:r>
-              <a:rPr lang="en-US" smtClean="0"/>
+              <a:rPr lang="en-US"/>
               <a:t>Third level</a:t>
             </a:r>
           </a:p>
           <a:p>
             <a:pPr lvl="3"/>
             <a:r>
-              <a:rPr lang="en-US" smtClean="0"/>
+              <a:rPr lang="en-US"/>
               <a:t>Fourth level</a:t>
             </a:r>
           </a:p>
           <a:p>
             <a:pPr lvl="4"/>
             <a:r>
-              <a:rPr lang="en-US" smtClean="0"/>
+              <a:rPr lang="en-US"/>
               <a:t>Fifth level</a:t>
             </a:r>
-            <a:endParaRPr lang="en-US"/>
           </a:p>
         </p:txBody>
       </p:sp>
@@ -3431,38 +3438,37 @@
           <a:p>
             <a:pPr lvl="0"/>
             <a:r>
-              <a:rPr lang="en-US" smtClean="0"/>
+              <a:rPr lang="en-US"/>
               <a:t>Click to edit Master text styles</a:t>
             </a:r>
           </a:p>
           <a:p>
             <a:pPr lvl="1"/>
             <a:r>
-              <a:rPr lang="en-US" smtClean="0"/>
+              <a:rPr lang="en-US"/>
               <a:t>Second level</a:t>
             </a:r>
           </a:p>
           <a:p>
             <a:pPr lvl="2"/>
             <a:r>
-              <a:rPr lang="en-US" smtClean="0"/>
+              <a:rPr lang="en-US"/>
               <a:t>Third level</a:t>
             </a:r>
           </a:p>
           <a:p>
             <a:pPr lvl="3"/>
             <a:r>
-              <a:rPr lang="en-US" smtClean="0"/>
+              <a:rPr lang="en-US"/>
               <a:t>Fourth level</a:t>
             </a:r>
           </a:p>
           <a:p>
             <a:pPr lvl="4"/>
             <a:r>
-              <a:rPr lang="en-US" smtClean="0"/>
+              <a:rPr lang="en-US"/>
               <a:t>Fifth level</a:t>
             </a:r>
-            <a:endParaRPr lang="en-US"/>
           </a:p>
         </p:txBody>
       </p:sp>
@@ -3483,7 +3489,7 @@
           <a:p>
             <a:fld id="{5BCAD085-E8A6-8845-BD4E-CB4CCA059FC4}" type="datetimeFigureOut">
               <a:rPr lang="en-US" smtClean="0"/>
-              <a:t>1/27/13</a:t>
+              <a:t>8/12/2026</a:t>
             </a:fld>
             <a:endParaRPr lang="en-US"/>
           </a:p>
@@ -3581,10 +3587,9 @@
           </a:lstStyle>
           <a:p>
             <a:r>
-              <a:rPr lang="en-US" smtClean="0"/>
+              <a:rPr lang="en-US"/>
               <a:t>Click to edit Master title style</a:t>
             </a:r>
-            <a:endParaRPr lang="en-US"/>
           </a:p>
         </p:txBody>
       </p:sp>
@@ -3647,7 +3652,7 @@
           <a:p>
             <a:pPr lvl="0"/>
             <a:r>
-              <a:rPr lang="en-US" smtClean="0"/>
+              <a:rPr lang="en-US"/>
               <a:t>Click to edit Master text styles</a:t>
             </a:r>
           </a:p>
@@ -3703,38 +3708,37 @@
           <a:p>
             <a:pPr lvl="0"/>
             <a:r>
-              <a:rPr lang="en-US" smtClean="0"/>
+              <a:rPr lang="en-US"/>
               <a:t>Click to edit Master text styles</a:t>
             </a:r>
           </a:p>
           <a:p>
             <a:pPr lvl="1"/>
             <a:r>
-              <a:rPr lang="en-US" smtClean="0"/>
+              <a:rPr lang="en-US"/>
               <a:t>Second level</a:t>
             </a:r>
           </a:p>
           <a:p>
             <a:pPr lvl="2"/>
             <a:r>
-              <a:rPr lang="en-US" smtClean="0"/>
+              <a:rPr lang="en-US"/>
               <a:t>Third level</a:t>
             </a:r>
           </a:p>
           <a:p>
             <a:pPr lvl="3"/>
             <a:r>
-              <a:rPr lang="en-US" smtClean="0"/>
+              <a:rPr lang="en-US"/>
               <a:t>Fourth level</a:t>
             </a:r>
           </a:p>
           <a:p>
             <a:pPr lvl="4"/>
             <a:r>
-              <a:rPr lang="en-US" smtClean="0"/>
+              <a:rPr lang="en-US"/>
               <a:t>Fifth level</a:t>
             </a:r>
-            <a:endParaRPr lang="en-US"/>
           </a:p>
         </p:txBody>
       </p:sp>
@@ -3797,7 +3801,7 @@
           <a:p>
             <a:pPr lvl="0"/>
             <a:r>
-              <a:rPr lang="en-US" smtClean="0"/>
+              <a:rPr lang="en-US"/>
               <a:t>Click to edit Master text styles</a:t>
             </a:r>
           </a:p>
@@ -3853,38 +3857,37 @@
           <a:p>
             <a:pPr lvl="0"/>
             <a:r>
-              <a:rPr lang="en-US" smtClean="0"/>
+              <a:rPr lang="en-US"/>
               <a:t>Click to edit Master text styles</a:t>
             </a:r>
           </a:p>
           <a:p>
             <a:pPr lvl="1"/>
             <a:r>
-              <a:rPr lang="en-US" smtClean="0"/>
+              <a:rPr lang="en-US"/>
               <a:t>Second level</a:t>
             </a:r>
           </a:p>
           <a:p>
             <a:pPr lvl="2"/>
             <a:r>
-              <a:rPr lang="en-US" smtClean="0"/>
+              <a:rPr lang="en-US"/>
               <a:t>Third level</a:t>
             </a:r>
           </a:p>
           <a:p>
             <a:pPr lvl="3"/>
             <a:r>
-              <a:rPr lang="en-US" smtClean="0"/>
+              <a:rPr lang="en-US"/>
               <a:t>Fourth level</a:t>
             </a:r>
           </a:p>
           <a:p>
             <a:pPr lvl="4"/>
             <a:r>
-              <a:rPr lang="en-US" smtClean="0"/>
+              <a:rPr lang="en-US"/>
               <a:t>Fifth level</a:t>
             </a:r>
-            <a:endParaRPr lang="en-US"/>
           </a:p>
         </p:txBody>
       </p:sp>
@@ -3905,7 +3908,7 @@
           <a:p>
             <a:fld id="{5BCAD085-E8A6-8845-BD4E-CB4CCA059FC4}" type="datetimeFigureOut">
               <a:rPr lang="en-US" smtClean="0"/>
-              <a:t>1/27/13</a:t>
+              <a:t>8/12/2026</a:t>
             </a:fld>
             <a:endParaRPr lang="en-US"/>
           </a:p>
@@ -3999,10 +4002,9 @@
           <a:lstStyle/>
           <a:p>
             <a:r>
-              <a:rPr lang="en-US" smtClean="0"/>
+              <a:rPr lang="en-US"/>
               <a:t>Click to edit Master title style</a:t>
             </a:r>
-            <a:endParaRPr lang="en-US"/>
           </a:p>
         </p:txBody>
       </p:sp>
@@ -4023,7 +4025,7 @@
           <a:p>
             <a:fld id="{5BCAD085-E8A6-8845-BD4E-CB4CCA059FC4}" type="datetimeFigureOut">
               <a:rPr lang="en-US" smtClean="0"/>
-              <a:t>1/27/13</a:t>
+              <a:t>8/12/2026</a:t>
             </a:fld>
             <a:endParaRPr lang="en-US"/>
           </a:p>
@@ -4118,7 +4120,7 @@
           <a:p>
             <a:fld id="{5BCAD085-E8A6-8845-BD4E-CB4CCA059FC4}" type="datetimeFigureOut">
               <a:rPr lang="en-US" smtClean="0"/>
-              <a:t>1/27/13</a:t>
+              <a:t>8/12/2026</a:t>
             </a:fld>
             <a:endParaRPr lang="en-US"/>
           </a:p>
@@ -4221,10 +4223,9 @@
           </a:lstStyle>
           <a:p>
             <a:r>
-              <a:rPr lang="en-US" smtClean="0"/>
+              <a:rPr lang="en-US"/>
               <a:t>Click to edit Master title style</a:t>
             </a:r>
-            <a:endParaRPr lang="en-US"/>
           </a:p>
         </p:txBody>
       </p:sp>
@@ -4278,38 +4279,37 @@
           <a:p>
             <a:pPr lvl="0"/>
             <a:r>
-              <a:rPr lang="en-US" smtClean="0"/>
+              <a:rPr lang="en-US"/>
               <a:t>Click to edit Master text styles</a:t>
             </a:r>
           </a:p>
           <a:p>
             <a:pPr lvl="1"/>
             <a:r>
-              <a:rPr lang="en-US" smtClean="0"/>
+              <a:rPr lang="en-US"/>
               <a:t>Second level</a:t>
             </a:r>
           </a:p>
           <a:p>
             <a:pPr lvl="2"/>
             <a:r>
-              <a:rPr lang="en-US" smtClean="0"/>
+              <a:rPr lang="en-US"/>
               <a:t>Third level</a:t>
             </a:r>
           </a:p>
           <a:p>
             <a:pPr lvl="3"/>
             <a:r>
-              <a:rPr lang="en-US" smtClean="0"/>
+              <a:rPr lang="en-US"/>
               <a:t>Fourth level</a:t>
             </a:r>
           </a:p>
           <a:p>
             <a:pPr lvl="4"/>
             <a:r>
-              <a:rPr lang="en-US" smtClean="0"/>
+              <a:rPr lang="en-US"/>
               <a:t>Fifth level</a:t>
             </a:r>
-            <a:endParaRPr lang="en-US"/>
           </a:p>
         </p:txBody>
       </p:sp>
@@ -4372,7 +4372,7 @@
           <a:p>
             <a:pPr lvl="0"/>
             <a:r>
-              <a:rPr lang="en-US" smtClean="0"/>
+              <a:rPr lang="en-US"/>
               <a:t>Click to edit Master text styles</a:t>
             </a:r>
           </a:p>
@@ -4395,7 +4395,7 @@
           <a:p>
             <a:fld id="{5BCAD085-E8A6-8845-BD4E-CB4CCA059FC4}" type="datetimeFigureOut">
               <a:rPr lang="en-US" smtClean="0"/>
-              <a:t>1/27/13</a:t>
+              <a:t>8/12/2026</a:t>
             </a:fld>
             <a:endParaRPr lang="en-US"/>
           </a:p>
@@ -4498,10 +4498,9 @@
           </a:lstStyle>
           <a:p>
             <a:r>
-              <a:rPr lang="en-US" smtClean="0"/>
+              <a:rPr lang="en-US"/>
               <a:t>Click to edit Master title style</a:t>
             </a:r>
-            <a:endParaRPr lang="en-US"/>
           </a:p>
         </p:txBody>
       </p:sp>
@@ -4625,7 +4624,7 @@
           <a:p>
             <a:pPr lvl="0"/>
             <a:r>
-              <a:rPr lang="en-US" smtClean="0"/>
+              <a:rPr lang="en-US"/>
               <a:t>Click to edit Master text styles</a:t>
             </a:r>
           </a:p>
@@ -4648,7 +4647,7 @@
           <a:p>
             <a:fld id="{5BCAD085-E8A6-8845-BD4E-CB4CCA059FC4}" type="datetimeFigureOut">
               <a:rPr lang="en-US" smtClean="0"/>
-              <a:t>1/27/13</a:t>
+              <a:t>8/12/2026</a:t>
             </a:fld>
             <a:endParaRPr lang="en-US"/>
           </a:p>
@@ -4757,10 +4756,9 @@
           <a:lstStyle/>
           <a:p>
             <a:r>
-              <a:rPr lang="en-US" smtClean="0"/>
+              <a:rPr lang="en-US"/>
               <a:t>Click to edit Master title style</a:t>
             </a:r>
-            <a:endParaRPr lang="en-US"/>
           </a:p>
         </p:txBody>
       </p:sp>
@@ -4791,38 +4789,37 @@
           <a:p>
             <a:pPr lvl="0"/>
             <a:r>
-              <a:rPr lang="en-US" smtClean="0"/>
+              <a:rPr lang="en-US"/>
               <a:t>Click to edit Master text styles</a:t>
             </a:r>
           </a:p>
           <a:p>
             <a:pPr lvl="1"/>
             <a:r>
-              <a:rPr lang="en-US" smtClean="0"/>
+              <a:rPr lang="en-US"/>
               <a:t>Second level</a:t>
             </a:r>
           </a:p>
           <a:p>
             <a:pPr lvl="2"/>
             <a:r>
-              <a:rPr lang="en-US" smtClean="0"/>
+              <a:rPr lang="en-US"/>
               <a:t>Third level</a:t>
             </a:r>
           </a:p>
           <a:p>
             <a:pPr lvl="3"/>
             <a:r>
-              <a:rPr lang="en-US" smtClean="0"/>
+              <a:rPr lang="en-US"/>
               <a:t>Fourth level</a:t>
             </a:r>
           </a:p>
           <a:p>
             <a:pPr lvl="4"/>
             <a:r>
-              <a:rPr lang="en-US" smtClean="0"/>
+              <a:rPr lang="en-US"/>
               <a:t>Fifth level</a:t>
             </a:r>
-            <a:endParaRPr lang="en-US"/>
           </a:p>
         </p:txBody>
       </p:sp>
@@ -4861,7 +4858,7 @@
           <a:p>
             <a:fld id="{5BCAD085-E8A6-8845-BD4E-CB4CCA059FC4}" type="datetimeFigureOut">
               <a:rPr lang="en-US" smtClean="0"/>
-              <a:t>1/27/13</a:t>
+              <a:t>8/12/2026</a:t>
             </a:fld>
             <a:endParaRPr lang="en-US"/>
           </a:p>
@@ -5220,7 +5217,7 @@
 </file>
 
 <file path=ppt/slides/slide1.xml><?xml version="1.0" encoding="utf-8"?>
-<p:sld xmlns:a="http://schemas.openxmlformats.org/drawingml/2006/main" xmlns:p="http://schemas.openxmlformats.org/presentationml/2006/main" xmlns:r="http://schemas.openxmlformats.org/officeDocument/2006/relationships">
+<p:sld xmlns:a="http://schemas.openxmlformats.org/drawingml/2006/main" xmlns:r="http://schemas.openxmlformats.org/officeDocument/2006/relationships" xmlns:p="http://schemas.openxmlformats.org/presentationml/2006/main">
   <p:cSld>
     <p:spTree>
       <p:nvGrpSpPr>
@@ -5228,7 +5225,14 @@
         <p:cNvGrpSpPr/>
         <p:nvPr/>
       </p:nvGrpSpPr>
-      <p:grpSpPr/>
+      <p:grpSpPr>
+        <a:xfrm>
+          <a:off x="0" y="0"/>
+          <a:ext cx="0" cy="0"/>
+          <a:chOff x="0" y="0"/>
+          <a:chExt cx="0" cy="0"/>
+        </a:xfrm>
+      </p:grpSpPr>
       <p:sp>
         <p:nvSpPr>
           <p:cNvPr id="2" name="Rectangle 1"/>
@@ -5270,6 +5274,7 @@
           <a:lstStyle/>
           <a:p>
             <a:pPr algn="ctr"/>
+            <a:endParaRPr/>
           </a:p>
         </p:txBody>
       </p:sp>
@@ -5314,6 +5319,7 @@
           <a:lstStyle/>
           <a:p>
             <a:pPr algn="ctr"/>
+            <a:endParaRPr/>
           </a:p>
         </p:txBody>
       </p:sp>
@@ -5358,6 +5364,7 @@
           <a:lstStyle/>
           <a:p>
             <a:pPr algn="ctr"/>
+            <a:endParaRPr/>
           </a:p>
         </p:txBody>
       </p:sp>
@@ -5522,7 +5529,7 @@
 </file>
 
 <file path=ppt/slides/slide10.xml><?xml version="1.0" encoding="utf-8"?>
-<p:sld xmlns:a="http://schemas.openxmlformats.org/drawingml/2006/main" xmlns:p="http://schemas.openxmlformats.org/presentationml/2006/main" xmlns:r="http://schemas.openxmlformats.org/officeDocument/2006/relationships">
+<p:sld xmlns:a="http://schemas.openxmlformats.org/drawingml/2006/main" xmlns:r="http://schemas.openxmlformats.org/officeDocument/2006/relationships" xmlns:p="http://schemas.openxmlformats.org/presentationml/2006/main">
   <p:cSld>
     <p:spTree>
       <p:nvGrpSpPr>
@@ -5530,7 +5537,14 @@
         <p:cNvGrpSpPr/>
         <p:nvPr/>
       </p:nvGrpSpPr>
-      <p:grpSpPr/>
+      <p:grpSpPr>
+        <a:xfrm>
+          <a:off x="0" y="0"/>
+          <a:ext cx="0" cy="0"/>
+          <a:chOff x="0" y="0"/>
+          <a:chExt cx="0" cy="0"/>
+        </a:xfrm>
+      </p:grpSpPr>
       <p:sp>
         <p:nvSpPr>
           <p:cNvPr id="2" name="Rectangle 1"/>
@@ -5572,6 +5586,7 @@
           <a:lstStyle/>
           <a:p>
             <a:pPr algn="ctr"/>
+            <a:endParaRPr/>
           </a:p>
         </p:txBody>
       </p:sp>
@@ -5682,23 +5697,38 @@
           </a:fontRef>
         </p:style>
         <p:txBody>
-          <a:bodyPr rtlCol="0" anchor="ctr" wrap="square" lIns="137160" tIns="91440" rIns="137160"/>
-          <a:lstStyle/>
-          <a:p>
-            <a:pPr algn="ctr">
+          <a:bodyPr wrap="square" lIns="137160" tIns="91440" rIns="137160" rtlCol="0" anchor="ctr"/>
+          <a:lstStyle/>
+          <a:p>
+            <a:pPr>
               <a:spcAft>
                 <a:spcPts val="0"/>
               </a:spcAft>
             </a:pPr>
             <a:r>
-              <a:rPr sz="1200">
+              <a:rPr sz="1200" dirty="0">
                 <a:solidFill>
                   <a:srgbClr val="E6E6E6"/>
                 </a:solidFill>
                 <a:latin typeface="Consolas"/>
               </a:rPr>
-              <a:t>SQL&gt; SHOW PARAMETER instance_type</a:t>
-            </a:r>
+              <a:t>SQL&gt; SHOW PARAMETER </a:t>
+            </a:r>
+            <a:r>
+              <a:rPr sz="1200" dirty="0" err="1">
+                <a:solidFill>
+                  <a:srgbClr val="E6E6E6"/>
+                </a:solidFill>
+                <a:latin typeface="Consolas"/>
+              </a:rPr>
+              <a:t>instance_type</a:t>
+            </a:r>
+            <a:endParaRPr sz="1200" dirty="0">
+              <a:solidFill>
+                <a:srgbClr val="E6E6E6"/>
+              </a:solidFill>
+              <a:latin typeface="Consolas"/>
+            </a:endParaRPr>
           </a:p>
           <a:p>
             <a:pPr>
@@ -5707,7 +5737,7 @@
               </a:spcAft>
             </a:pPr>
             <a:r>
-              <a:rPr sz="1200">
+              <a:rPr sz="1200" dirty="0">
                 <a:solidFill>
                   <a:srgbClr val="E6E6E6"/>
                 </a:solidFill>
@@ -5723,7 +5753,7 @@
               </a:spcAft>
             </a:pPr>
             <a:r>
-              <a:rPr sz="1200">
+              <a:rPr sz="1200" dirty="0">
                 <a:solidFill>
                   <a:srgbClr val="E6E6E6"/>
                 </a:solidFill>
@@ -5739,14 +5769,38 @@
               </a:spcAft>
             </a:pPr>
             <a:r>
-              <a:rPr sz="1200">
+              <a:rPr sz="1200" dirty="0" err="1">
                 <a:solidFill>
                   <a:srgbClr val="E6E6E6"/>
                 </a:solidFill>
                 <a:latin typeface="Consolas"/>
               </a:rPr>
-              <a:t>instance_type   string   asm</a:t>
-            </a:r>
+              <a:t>instance_type</a:t>
+            </a:r>
+            <a:r>
+              <a:rPr sz="1200" dirty="0">
+                <a:solidFill>
+                  <a:srgbClr val="E6E6E6"/>
+                </a:solidFill>
+                <a:latin typeface="Consolas"/>
+              </a:rPr>
+              <a:t>   string   </a:t>
+            </a:r>
+            <a:r>
+              <a:rPr sz="1200" dirty="0" err="1">
+                <a:solidFill>
+                  <a:srgbClr val="E6E6E6"/>
+                </a:solidFill>
+                <a:latin typeface="Consolas"/>
+              </a:rPr>
+              <a:t>asm</a:t>
+            </a:r>
+            <a:endParaRPr sz="1200" dirty="0">
+              <a:solidFill>
+                <a:srgbClr val="E6E6E6"/>
+              </a:solidFill>
+              <a:latin typeface="Consolas"/>
+            </a:endParaRPr>
           </a:p>
           <a:p>
             <a:pPr>
@@ -5754,15 +5808,43 @@
                 <a:spcPts val="0"/>
               </a:spcAft>
             </a:pPr>
-            <a:r>
-              <a:rPr sz="1200">
+            <a:endParaRPr sz="1200" dirty="0">
+              <a:solidFill>
+                <a:srgbClr val="E6E6E6"/>
+              </a:solidFill>
+              <a:latin typeface="Consolas"/>
+            </a:endParaRPr>
+          </a:p>
+          <a:p>
+            <a:pPr>
+              <a:spcAft>
+                <a:spcPts val="0"/>
+              </a:spcAft>
+            </a:pPr>
+            <a:r>
+              <a:rPr sz="1200" dirty="0">
                 <a:solidFill>
                   <a:srgbClr val="E6E6E6"/>
                 </a:solidFill>
                 <a:latin typeface="Consolas"/>
               </a:rPr>
-              <a:t/>
-            </a:r>
+              <a:t>SQL&gt; SHOW PARAMETER </a:t>
+            </a:r>
+            <a:r>
+              <a:rPr sz="1200" dirty="0" err="1">
+                <a:solidFill>
+                  <a:srgbClr val="E6E6E6"/>
+                </a:solidFill>
+                <a:latin typeface="Consolas"/>
+              </a:rPr>
+              <a:t>asm_power_limit</a:t>
+            </a:r>
+            <a:endParaRPr sz="1200" dirty="0">
+              <a:solidFill>
+                <a:srgbClr val="E6E6E6"/>
+              </a:solidFill>
+              <a:latin typeface="Consolas"/>
+            </a:endParaRPr>
           </a:p>
           <a:p>
             <a:pPr>
@@ -5771,13 +5853,22 @@
               </a:spcAft>
             </a:pPr>
             <a:r>
-              <a:rPr sz="1200">
+              <a:rPr sz="1200" dirty="0" err="1">
                 <a:solidFill>
                   <a:srgbClr val="E6E6E6"/>
                 </a:solidFill>
                 <a:latin typeface="Consolas"/>
               </a:rPr>
-              <a:t>SQL&gt; SHOW PARAMETER asm_power_limit</a:t>
+              <a:t>asm_power_limit</a:t>
+            </a:r>
+            <a:r>
+              <a:rPr sz="1200" dirty="0">
+                <a:solidFill>
+                  <a:srgbClr val="E6E6E6"/>
+                </a:solidFill>
+                <a:latin typeface="Consolas"/>
+              </a:rPr>
+              <a:t>                  integer  1</a:t>
             </a:r>
           </a:p>
           <a:p>
@@ -5786,15 +5877,97 @@
                 <a:spcPts val="0"/>
               </a:spcAft>
             </a:pPr>
-            <a:r>
-              <a:rPr sz="1200">
+            <a:endParaRPr sz="1200" dirty="0">
+              <a:solidFill>
+                <a:srgbClr val="E6E6E6"/>
+              </a:solidFill>
+              <a:latin typeface="Consolas"/>
+            </a:endParaRPr>
+          </a:p>
+          <a:p>
+            <a:pPr>
+              <a:spcAft>
+                <a:spcPts val="0"/>
+              </a:spcAft>
+            </a:pPr>
+            <a:r>
+              <a:rPr sz="1200" dirty="0">
                 <a:solidFill>
                   <a:srgbClr val="E6E6E6"/>
                 </a:solidFill>
                 <a:latin typeface="Consolas"/>
               </a:rPr>
-              <a:t>asm_power_limit                  integer  1</a:t>
-            </a:r>
+              <a:t>-- </a:t>
+            </a:r>
+            <a:r>
+              <a:rPr sz="1200" dirty="0" err="1">
+                <a:solidFill>
+                  <a:srgbClr val="E6E6E6"/>
+                </a:solidFill>
+                <a:latin typeface="Consolas"/>
+              </a:rPr>
+              <a:t>리밸런싱</a:t>
+            </a:r>
+            <a:r>
+              <a:rPr sz="1200" dirty="0">
+                <a:solidFill>
+                  <a:srgbClr val="E6E6E6"/>
+                </a:solidFill>
+                <a:latin typeface="Consolas"/>
+              </a:rPr>
+              <a:t> </a:t>
+            </a:r>
+            <a:r>
+              <a:rPr sz="1200" dirty="0" err="1">
+                <a:solidFill>
+                  <a:srgbClr val="E6E6E6"/>
+                </a:solidFill>
+                <a:latin typeface="Consolas"/>
+              </a:rPr>
+              <a:t>속도를</a:t>
+            </a:r>
+            <a:r>
+              <a:rPr sz="1200" dirty="0">
+                <a:solidFill>
+                  <a:srgbClr val="E6E6E6"/>
+                </a:solidFill>
+                <a:latin typeface="Consolas"/>
+              </a:rPr>
+              <a:t> </a:t>
+            </a:r>
+            <a:r>
+              <a:rPr sz="1200" dirty="0" err="1">
+                <a:solidFill>
+                  <a:srgbClr val="E6E6E6"/>
+                </a:solidFill>
+                <a:latin typeface="Consolas"/>
+              </a:rPr>
+              <a:t>동적으로</a:t>
+            </a:r>
+            <a:r>
+              <a:rPr sz="1200" dirty="0">
+                <a:solidFill>
+                  <a:srgbClr val="E6E6E6"/>
+                </a:solidFill>
+                <a:latin typeface="Consolas"/>
+              </a:rPr>
+              <a:t> </a:t>
+            </a:r>
+            <a:r>
+              <a:rPr sz="1200" dirty="0" err="1">
+                <a:solidFill>
+                  <a:srgbClr val="E6E6E6"/>
+                </a:solidFill>
+                <a:latin typeface="Consolas"/>
+              </a:rPr>
+              <a:t>변경</a:t>
+            </a:r>
+            <a:endParaRPr sz="1200" dirty="0">
+              <a:solidFill>
+                <a:srgbClr val="E6E6E6"/>
+              </a:solidFill>
+              <a:latin typeface="Consolas"/>
+            </a:endParaRPr>
           </a:p>
           <a:p>
             <a:pPr>
@@ -5803,13 +5976,31 @@
               </a:spcAft>
             </a:pPr>
             <a:r>
-              <a:rPr sz="1200">
+              <a:rPr sz="1200" dirty="0">
                 <a:solidFill>
                   <a:srgbClr val="E6E6E6"/>
                 </a:solidFill>
                 <a:latin typeface="Consolas"/>
               </a:rPr>
-              <a:t/>
+              <a:t>SQL&gt; ALTER SYSTEM SET </a:t>
+            </a:r>
+            <a:r>
+              <a:rPr sz="1200" dirty="0" err="1">
+                <a:solidFill>
+                  <a:srgbClr val="E6E6E6"/>
+                </a:solidFill>
+                <a:latin typeface="Consolas"/>
+              </a:rPr>
+              <a:t>asm_power_limit</a:t>
+            </a:r>
+            <a:r>
+              <a:rPr sz="1200" dirty="0">
+                <a:solidFill>
+                  <a:srgbClr val="E6E6E6"/>
+                </a:solidFill>
+                <a:latin typeface="Consolas"/>
+              </a:rPr>
+              <a:t> = 4 SCOPE=BOTH;</a:t>
             </a:r>
           </a:p>
           <a:p>
@@ -5819,39 +6010,7 @@
               </a:spcAft>
             </a:pPr>
             <a:r>
-              <a:rPr sz="1200">
-                <a:solidFill>
-                  <a:srgbClr val="E6E6E6"/>
-                </a:solidFill>
-                <a:latin typeface="Consolas"/>
-              </a:rPr>
-              <a:t>-- 리밸런싱 속도를 동적으로 변경</a:t>
-            </a:r>
-          </a:p>
-          <a:p>
-            <a:pPr>
-              <a:spcAft>
-                <a:spcPts val="0"/>
-              </a:spcAft>
-            </a:pPr>
-            <a:r>
-              <a:rPr sz="1200">
-                <a:solidFill>
-                  <a:srgbClr val="E6E6E6"/>
-                </a:solidFill>
-                <a:latin typeface="Consolas"/>
-              </a:rPr>
-              <a:t>SQL&gt; ALTER SYSTEM SET asm_power_limit = 4 SCOPE=BOTH;</a:t>
-            </a:r>
-          </a:p>
-          <a:p>
-            <a:pPr>
-              <a:spcAft>
-                <a:spcPts val="0"/>
-              </a:spcAft>
-            </a:pPr>
-            <a:r>
-              <a:rPr sz="1200">
+              <a:rPr sz="1200" dirty="0">
                 <a:solidFill>
                   <a:srgbClr val="E6E6E6"/>
                 </a:solidFill>
@@ -5871,7 +6030,7 @@
 </file>
 
 <file path=ppt/slides/slide11.xml><?xml version="1.0" encoding="utf-8"?>
-<p:sld xmlns:a="http://schemas.openxmlformats.org/drawingml/2006/main" xmlns:p="http://schemas.openxmlformats.org/presentationml/2006/main" xmlns:r="http://schemas.openxmlformats.org/officeDocument/2006/relationships">
+<p:sld xmlns:a="http://schemas.openxmlformats.org/drawingml/2006/main" xmlns:r="http://schemas.openxmlformats.org/officeDocument/2006/relationships" xmlns:p="http://schemas.openxmlformats.org/presentationml/2006/main">
   <p:cSld>
     <p:spTree>
       <p:nvGrpSpPr>
@@ -5879,7 +6038,14 @@
         <p:cNvGrpSpPr/>
         <p:nvPr/>
       </p:nvGrpSpPr>
-      <p:grpSpPr/>
+      <p:grpSpPr>
+        <a:xfrm>
+          <a:off x="0" y="0"/>
+          <a:ext cx="0" cy="0"/>
+          <a:chOff x="0" y="0"/>
+          <a:chExt cx="0" cy="0"/>
+        </a:xfrm>
+      </p:grpSpPr>
       <p:sp>
         <p:nvSpPr>
           <p:cNvPr id="2" name="Rectangle 1"/>
@@ -5921,6 +6087,7 @@
           <a:lstStyle/>
           <a:p>
             <a:pPr algn="ctr"/>
+            <a:endParaRPr/>
           </a:p>
         </p:txBody>
       </p:sp>
@@ -6035,6 +6202,7 @@
           <a:lstStyle/>
           <a:p>
             <a:pPr algn="ctr"/>
+            <a:endParaRPr/>
           </a:p>
         </p:txBody>
       </p:sp>
@@ -6134,7 +6302,7 @@
 </file>
 
 <file path=ppt/slides/slide12.xml><?xml version="1.0" encoding="utf-8"?>
-<p:sld xmlns:a="http://schemas.openxmlformats.org/drawingml/2006/main" xmlns:p="http://schemas.openxmlformats.org/presentationml/2006/main" xmlns:r="http://schemas.openxmlformats.org/officeDocument/2006/relationships">
+<p:sld xmlns:a="http://schemas.openxmlformats.org/drawingml/2006/main" xmlns:r="http://schemas.openxmlformats.org/officeDocument/2006/relationships" xmlns:p="http://schemas.openxmlformats.org/presentationml/2006/main">
   <p:cSld>
     <p:spTree>
       <p:nvGrpSpPr>
@@ -6142,7 +6310,14 @@
         <p:cNvGrpSpPr/>
         <p:nvPr/>
       </p:nvGrpSpPr>
-      <p:grpSpPr/>
+      <p:grpSpPr>
+        <a:xfrm>
+          <a:off x="0" y="0"/>
+          <a:ext cx="0" cy="0"/>
+          <a:chOff x="0" y="0"/>
+          <a:chExt cx="0" cy="0"/>
+        </a:xfrm>
+      </p:grpSpPr>
       <p:sp>
         <p:nvSpPr>
           <p:cNvPr id="2" name="Rectangle 1"/>
@@ -6184,6 +6359,7 @@
           <a:lstStyle/>
           <a:p>
             <a:pPr algn="ctr"/>
+            <a:endParaRPr/>
           </a:p>
         </p:txBody>
       </p:sp>
@@ -6369,7 +6545,7 @@
 </file>
 
 <file path=ppt/slides/slide13.xml><?xml version="1.0" encoding="utf-8"?>
-<p:sld xmlns:a="http://schemas.openxmlformats.org/drawingml/2006/main" xmlns:p="http://schemas.openxmlformats.org/presentationml/2006/main" xmlns:r="http://schemas.openxmlformats.org/officeDocument/2006/relationships">
+<p:sld xmlns:a="http://schemas.openxmlformats.org/drawingml/2006/main" xmlns:r="http://schemas.openxmlformats.org/officeDocument/2006/relationships" xmlns:p="http://schemas.openxmlformats.org/presentationml/2006/main">
   <p:cSld>
     <p:spTree>
       <p:nvGrpSpPr>
@@ -6377,7 +6553,14 @@
         <p:cNvGrpSpPr/>
         <p:nvPr/>
       </p:nvGrpSpPr>
-      <p:grpSpPr/>
+      <p:grpSpPr>
+        <a:xfrm>
+          <a:off x="0" y="0"/>
+          <a:ext cx="0" cy="0"/>
+          <a:chOff x="0" y="0"/>
+          <a:chExt cx="0" cy="0"/>
+        </a:xfrm>
+      </p:grpSpPr>
       <p:sp>
         <p:nvSpPr>
           <p:cNvPr id="2" name="Rectangle 1"/>
@@ -6419,6 +6602,7 @@
           <a:lstStyle/>
           <a:p>
             <a:pPr algn="ctr"/>
+            <a:endParaRPr/>
           </a:p>
         </p:txBody>
       </p:sp>
@@ -6604,7 +6788,7 @@
 </file>
 
 <file path=ppt/slides/slide14.xml><?xml version="1.0" encoding="utf-8"?>
-<p:sld xmlns:a="http://schemas.openxmlformats.org/drawingml/2006/main" xmlns:p="http://schemas.openxmlformats.org/presentationml/2006/main" xmlns:r="http://schemas.openxmlformats.org/officeDocument/2006/relationships">
+<p:sld xmlns:a="http://schemas.openxmlformats.org/drawingml/2006/main" xmlns:r="http://schemas.openxmlformats.org/officeDocument/2006/relationships" xmlns:p="http://schemas.openxmlformats.org/presentationml/2006/main">
   <p:cSld>
     <p:spTree>
       <p:nvGrpSpPr>
@@ -6612,7 +6796,14 @@
         <p:cNvGrpSpPr/>
         <p:nvPr/>
       </p:nvGrpSpPr>
-      <p:grpSpPr/>
+      <p:grpSpPr>
+        <a:xfrm>
+          <a:off x="0" y="0"/>
+          <a:ext cx="0" cy="0"/>
+          <a:chOff x="0" y="0"/>
+          <a:chExt cx="0" cy="0"/>
+        </a:xfrm>
+      </p:grpSpPr>
       <p:sp>
         <p:nvSpPr>
           <p:cNvPr id="2" name="Rectangle 1"/>
@@ -6654,6 +6845,7 @@
           <a:lstStyle/>
           <a:p>
             <a:pPr algn="ctr"/>
+            <a:endParaRPr/>
           </a:p>
         </p:txBody>
       </p:sp>
@@ -6768,6 +6960,7 @@
           <a:lstStyle/>
           <a:p>
             <a:pPr algn="ctr"/>
+            <a:endParaRPr/>
           </a:p>
         </p:txBody>
       </p:sp>
@@ -6867,7 +7060,7 @@
 </file>
 
 <file path=ppt/slides/slide15.xml><?xml version="1.0" encoding="utf-8"?>
-<p:sld xmlns:a="http://schemas.openxmlformats.org/drawingml/2006/main" xmlns:p="http://schemas.openxmlformats.org/presentationml/2006/main" xmlns:r="http://schemas.openxmlformats.org/officeDocument/2006/relationships">
+<p:sld xmlns:a="http://schemas.openxmlformats.org/drawingml/2006/main" xmlns:r="http://schemas.openxmlformats.org/officeDocument/2006/relationships" xmlns:p="http://schemas.openxmlformats.org/presentationml/2006/main">
   <p:cSld>
     <p:spTree>
       <p:nvGrpSpPr>
@@ -6875,7 +7068,14 @@
         <p:cNvGrpSpPr/>
         <p:nvPr/>
       </p:nvGrpSpPr>
-      <p:grpSpPr/>
+      <p:grpSpPr>
+        <a:xfrm>
+          <a:off x="0" y="0"/>
+          <a:ext cx="0" cy="0"/>
+          <a:chOff x="0" y="0"/>
+          <a:chExt cx="0" cy="0"/>
+        </a:xfrm>
+      </p:grpSpPr>
       <p:sp>
         <p:nvSpPr>
           <p:cNvPr id="2" name="Rectangle 1"/>
@@ -6917,6 +7117,7 @@
           <a:lstStyle/>
           <a:p>
             <a:pPr algn="ctr"/>
+            <a:endParaRPr/>
           </a:p>
         </p:txBody>
       </p:sp>
@@ -7027,23 +7228,110 @@
           </a:fontRef>
         </p:style>
         <p:txBody>
-          <a:bodyPr rtlCol="0" anchor="ctr" wrap="square" lIns="137160" tIns="91440" rIns="137160"/>
-          <a:lstStyle/>
-          <a:p>
-            <a:pPr algn="ctr">
+          <a:bodyPr wrap="square" lIns="137160" tIns="91440" rIns="137160" rtlCol="0" anchor="ctr"/>
+          <a:lstStyle/>
+          <a:p>
+            <a:pPr>
               <a:spcAft>
                 <a:spcPts val="0"/>
               </a:spcAft>
             </a:pPr>
             <a:r>
-              <a:rPr sz="1200">
+              <a:rPr sz="1200" dirty="0">
                 <a:solidFill>
                   <a:srgbClr val="E6E6E6"/>
                 </a:solidFill>
                 <a:latin typeface="Consolas"/>
               </a:rPr>
-              <a:t>-- 1) 디스크 그룹에 ASM 비밀번호 파일 생성</a:t>
-            </a:r>
+              <a:t>-- 1) </a:t>
+            </a:r>
+            <a:r>
+              <a:rPr sz="1200" dirty="0" err="1">
+                <a:solidFill>
+                  <a:srgbClr val="E6E6E6"/>
+                </a:solidFill>
+                <a:latin typeface="Consolas"/>
+              </a:rPr>
+              <a:t>디스크</a:t>
+            </a:r>
+            <a:r>
+              <a:rPr sz="1200" dirty="0">
+                <a:solidFill>
+                  <a:srgbClr val="E6E6E6"/>
+                </a:solidFill>
+                <a:latin typeface="Consolas"/>
+              </a:rPr>
+              <a:t> </a:t>
+            </a:r>
+            <a:r>
+              <a:rPr sz="1200" dirty="0" err="1">
+                <a:solidFill>
+                  <a:srgbClr val="E6E6E6"/>
+                </a:solidFill>
+                <a:latin typeface="Consolas"/>
+              </a:rPr>
+              <a:t>그룹에</a:t>
+            </a:r>
+            <a:r>
+              <a:rPr sz="1200" dirty="0">
+                <a:solidFill>
+                  <a:srgbClr val="E6E6E6"/>
+                </a:solidFill>
+                <a:latin typeface="Consolas"/>
+              </a:rPr>
+              <a:t> ASM </a:t>
+            </a:r>
+            <a:r>
+              <a:rPr sz="1200" dirty="0" err="1">
+                <a:solidFill>
+                  <a:srgbClr val="E6E6E6"/>
+                </a:solidFill>
+                <a:latin typeface="Consolas"/>
+              </a:rPr>
+              <a:t>비밀번호</a:t>
+            </a:r>
+            <a:r>
+              <a:rPr sz="1200" dirty="0">
+                <a:solidFill>
+                  <a:srgbClr val="E6E6E6"/>
+                </a:solidFill>
+                <a:latin typeface="Consolas"/>
+              </a:rPr>
+              <a:t> </a:t>
+            </a:r>
+            <a:r>
+              <a:rPr sz="1200" dirty="0" err="1">
+                <a:solidFill>
+                  <a:srgbClr val="E6E6E6"/>
+                </a:solidFill>
+                <a:latin typeface="Consolas"/>
+              </a:rPr>
+              <a:t>파일</a:t>
+            </a:r>
+            <a:r>
+              <a:rPr sz="1200" dirty="0">
+                <a:solidFill>
+                  <a:srgbClr val="E6E6E6"/>
+                </a:solidFill>
+                <a:latin typeface="Consolas"/>
+              </a:rPr>
+              <a:t> </a:t>
+            </a:r>
+            <a:r>
+              <a:rPr sz="1200" dirty="0" err="1">
+                <a:solidFill>
+                  <a:srgbClr val="E6E6E6"/>
+                </a:solidFill>
+                <a:latin typeface="Consolas"/>
+              </a:rPr>
+              <a:t>생성</a:t>
+            </a:r>
+            <a:endParaRPr sz="1200" dirty="0">
+              <a:solidFill>
+                <a:srgbClr val="E6E6E6"/>
+              </a:solidFill>
+              <a:latin typeface="Consolas"/>
+            </a:endParaRPr>
           </a:p>
           <a:p>
             <a:pPr>
@@ -7052,13 +7340,67 @@
               </a:spcAft>
             </a:pPr>
             <a:r>
-              <a:rPr sz="1200">
+              <a:rPr sz="1200" dirty="0">
                 <a:solidFill>
                   <a:srgbClr val="E6E6E6"/>
                 </a:solidFill>
                 <a:latin typeface="Consolas"/>
               </a:rPr>
-              <a:t>$ orapwd file='+DATA/ASM/orapwasm' asm=y \</a:t>
+              <a:t>$ </a:t>
+            </a:r>
+            <a:r>
+              <a:rPr sz="1200" dirty="0" err="1">
+                <a:solidFill>
+                  <a:srgbClr val="E6E6E6"/>
+                </a:solidFill>
+                <a:latin typeface="Consolas"/>
+              </a:rPr>
+              <a:t>orapwd</a:t>
+            </a:r>
+            <a:r>
+              <a:rPr sz="1200" dirty="0">
+                <a:solidFill>
+                  <a:srgbClr val="E6E6E6"/>
+                </a:solidFill>
+                <a:latin typeface="Consolas"/>
+              </a:rPr>
+              <a:t> file='+DATA/ASM/</a:t>
+            </a:r>
+            <a:r>
+              <a:rPr sz="1200" dirty="0" err="1">
+                <a:solidFill>
+                  <a:srgbClr val="E6E6E6"/>
+                </a:solidFill>
+                <a:latin typeface="Consolas"/>
+              </a:rPr>
+              <a:t>orapwasm</a:t>
+            </a:r>
+            <a:r>
+              <a:rPr sz="1200" dirty="0">
+                <a:solidFill>
+                  <a:srgbClr val="E6E6E6"/>
+                </a:solidFill>
+                <a:latin typeface="Consolas"/>
+              </a:rPr>
+              <a:t>' </a:t>
+            </a:r>
+            <a:r>
+              <a:rPr sz="1200" dirty="0" err="1">
+                <a:solidFill>
+                  <a:srgbClr val="E6E6E6"/>
+                </a:solidFill>
+                <a:latin typeface="Consolas"/>
+              </a:rPr>
+              <a:t>asm</a:t>
+            </a:r>
+            <a:r>
+              <a:rPr sz="1200" dirty="0">
+                <a:solidFill>
+                  <a:srgbClr val="E6E6E6"/>
+                </a:solidFill>
+                <a:latin typeface="Consolas"/>
+              </a:rPr>
+              <a:t>=y \</a:t>
             </a:r>
           </a:p>
           <a:p>
@@ -7068,7 +7410,7 @@
               </a:spcAft>
             </a:pPr>
             <a:r>
-              <a:rPr sz="1200">
+              <a:rPr sz="1200" dirty="0">
                 <a:solidFill>
                   <a:srgbClr val="E6E6E6"/>
                 </a:solidFill>
@@ -7083,15 +7425,115 @@
                 <a:spcPts val="0"/>
               </a:spcAft>
             </a:pPr>
-            <a:r>
-              <a:rPr sz="1200">
+            <a:endParaRPr sz="1200" dirty="0">
+              <a:solidFill>
+                <a:srgbClr val="E6E6E6"/>
+              </a:solidFill>
+              <a:latin typeface="Consolas"/>
+            </a:endParaRPr>
+          </a:p>
+          <a:p>
+            <a:pPr>
+              <a:spcAft>
+                <a:spcPts val="0"/>
+              </a:spcAft>
+            </a:pPr>
+            <a:r>
+              <a:rPr sz="1200" dirty="0">
                 <a:solidFill>
                   <a:srgbClr val="E6E6E6"/>
                 </a:solidFill>
                 <a:latin typeface="Consolas"/>
               </a:rPr>
-              <a:t/>
-            </a:r>
+              <a:t>-- 2) </a:t>
+            </a:r>
+            <a:r>
+              <a:rPr sz="1200" dirty="0" err="1">
+                <a:solidFill>
+                  <a:srgbClr val="E6E6E6"/>
+                </a:solidFill>
+                <a:latin typeface="Consolas"/>
+              </a:rPr>
+              <a:t>현재</a:t>
+            </a:r>
+            <a:r>
+              <a:rPr sz="1200" dirty="0">
+                <a:solidFill>
+                  <a:srgbClr val="E6E6E6"/>
+                </a:solidFill>
+                <a:latin typeface="Consolas"/>
+              </a:rPr>
+              <a:t> </a:t>
+            </a:r>
+            <a:r>
+              <a:rPr sz="1200" dirty="0" err="1">
+                <a:solidFill>
+                  <a:srgbClr val="E6E6E6"/>
+                </a:solidFill>
+                <a:latin typeface="Consolas"/>
+              </a:rPr>
+              <a:t>비밀번호</a:t>
+            </a:r>
+            <a:r>
+              <a:rPr sz="1200" dirty="0">
+                <a:solidFill>
+                  <a:srgbClr val="E6E6E6"/>
+                </a:solidFill>
+                <a:latin typeface="Consolas"/>
+              </a:rPr>
+              <a:t> </a:t>
+            </a:r>
+            <a:r>
+              <a:rPr sz="1200" dirty="0" err="1">
+                <a:solidFill>
+                  <a:srgbClr val="E6E6E6"/>
+                </a:solidFill>
+                <a:latin typeface="Consolas"/>
+              </a:rPr>
+              <a:t>파일</a:t>
+            </a:r>
+            <a:r>
+              <a:rPr sz="1200" dirty="0">
+                <a:solidFill>
+                  <a:srgbClr val="E6E6E6"/>
+                </a:solidFill>
+                <a:latin typeface="Consolas"/>
+              </a:rPr>
+              <a:t> </a:t>
+            </a:r>
+            <a:r>
+              <a:rPr sz="1200" dirty="0" err="1">
+                <a:solidFill>
+                  <a:srgbClr val="E6E6E6"/>
+                </a:solidFill>
+                <a:latin typeface="Consolas"/>
+              </a:rPr>
+              <a:t>위치</a:t>
+            </a:r>
+            <a:r>
+              <a:rPr sz="1200" dirty="0">
+                <a:solidFill>
+                  <a:srgbClr val="E6E6E6"/>
+                </a:solidFill>
+                <a:latin typeface="Consolas"/>
+              </a:rPr>
+              <a:t> </a:t>
+            </a:r>
+            <a:r>
+              <a:rPr sz="1200" dirty="0" err="1">
+                <a:solidFill>
+                  <a:srgbClr val="E6E6E6"/>
+                </a:solidFill>
+                <a:latin typeface="Consolas"/>
+              </a:rPr>
+              <a:t>확인</a:t>
+            </a:r>
+            <a:endParaRPr sz="1200" dirty="0">
+              <a:solidFill>
+                <a:srgbClr val="E6E6E6"/>
+              </a:solidFill>
+              <a:latin typeface="Consolas"/>
+            </a:endParaRPr>
           </a:p>
           <a:p>
             <a:pPr>
@@ -7100,14 +7542,47 @@
               </a:spcAft>
             </a:pPr>
             <a:r>
-              <a:rPr sz="1200">
+              <a:rPr sz="1200" dirty="0">
                 <a:solidFill>
                   <a:srgbClr val="E6E6E6"/>
                 </a:solidFill>
                 <a:latin typeface="Consolas"/>
               </a:rPr>
-              <a:t>-- 2) 현재 비밀번호 파일 위치 확인</a:t>
-            </a:r>
+              <a:t>ASMCMD&gt; </a:t>
+            </a:r>
+            <a:r>
+              <a:rPr sz="1200" dirty="0" err="1">
+                <a:solidFill>
+                  <a:srgbClr val="E6E6E6"/>
+                </a:solidFill>
+                <a:latin typeface="Consolas"/>
+              </a:rPr>
+              <a:t>pwget</a:t>
+            </a:r>
+            <a:r>
+              <a:rPr sz="1200" dirty="0">
+                <a:solidFill>
+                  <a:srgbClr val="E6E6E6"/>
+                </a:solidFill>
+                <a:latin typeface="Consolas"/>
+              </a:rPr>
+              <a:t> --</a:t>
+            </a:r>
+            <a:r>
+              <a:rPr sz="1200" dirty="0" err="1">
+                <a:solidFill>
+                  <a:srgbClr val="E6E6E6"/>
+                </a:solidFill>
+                <a:latin typeface="Consolas"/>
+              </a:rPr>
+              <a:t>asm</a:t>
+            </a:r>
+            <a:endParaRPr sz="1200" dirty="0">
+              <a:solidFill>
+                <a:srgbClr val="E6E6E6"/>
+              </a:solidFill>
+              <a:latin typeface="Consolas"/>
+            </a:endParaRPr>
           </a:p>
           <a:p>
             <a:pPr>
@@ -7116,14 +7591,29 @@
               </a:spcAft>
             </a:pPr>
             <a:r>
-              <a:rPr sz="1200">
+              <a:rPr sz="1200" dirty="0">
                 <a:solidFill>
                   <a:srgbClr val="E6E6E6"/>
                 </a:solidFill>
                 <a:latin typeface="Consolas"/>
               </a:rPr>
-              <a:t>ASMCMD&gt; pwget --asm</a:t>
-            </a:r>
+              <a:t>+DATA/</a:t>
+            </a:r>
+            <a:r>
+              <a:rPr sz="1200" dirty="0" err="1">
+                <a:solidFill>
+                  <a:srgbClr val="E6E6E6"/>
+                </a:solidFill>
+                <a:latin typeface="Consolas"/>
+              </a:rPr>
+              <a:t>orapwASM</a:t>
+            </a:r>
+            <a:endParaRPr sz="1200" dirty="0">
+              <a:solidFill>
+                <a:srgbClr val="E6E6E6"/>
+              </a:solidFill>
+              <a:latin typeface="Consolas"/>
+            </a:endParaRPr>
           </a:p>
           <a:p>
             <a:pPr>
@@ -7131,14 +7621,153 @@
                 <a:spcPts val="0"/>
               </a:spcAft>
             </a:pPr>
-            <a:r>
-              <a:rPr sz="1200">
+            <a:endParaRPr sz="1200" dirty="0">
+              <a:solidFill>
+                <a:srgbClr val="E6E6E6"/>
+              </a:solidFill>
+              <a:latin typeface="Consolas"/>
+            </a:endParaRPr>
+          </a:p>
+          <a:p>
+            <a:pPr>
+              <a:spcAft>
+                <a:spcPts val="0"/>
+              </a:spcAft>
+            </a:pPr>
+            <a:r>
+              <a:rPr sz="1200" dirty="0">
                 <a:solidFill>
                   <a:srgbClr val="E6E6E6"/>
                 </a:solidFill>
                 <a:latin typeface="Consolas"/>
               </a:rPr>
-              <a:t>+DATA/orapwASM</a:t>
+              <a:t>-- 3) </a:t>
+            </a:r>
+            <a:r>
+              <a:rPr sz="1200" dirty="0" err="1">
+                <a:solidFill>
+                  <a:srgbClr val="E6E6E6"/>
+                </a:solidFill>
+                <a:latin typeface="Consolas"/>
+              </a:rPr>
+              <a:t>로컬</a:t>
+            </a:r>
+            <a:r>
+              <a:rPr sz="1200" dirty="0">
+                <a:solidFill>
+                  <a:srgbClr val="E6E6E6"/>
+                </a:solidFill>
+                <a:latin typeface="Consolas"/>
+              </a:rPr>
+              <a:t> </a:t>
+            </a:r>
+            <a:r>
+              <a:rPr sz="1200" dirty="0" err="1">
+                <a:solidFill>
+                  <a:srgbClr val="E6E6E6"/>
+                </a:solidFill>
+                <a:latin typeface="Consolas"/>
+              </a:rPr>
+              <a:t>파일을</a:t>
+            </a:r>
+            <a:r>
+              <a:rPr sz="1200" dirty="0">
+                <a:solidFill>
+                  <a:srgbClr val="E6E6E6"/>
+                </a:solidFill>
+                <a:latin typeface="Consolas"/>
+              </a:rPr>
+              <a:t> </a:t>
+            </a:r>
+            <a:r>
+              <a:rPr sz="1200" dirty="0" err="1">
+                <a:solidFill>
+                  <a:srgbClr val="E6E6E6"/>
+                </a:solidFill>
+                <a:latin typeface="Consolas"/>
+              </a:rPr>
+              <a:t>디스크</a:t>
+            </a:r>
+            <a:r>
+              <a:rPr sz="1200" dirty="0">
+                <a:solidFill>
+                  <a:srgbClr val="E6E6E6"/>
+                </a:solidFill>
+                <a:latin typeface="Consolas"/>
+              </a:rPr>
+              <a:t> </a:t>
+            </a:r>
+            <a:r>
+              <a:rPr sz="1200" dirty="0" err="1">
+                <a:solidFill>
+                  <a:srgbClr val="E6E6E6"/>
+                </a:solidFill>
+                <a:latin typeface="Consolas"/>
+              </a:rPr>
+              <a:t>그룹으로</a:t>
+            </a:r>
+            <a:r>
+              <a:rPr sz="1200" dirty="0">
+                <a:solidFill>
+                  <a:srgbClr val="E6E6E6"/>
+                </a:solidFill>
+                <a:latin typeface="Consolas"/>
+              </a:rPr>
+              <a:t> </a:t>
+            </a:r>
+            <a:r>
+              <a:rPr sz="1200" dirty="0" err="1">
+                <a:solidFill>
+                  <a:srgbClr val="E6E6E6"/>
+                </a:solidFill>
+                <a:latin typeface="Consolas"/>
+              </a:rPr>
+              <a:t>복사</a:t>
+            </a:r>
+            <a:r>
+              <a:rPr sz="1200" dirty="0">
+                <a:solidFill>
+                  <a:srgbClr val="E6E6E6"/>
+                </a:solidFill>
+                <a:latin typeface="Consolas"/>
+              </a:rPr>
+              <a:t>(</a:t>
+            </a:r>
+            <a:r>
+              <a:rPr sz="1200" dirty="0" err="1">
+                <a:solidFill>
+                  <a:srgbClr val="E6E6E6"/>
+                </a:solidFill>
+                <a:latin typeface="Consolas"/>
+              </a:rPr>
+              <a:t>공유</a:t>
+            </a:r>
+            <a:r>
+              <a:rPr sz="1200" dirty="0">
+                <a:solidFill>
+                  <a:srgbClr val="E6E6E6"/>
+                </a:solidFill>
+                <a:latin typeface="Consolas"/>
+              </a:rPr>
+              <a:t> </a:t>
+            </a:r>
+            <a:r>
+              <a:rPr sz="1200" dirty="0" err="1">
+                <a:solidFill>
+                  <a:srgbClr val="E6E6E6"/>
+                </a:solidFill>
+                <a:latin typeface="Consolas"/>
+              </a:rPr>
+              <a:t>전환</a:t>
+            </a:r>
+            <a:r>
+              <a:rPr sz="1200" dirty="0">
+                <a:solidFill>
+                  <a:srgbClr val="E6E6E6"/>
+                </a:solidFill>
+                <a:latin typeface="Consolas"/>
+              </a:rPr>
+              <a:t>)</a:t>
             </a:r>
           </a:p>
           <a:p>
@@ -7148,14 +7777,83 @@
               </a:spcAft>
             </a:pPr>
             <a:r>
-              <a:rPr sz="1200">
+              <a:rPr sz="1200" dirty="0">
                 <a:solidFill>
                   <a:srgbClr val="E6E6E6"/>
                 </a:solidFill>
                 <a:latin typeface="Consolas"/>
               </a:rPr>
-              <a:t/>
-            </a:r>
+              <a:t>ASMCMD&gt; </a:t>
+            </a:r>
+            <a:r>
+              <a:rPr sz="1200" dirty="0" err="1">
+                <a:solidFill>
+                  <a:srgbClr val="E6E6E6"/>
+                </a:solidFill>
+                <a:latin typeface="Consolas"/>
+              </a:rPr>
+              <a:t>pwcopy</a:t>
+            </a:r>
+            <a:r>
+              <a:rPr sz="1200" dirty="0">
+                <a:solidFill>
+                  <a:srgbClr val="E6E6E6"/>
+                </a:solidFill>
+                <a:latin typeface="Consolas"/>
+              </a:rPr>
+              <a:t> --</a:t>
+            </a:r>
+            <a:r>
+              <a:rPr sz="1200" dirty="0" err="1">
+                <a:solidFill>
+                  <a:srgbClr val="E6E6E6"/>
+                </a:solidFill>
+                <a:latin typeface="Consolas"/>
+              </a:rPr>
+              <a:t>asm</a:t>
+            </a:r>
+            <a:r>
+              <a:rPr sz="1200" dirty="0">
+                <a:solidFill>
+                  <a:srgbClr val="E6E6E6"/>
+                </a:solidFill>
+                <a:latin typeface="Consolas"/>
+              </a:rPr>
+              <a:t> /u01/.../</a:t>
+            </a:r>
+            <a:r>
+              <a:rPr sz="1200" dirty="0" err="1">
+                <a:solidFill>
+                  <a:srgbClr val="E6E6E6"/>
+                </a:solidFill>
+                <a:latin typeface="Consolas"/>
+              </a:rPr>
+              <a:t>orapwASM</a:t>
+            </a:r>
+            <a:r>
+              <a:rPr sz="1200" dirty="0">
+                <a:solidFill>
+                  <a:srgbClr val="E6E6E6"/>
+                </a:solidFill>
+                <a:latin typeface="Consolas"/>
+              </a:rPr>
+              <a:t> +DATA/</a:t>
+            </a:r>
+            <a:r>
+              <a:rPr sz="1200" dirty="0" err="1">
+                <a:solidFill>
+                  <a:srgbClr val="E6E6E6"/>
+                </a:solidFill>
+                <a:latin typeface="Consolas"/>
+              </a:rPr>
+              <a:t>orapwASM</a:t>
+            </a:r>
+            <a:endParaRPr sz="1200" dirty="0">
+              <a:solidFill>
+                <a:srgbClr val="E6E6E6"/>
+              </a:solidFill>
+              <a:latin typeface="Consolas"/>
+            </a:endParaRPr>
           </a:p>
           <a:p>
             <a:pPr>
@@ -7164,46 +7862,65 @@
               </a:spcAft>
             </a:pPr>
             <a:r>
-              <a:rPr sz="1200">
+              <a:rPr sz="1200" dirty="0">
                 <a:solidFill>
                   <a:srgbClr val="E6E6E6"/>
                 </a:solidFill>
                 <a:latin typeface="Consolas"/>
               </a:rPr>
-              <a:t>-- 3) 로컬 파일을 디스크 그룹으로 복사(공유 전환)</a:t>
-            </a:r>
-          </a:p>
-          <a:p>
-            <a:pPr>
-              <a:spcAft>
-                <a:spcPts val="0"/>
-              </a:spcAft>
-            </a:pPr>
-            <a:r>
-              <a:rPr sz="1200">
+              <a:t>ASMCMD&gt; </a:t>
+            </a:r>
+            <a:r>
+              <a:rPr sz="1200" dirty="0" err="1">
                 <a:solidFill>
                   <a:srgbClr val="E6E6E6"/>
                 </a:solidFill>
                 <a:latin typeface="Consolas"/>
               </a:rPr>
-              <a:t>ASMCMD&gt; pwcopy --asm /u01/.../orapwASM +DATA/orapwASM</a:t>
-            </a:r>
-          </a:p>
-          <a:p>
-            <a:pPr>
-              <a:spcAft>
-                <a:spcPts val="0"/>
-              </a:spcAft>
-            </a:pPr>
-            <a:r>
-              <a:rPr sz="1200">
+              <a:t>pwset</a:t>
+            </a:r>
+            <a:r>
+              <a:rPr sz="1200" dirty="0">
                 <a:solidFill>
                   <a:srgbClr val="E6E6E6"/>
                 </a:solidFill>
                 <a:latin typeface="Consolas"/>
               </a:rPr>
-              <a:t>ASMCMD&gt; pwset --asm +DATA/orapwASM</a:t>
-            </a:r>
+              <a:t> --</a:t>
+            </a:r>
+            <a:r>
+              <a:rPr sz="1200" dirty="0" err="1">
+                <a:solidFill>
+                  <a:srgbClr val="E6E6E6"/>
+                </a:solidFill>
+                <a:latin typeface="Consolas"/>
+              </a:rPr>
+              <a:t>asm</a:t>
+            </a:r>
+            <a:r>
+              <a:rPr sz="1200" dirty="0">
+                <a:solidFill>
+                  <a:srgbClr val="E6E6E6"/>
+                </a:solidFill>
+                <a:latin typeface="Consolas"/>
+              </a:rPr>
+              <a:t> +DATA/</a:t>
+            </a:r>
+            <a:r>
+              <a:rPr sz="1200" dirty="0" err="1">
+                <a:solidFill>
+                  <a:srgbClr val="E6E6E6"/>
+                </a:solidFill>
+                <a:latin typeface="Consolas"/>
+              </a:rPr>
+              <a:t>orapwASM</a:t>
+            </a:r>
+            <a:endParaRPr sz="1200" dirty="0">
+              <a:solidFill>
+                <a:srgbClr val="E6E6E6"/>
+              </a:solidFill>
+              <a:latin typeface="Consolas"/>
+            </a:endParaRPr>
           </a:p>
         </p:txBody>
       </p:sp>
@@ -7216,7 +7933,7 @@
 </file>
 
 <file path=ppt/slides/slide16.xml><?xml version="1.0" encoding="utf-8"?>
-<p:sld xmlns:a="http://schemas.openxmlformats.org/drawingml/2006/main" xmlns:p="http://schemas.openxmlformats.org/presentationml/2006/main" xmlns:r="http://schemas.openxmlformats.org/officeDocument/2006/relationships">
+<p:sld xmlns:a="http://schemas.openxmlformats.org/drawingml/2006/main" xmlns:r="http://schemas.openxmlformats.org/officeDocument/2006/relationships" xmlns:p="http://schemas.openxmlformats.org/presentationml/2006/main">
   <p:cSld>
     <p:spTree>
       <p:nvGrpSpPr>
@@ -7224,7 +7941,14 @@
         <p:cNvGrpSpPr/>
         <p:nvPr/>
       </p:nvGrpSpPr>
-      <p:grpSpPr/>
+      <p:grpSpPr>
+        <a:xfrm>
+          <a:off x="0" y="0"/>
+          <a:ext cx="0" cy="0"/>
+          <a:chOff x="0" y="0"/>
+          <a:chExt cx="0" cy="0"/>
+        </a:xfrm>
+      </p:grpSpPr>
       <p:sp>
         <p:nvSpPr>
           <p:cNvPr id="2" name="Rectangle 1"/>
@@ -7266,6 +7990,7 @@
           <a:lstStyle/>
           <a:p>
             <a:pPr algn="ctr"/>
+            <a:endParaRPr/>
           </a:p>
         </p:txBody>
       </p:sp>
@@ -7380,6 +8105,7 @@
           <a:lstStyle/>
           <a:p>
             <a:pPr algn="ctr"/>
+            <a:endParaRPr/>
           </a:p>
         </p:txBody>
       </p:sp>
@@ -7479,7 +8205,7 @@
 </file>
 
 <file path=ppt/slides/slide17.xml><?xml version="1.0" encoding="utf-8"?>
-<p:sld xmlns:a="http://schemas.openxmlformats.org/drawingml/2006/main" xmlns:p="http://schemas.openxmlformats.org/presentationml/2006/main" xmlns:r="http://schemas.openxmlformats.org/officeDocument/2006/relationships">
+<p:sld xmlns:a="http://schemas.openxmlformats.org/drawingml/2006/main" xmlns:r="http://schemas.openxmlformats.org/officeDocument/2006/relationships" xmlns:p="http://schemas.openxmlformats.org/presentationml/2006/main">
   <p:cSld>
     <p:spTree>
       <p:nvGrpSpPr>
@@ -7487,7 +8213,14 @@
         <p:cNvGrpSpPr/>
         <p:nvPr/>
       </p:nvGrpSpPr>
-      <p:grpSpPr/>
+      <p:grpSpPr>
+        <a:xfrm>
+          <a:off x="0" y="0"/>
+          <a:ext cx="0" cy="0"/>
+          <a:chOff x="0" y="0"/>
+          <a:chExt cx="0" cy="0"/>
+        </a:xfrm>
+      </p:grpSpPr>
       <p:sp>
         <p:nvSpPr>
           <p:cNvPr id="2" name="Rectangle 1"/>
@@ -7529,6 +8262,7 @@
           <a:lstStyle/>
           <a:p>
             <a:pPr algn="ctr"/>
+            <a:endParaRPr/>
           </a:p>
         </p:txBody>
       </p:sp>
@@ -7730,7 +8464,7 @@
 </file>
 
 <file path=ppt/slides/slide18.xml><?xml version="1.0" encoding="utf-8"?>
-<p:sld xmlns:a="http://schemas.openxmlformats.org/drawingml/2006/main" xmlns:p="http://schemas.openxmlformats.org/presentationml/2006/main" xmlns:r="http://schemas.openxmlformats.org/officeDocument/2006/relationships">
+<p:sld xmlns:a="http://schemas.openxmlformats.org/drawingml/2006/main" xmlns:r="http://schemas.openxmlformats.org/officeDocument/2006/relationships" xmlns:p="http://schemas.openxmlformats.org/presentationml/2006/main">
   <p:cSld>
     <p:spTree>
       <p:nvGrpSpPr>
@@ -7738,7 +8472,14 @@
         <p:cNvGrpSpPr/>
         <p:nvPr/>
       </p:nvGrpSpPr>
-      <p:grpSpPr/>
+      <p:grpSpPr>
+        <a:xfrm>
+          <a:off x="0" y="0"/>
+          <a:ext cx="0" cy="0"/>
+          <a:chOff x="0" y="0"/>
+          <a:chExt cx="0" cy="0"/>
+        </a:xfrm>
+      </p:grpSpPr>
       <p:sp>
         <p:nvSpPr>
           <p:cNvPr id="2" name="Rectangle 1"/>
@@ -7780,6 +8521,7 @@
           <a:lstStyle/>
           <a:p>
             <a:pPr algn="ctr"/>
+            <a:endParaRPr/>
           </a:p>
         </p:txBody>
       </p:sp>
@@ -7890,16 +8632,16 @@
           </a:fontRef>
         </p:style>
         <p:txBody>
-          <a:bodyPr rtlCol="0" anchor="ctr" wrap="square" lIns="137160" tIns="91440" rIns="137160"/>
-          <a:lstStyle/>
-          <a:p>
-            <a:pPr algn="ctr">
+          <a:bodyPr wrap="square" lIns="137160" tIns="91440" rIns="137160" rtlCol="0" anchor="ctr"/>
+          <a:lstStyle/>
+          <a:p>
+            <a:pPr>
               <a:spcAft>
                 <a:spcPts val="0"/>
               </a:spcAft>
             </a:pPr>
             <a:r>
-              <a:rPr sz="1200">
+              <a:rPr sz="1200" dirty="0">
                 <a:solidFill>
                   <a:srgbClr val="E6E6E6"/>
                 </a:solidFill>
@@ -7915,7 +8657,7 @@
               </a:spcAft>
             </a:pPr>
             <a:r>
-              <a:rPr sz="1200">
+              <a:rPr sz="1200" dirty="0">
                 <a:solidFill>
                   <a:srgbClr val="E6E6E6"/>
                 </a:solidFill>
@@ -7931,7 +8673,7 @@
               </a:spcAft>
             </a:pPr>
             <a:r>
-              <a:rPr sz="1200">
+              <a:rPr sz="1200" dirty="0">
                 <a:solidFill>
                   <a:srgbClr val="E6E6E6"/>
                 </a:solidFill>
@@ -7947,7 +8689,7 @@
               </a:spcAft>
             </a:pPr>
             <a:r>
-              <a:rPr sz="1200">
+              <a:rPr sz="1200" dirty="0">
                 <a:solidFill>
                   <a:srgbClr val="E6E6E6"/>
                 </a:solidFill>
@@ -7963,7 +8705,7 @@
               </a:spcAft>
             </a:pPr>
             <a:r>
-              <a:rPr sz="1200">
+              <a:rPr sz="1200" dirty="0">
                 <a:solidFill>
                   <a:srgbClr val="E6E6E6"/>
                 </a:solidFill>
@@ -7979,13 +8721,31 @@
               </a:spcAft>
             </a:pPr>
             <a:r>
-              <a:rPr sz="1200">
+              <a:rPr sz="1200" dirty="0">
                 <a:solidFill>
                   <a:srgbClr val="E6E6E6"/>
                 </a:solidFill>
                 <a:latin typeface="Consolas"/>
               </a:rPr>
-              <a:t>  6    ATTRIBUTE 'au_size'='4M',</a:t>
+              <a:t>  6    ATTRIBUTE '</a:t>
+            </a:r>
+            <a:r>
+              <a:rPr sz="1200" dirty="0" err="1">
+                <a:solidFill>
+                  <a:srgbClr val="E6E6E6"/>
+                </a:solidFill>
+                <a:latin typeface="Consolas"/>
+              </a:rPr>
+              <a:t>au_size</a:t>
+            </a:r>
+            <a:r>
+              <a:rPr sz="1200" dirty="0">
+                <a:solidFill>
+                  <a:srgbClr val="E6E6E6"/>
+                </a:solidFill>
+                <a:latin typeface="Consolas"/>
+              </a:rPr>
+              <a:t>'='4M',</a:t>
             </a:r>
           </a:p>
           <a:p>
@@ -7995,7 +8755,7 @@
               </a:spcAft>
             </a:pPr>
             <a:r>
-              <a:rPr sz="1200">
+              <a:rPr sz="1200" dirty="0">
                 <a:solidFill>
                   <a:srgbClr val="E6E6E6"/>
                 </a:solidFill>
@@ -8011,13 +8771,31 @@
               </a:spcAft>
             </a:pPr>
             <a:r>
-              <a:rPr sz="1200">
+              <a:rPr sz="1200" dirty="0">
                 <a:solidFill>
                   <a:srgbClr val="E6E6E6"/>
                 </a:solidFill>
                 <a:latin typeface="Consolas"/>
               </a:rPr>
-              <a:t>  8              'compatible.rdbms'='19.0.0.0';</a:t>
+              <a:t>  8              '</a:t>
+            </a:r>
+            <a:r>
+              <a:rPr sz="1200" dirty="0" err="1">
+                <a:solidFill>
+                  <a:srgbClr val="E6E6E6"/>
+                </a:solidFill>
+                <a:latin typeface="Consolas"/>
+              </a:rPr>
+              <a:t>compatible.rdbms</a:t>
+            </a:r>
+            <a:r>
+              <a:rPr sz="1200" dirty="0">
+                <a:solidFill>
+                  <a:srgbClr val="E6E6E6"/>
+                </a:solidFill>
+                <a:latin typeface="Consolas"/>
+              </a:rPr>
+              <a:t>'='19.0.0.0';</a:t>
             </a:r>
           </a:p>
           <a:p>
@@ -8027,13 +8805,22 @@
               </a:spcAft>
             </a:pPr>
             <a:r>
-              <a:rPr sz="1200">
+              <a:rPr sz="1200" dirty="0" err="1">
                 <a:solidFill>
                   <a:srgbClr val="E6E6E6"/>
                 </a:solidFill>
                 <a:latin typeface="Consolas"/>
               </a:rPr>
-              <a:t>Diskgroup created.</a:t>
+              <a:t>Diskgroup</a:t>
+            </a:r>
+            <a:r>
+              <a:rPr sz="1200" dirty="0">
+                <a:solidFill>
+                  <a:srgbClr val="E6E6E6"/>
+                </a:solidFill>
+                <a:latin typeface="Consolas"/>
+              </a:rPr>
+              <a:t> created.</a:t>
             </a:r>
           </a:p>
         </p:txBody>
@@ -8047,7 +8834,7 @@
 </file>
 
 <file path=ppt/slides/slide19.xml><?xml version="1.0" encoding="utf-8"?>
-<p:sld xmlns:a="http://schemas.openxmlformats.org/drawingml/2006/main" xmlns:p="http://schemas.openxmlformats.org/presentationml/2006/main" xmlns:r="http://schemas.openxmlformats.org/officeDocument/2006/relationships">
+<p:sld xmlns:a="http://schemas.openxmlformats.org/drawingml/2006/main" xmlns:r="http://schemas.openxmlformats.org/officeDocument/2006/relationships" xmlns:p="http://schemas.openxmlformats.org/presentationml/2006/main">
   <p:cSld>
     <p:spTree>
       <p:nvGrpSpPr>
@@ -8055,7 +8842,14 @@
         <p:cNvGrpSpPr/>
         <p:nvPr/>
       </p:nvGrpSpPr>
-      <p:grpSpPr/>
+      <p:grpSpPr>
+        <a:xfrm>
+          <a:off x="0" y="0"/>
+          <a:ext cx="0" cy="0"/>
+          <a:chOff x="0" y="0"/>
+          <a:chExt cx="0" cy="0"/>
+        </a:xfrm>
+      </p:grpSpPr>
       <p:sp>
         <p:nvSpPr>
           <p:cNvPr id="2" name="Rectangle 1"/>
@@ -8097,6 +8891,7 @@
           <a:lstStyle/>
           <a:p>
             <a:pPr algn="ctr"/>
+            <a:endParaRPr/>
           </a:p>
         </p:txBody>
       </p:sp>
@@ -8211,6 +9006,7 @@
           <a:lstStyle/>
           <a:p>
             <a:pPr algn="ctr"/>
+            <a:endParaRPr/>
           </a:p>
         </p:txBody>
       </p:sp>
@@ -8310,7 +9106,7 @@
 </file>
 
 <file path=ppt/slides/slide2.xml><?xml version="1.0" encoding="utf-8"?>
-<p:sld xmlns:a="http://schemas.openxmlformats.org/drawingml/2006/main" xmlns:p="http://schemas.openxmlformats.org/presentationml/2006/main" xmlns:r="http://schemas.openxmlformats.org/officeDocument/2006/relationships">
+<p:sld xmlns:a="http://schemas.openxmlformats.org/drawingml/2006/main" xmlns:r="http://schemas.openxmlformats.org/officeDocument/2006/relationships" xmlns:p="http://schemas.openxmlformats.org/presentationml/2006/main">
   <p:cSld>
     <p:spTree>
       <p:nvGrpSpPr>
@@ -8318,7 +9114,14 @@
         <p:cNvGrpSpPr/>
         <p:nvPr/>
       </p:nvGrpSpPr>
-      <p:grpSpPr/>
+      <p:grpSpPr>
+        <a:xfrm>
+          <a:off x="0" y="0"/>
+          <a:ext cx="0" cy="0"/>
+          <a:chOff x="0" y="0"/>
+          <a:chExt cx="0" cy="0"/>
+        </a:xfrm>
+      </p:grpSpPr>
       <p:sp>
         <p:nvSpPr>
           <p:cNvPr id="2" name="Rectangle 1"/>
@@ -8360,6 +9163,7 @@
           <a:lstStyle/>
           <a:p>
             <a:pPr algn="ctr"/>
+            <a:endParaRPr/>
           </a:p>
         </p:txBody>
       </p:sp>
@@ -8558,7 +9362,7 @@
 </file>
 
 <file path=ppt/slides/slide20.xml><?xml version="1.0" encoding="utf-8"?>
-<p:sld xmlns:a="http://schemas.openxmlformats.org/drawingml/2006/main" xmlns:p="http://schemas.openxmlformats.org/presentationml/2006/main" xmlns:r="http://schemas.openxmlformats.org/officeDocument/2006/relationships">
+<p:sld xmlns:a="http://schemas.openxmlformats.org/drawingml/2006/main" xmlns:r="http://schemas.openxmlformats.org/officeDocument/2006/relationships" xmlns:p="http://schemas.openxmlformats.org/presentationml/2006/main">
   <p:cSld>
     <p:spTree>
       <p:nvGrpSpPr>
@@ -8566,7 +9370,14 @@
         <p:cNvGrpSpPr/>
         <p:nvPr/>
       </p:nvGrpSpPr>
-      <p:grpSpPr/>
+      <p:grpSpPr>
+        <a:xfrm>
+          <a:off x="0" y="0"/>
+          <a:ext cx="0" cy="0"/>
+          <a:chOff x="0" y="0"/>
+          <a:chExt cx="0" cy="0"/>
+        </a:xfrm>
+      </p:grpSpPr>
       <p:sp>
         <p:nvSpPr>
           <p:cNvPr id="2" name="Rectangle 1"/>
@@ -8608,6 +9419,7 @@
           <a:lstStyle/>
           <a:p>
             <a:pPr algn="ctr"/>
+            <a:endParaRPr/>
           </a:p>
         </p:txBody>
       </p:sp>
@@ -8793,7 +9605,7 @@
 </file>
 
 <file path=ppt/slides/slide21.xml><?xml version="1.0" encoding="utf-8"?>
-<p:sld xmlns:a="http://schemas.openxmlformats.org/drawingml/2006/main" xmlns:p="http://schemas.openxmlformats.org/presentationml/2006/main" xmlns:r="http://schemas.openxmlformats.org/officeDocument/2006/relationships">
+<p:sld xmlns:a="http://schemas.openxmlformats.org/drawingml/2006/main" xmlns:r="http://schemas.openxmlformats.org/officeDocument/2006/relationships" xmlns:p="http://schemas.openxmlformats.org/presentationml/2006/main">
   <p:cSld>
     <p:spTree>
       <p:nvGrpSpPr>
@@ -8801,7 +9613,14 @@
         <p:cNvGrpSpPr/>
         <p:nvPr/>
       </p:nvGrpSpPr>
-      <p:grpSpPr/>
+      <p:grpSpPr>
+        <a:xfrm>
+          <a:off x="0" y="0"/>
+          <a:ext cx="0" cy="0"/>
+          <a:chOff x="0" y="0"/>
+          <a:chExt cx="0" cy="0"/>
+        </a:xfrm>
+      </p:grpSpPr>
       <p:sp>
         <p:nvSpPr>
           <p:cNvPr id="2" name="Rectangle 1"/>
@@ -8843,6 +9662,7 @@
           <a:lstStyle/>
           <a:p>
             <a:pPr algn="ctr"/>
+            <a:endParaRPr/>
           </a:p>
         </p:txBody>
       </p:sp>
@@ -9044,7 +9864,7 @@
 </file>
 
 <file path=ppt/slides/slide22.xml><?xml version="1.0" encoding="utf-8"?>
-<p:sld xmlns:a="http://schemas.openxmlformats.org/drawingml/2006/main" xmlns:p="http://schemas.openxmlformats.org/presentationml/2006/main" xmlns:r="http://schemas.openxmlformats.org/officeDocument/2006/relationships">
+<p:sld xmlns:a="http://schemas.openxmlformats.org/drawingml/2006/main" xmlns:r="http://schemas.openxmlformats.org/officeDocument/2006/relationships" xmlns:p="http://schemas.openxmlformats.org/presentationml/2006/main">
   <p:cSld>
     <p:spTree>
       <p:nvGrpSpPr>
@@ -9052,7 +9872,14 @@
         <p:cNvGrpSpPr/>
         <p:nvPr/>
       </p:nvGrpSpPr>
-      <p:grpSpPr/>
+      <p:grpSpPr>
+        <a:xfrm>
+          <a:off x="0" y="0"/>
+          <a:ext cx="0" cy="0"/>
+          <a:chOff x="0" y="0"/>
+          <a:chExt cx="0" cy="0"/>
+        </a:xfrm>
+      </p:grpSpPr>
       <p:sp>
         <p:nvSpPr>
           <p:cNvPr id="2" name="Rectangle 1"/>
@@ -9094,6 +9921,7 @@
           <a:lstStyle/>
           <a:p>
             <a:pPr algn="ctr"/>
+            <a:endParaRPr/>
           </a:p>
         </p:txBody>
       </p:sp>
@@ -9208,6 +10036,7 @@
           <a:lstStyle/>
           <a:p>
             <a:pPr algn="ctr"/>
+            <a:endParaRPr/>
           </a:p>
         </p:txBody>
       </p:sp>
@@ -9307,7 +10136,7 @@
 </file>
 
 <file path=ppt/slides/slide23.xml><?xml version="1.0" encoding="utf-8"?>
-<p:sld xmlns:a="http://schemas.openxmlformats.org/drawingml/2006/main" xmlns:p="http://schemas.openxmlformats.org/presentationml/2006/main" xmlns:r="http://schemas.openxmlformats.org/officeDocument/2006/relationships">
+<p:sld xmlns:a="http://schemas.openxmlformats.org/drawingml/2006/main" xmlns:r="http://schemas.openxmlformats.org/officeDocument/2006/relationships" xmlns:p="http://schemas.openxmlformats.org/presentationml/2006/main">
   <p:cSld>
     <p:spTree>
       <p:nvGrpSpPr>
@@ -9315,7 +10144,14 @@
         <p:cNvGrpSpPr/>
         <p:nvPr/>
       </p:nvGrpSpPr>
-      <p:grpSpPr/>
+      <p:grpSpPr>
+        <a:xfrm>
+          <a:off x="0" y="0"/>
+          <a:ext cx="0" cy="0"/>
+          <a:chOff x="0" y="0"/>
+          <a:chExt cx="0" cy="0"/>
+        </a:xfrm>
+      </p:grpSpPr>
       <p:sp>
         <p:nvSpPr>
           <p:cNvPr id="2" name="Rectangle 1"/>
@@ -9357,6 +10193,7 @@
           <a:lstStyle/>
           <a:p>
             <a:pPr algn="ctr"/>
+            <a:endParaRPr/>
           </a:p>
         </p:txBody>
       </p:sp>
@@ -9558,7 +10395,7 @@
 </file>
 
 <file path=ppt/slides/slide24.xml><?xml version="1.0" encoding="utf-8"?>
-<p:sld xmlns:a="http://schemas.openxmlformats.org/drawingml/2006/main" xmlns:p="http://schemas.openxmlformats.org/presentationml/2006/main" xmlns:r="http://schemas.openxmlformats.org/officeDocument/2006/relationships">
+<p:sld xmlns:a="http://schemas.openxmlformats.org/drawingml/2006/main" xmlns:r="http://schemas.openxmlformats.org/officeDocument/2006/relationships" xmlns:p="http://schemas.openxmlformats.org/presentationml/2006/main">
   <p:cSld>
     <p:spTree>
       <p:nvGrpSpPr>
@@ -9566,7 +10403,14 @@
         <p:cNvGrpSpPr/>
         <p:nvPr/>
       </p:nvGrpSpPr>
-      <p:grpSpPr/>
+      <p:grpSpPr>
+        <a:xfrm>
+          <a:off x="0" y="0"/>
+          <a:ext cx="0" cy="0"/>
+          <a:chOff x="0" y="0"/>
+          <a:chExt cx="0" cy="0"/>
+        </a:xfrm>
+      </p:grpSpPr>
       <p:sp>
         <p:nvSpPr>
           <p:cNvPr id="2" name="Rectangle 1"/>
@@ -9608,6 +10452,7 @@
           <a:lstStyle/>
           <a:p>
             <a:pPr algn="ctr"/>
+            <a:endParaRPr/>
           </a:p>
         </p:txBody>
       </p:sp>
@@ -9718,16 +10563,16 @@
           </a:fontRef>
         </p:style>
         <p:txBody>
-          <a:bodyPr rtlCol="0" anchor="ctr" wrap="square" lIns="137160" tIns="91440" rIns="137160"/>
-          <a:lstStyle/>
-          <a:p>
-            <a:pPr algn="ctr">
+          <a:bodyPr wrap="square" lIns="137160" tIns="91440" rIns="137160" rtlCol="0" anchor="ctr"/>
+          <a:lstStyle/>
+          <a:p>
+            <a:pPr>
               <a:spcAft>
                 <a:spcPts val="0"/>
               </a:spcAft>
             </a:pPr>
             <a:r>
-              <a:rPr sz="1200">
+              <a:rPr sz="1200" dirty="0">
                 <a:solidFill>
                   <a:srgbClr val="E6E6E6"/>
                 </a:solidFill>
@@ -9743,7 +10588,7 @@
               </a:spcAft>
             </a:pPr>
             <a:r>
-              <a:rPr sz="1200">
+              <a:rPr sz="1200" dirty="0">
                 <a:solidFill>
                   <a:srgbClr val="E6E6E6"/>
                 </a:solidFill>
@@ -9759,7 +10604,7 @@
               </a:spcAft>
             </a:pPr>
             <a:r>
-              <a:rPr sz="1200">
+              <a:rPr sz="1200" dirty="0">
                 <a:solidFill>
                   <a:srgbClr val="E6E6E6"/>
                 </a:solidFill>
@@ -9775,7 +10620,7 @@
               </a:spcAft>
             </a:pPr>
             <a:r>
-              <a:rPr sz="1200">
+              <a:rPr sz="1200" dirty="0">
                 <a:solidFill>
                   <a:srgbClr val="E6E6E6"/>
                 </a:solidFill>
@@ -9791,13 +10636,22 @@
               </a:spcAft>
             </a:pPr>
             <a:r>
-              <a:rPr sz="1200">
+              <a:rPr sz="1200" dirty="0" err="1">
                 <a:solidFill>
                   <a:srgbClr val="E6E6E6"/>
                 </a:solidFill>
                 <a:latin typeface="Consolas"/>
               </a:rPr>
-              <a:t>Diskgroup altered.</a:t>
+              <a:t>Diskgroup</a:t>
+            </a:r>
+            <a:r>
+              <a:rPr sz="1200" dirty="0">
+                <a:solidFill>
+                  <a:srgbClr val="E6E6E6"/>
+                </a:solidFill>
+                <a:latin typeface="Consolas"/>
+              </a:rPr>
+              <a:t> altered.</a:t>
             </a:r>
           </a:p>
           <a:p>
@@ -9806,15 +10660,43 @@
                 <a:spcPts val="0"/>
               </a:spcAft>
             </a:pPr>
-            <a:r>
-              <a:rPr sz="1200">
+            <a:endParaRPr sz="1200" dirty="0">
+              <a:solidFill>
+                <a:srgbClr val="E6E6E6"/>
+              </a:solidFill>
+              <a:latin typeface="Consolas"/>
+            </a:endParaRPr>
+          </a:p>
+          <a:p>
+            <a:pPr>
+              <a:spcAft>
+                <a:spcPts val="0"/>
+              </a:spcAft>
+            </a:pPr>
+            <a:r>
+              <a:rPr sz="1200" dirty="0">
                 <a:solidFill>
                   <a:srgbClr val="E6E6E6"/>
                 </a:solidFill>
                 <a:latin typeface="Consolas"/>
               </a:rPr>
-              <a:t/>
-            </a:r>
+              <a:t>SQL&gt; SELECT operation, state, power, </a:t>
+            </a:r>
+            <a:r>
+              <a:rPr sz="1200" dirty="0" err="1">
+                <a:solidFill>
+                  <a:srgbClr val="E6E6E6"/>
+                </a:solidFill>
+                <a:latin typeface="Consolas"/>
+              </a:rPr>
+              <a:t>est_minutes</a:t>
+            </a:r>
+            <a:endParaRPr sz="1200" dirty="0">
+              <a:solidFill>
+                <a:srgbClr val="E6E6E6"/>
+              </a:solidFill>
+              <a:latin typeface="Consolas"/>
+            </a:endParaRPr>
           </a:p>
           <a:p>
             <a:pPr>
@@ -9823,13 +10705,31 @@
               </a:spcAft>
             </a:pPr>
             <a:r>
-              <a:rPr sz="1200">
+              <a:rPr sz="1200" dirty="0">
                 <a:solidFill>
                   <a:srgbClr val="E6E6E6"/>
                 </a:solidFill>
                 <a:latin typeface="Consolas"/>
               </a:rPr>
-              <a:t>SQL&gt; SELECT operation, state, power, est_minutes</a:t>
+              <a:t>  2    FROM </a:t>
+            </a:r>
+            <a:r>
+              <a:rPr sz="1200" dirty="0" err="1">
+                <a:solidFill>
+                  <a:srgbClr val="E6E6E6"/>
+                </a:solidFill>
+                <a:latin typeface="Consolas"/>
+              </a:rPr>
+              <a:t>v$asm_operation</a:t>
+            </a:r>
+            <a:r>
+              <a:rPr sz="1200" dirty="0">
+                <a:solidFill>
+                  <a:srgbClr val="E6E6E6"/>
+                </a:solidFill>
+                <a:latin typeface="Consolas"/>
+              </a:rPr>
+              <a:t>;</a:t>
             </a:r>
           </a:p>
           <a:p>
@@ -9839,13 +10739,13 @@
               </a:spcAft>
             </a:pPr>
             <a:r>
-              <a:rPr sz="1200">
+              <a:rPr sz="1200" dirty="0">
                 <a:solidFill>
                   <a:srgbClr val="E6E6E6"/>
                 </a:solidFill>
                 <a:latin typeface="Consolas"/>
               </a:rPr>
-              <a:t>  2    FROM v$asm_operation;</a:t>
+              <a:t>OPERA STATE   POWER EST_MINUTES</a:t>
             </a:r>
           </a:p>
           <a:p>
@@ -9855,13 +10755,13 @@
               </a:spcAft>
             </a:pPr>
             <a:r>
-              <a:rPr sz="1200">
+              <a:rPr sz="1200" dirty="0">
                 <a:solidFill>
                   <a:srgbClr val="E6E6E6"/>
                 </a:solidFill>
                 <a:latin typeface="Consolas"/>
               </a:rPr>
-              <a:t>OPERA STATE   POWER EST_MINUTES</a:t>
+              <a:t>----- ------- ----- -----------</a:t>
             </a:r>
           </a:p>
           <a:p>
@@ -9871,23 +10771,7 @@
               </a:spcAft>
             </a:pPr>
             <a:r>
-              <a:rPr sz="1200">
-                <a:solidFill>
-                  <a:srgbClr val="E6E6E6"/>
-                </a:solidFill>
-                <a:latin typeface="Consolas"/>
-              </a:rPr>
-              <a:t>----- ------- ----- -----------</a:t>
-            </a:r>
-          </a:p>
-          <a:p>
-            <a:pPr>
-              <a:spcAft>
-                <a:spcPts val="0"/>
-              </a:spcAft>
-            </a:pPr>
-            <a:r>
-              <a:rPr sz="1200">
+              <a:rPr sz="1200" dirty="0">
                 <a:solidFill>
                   <a:srgbClr val="E6E6E6"/>
                 </a:solidFill>
@@ -9907,7 +10791,7 @@
 </file>
 
 <file path=ppt/slides/slide25.xml><?xml version="1.0" encoding="utf-8"?>
-<p:sld xmlns:a="http://schemas.openxmlformats.org/drawingml/2006/main" xmlns:p="http://schemas.openxmlformats.org/presentationml/2006/main" xmlns:r="http://schemas.openxmlformats.org/officeDocument/2006/relationships">
+<p:sld xmlns:a="http://schemas.openxmlformats.org/drawingml/2006/main" xmlns:r="http://schemas.openxmlformats.org/officeDocument/2006/relationships" xmlns:p="http://schemas.openxmlformats.org/presentationml/2006/main">
   <p:cSld>
     <p:spTree>
       <p:nvGrpSpPr>
@@ -9915,7 +10799,14 @@
         <p:cNvGrpSpPr/>
         <p:nvPr/>
       </p:nvGrpSpPr>
-      <p:grpSpPr/>
+      <p:grpSpPr>
+        <a:xfrm>
+          <a:off x="0" y="0"/>
+          <a:ext cx="0" cy="0"/>
+          <a:chOff x="0" y="0"/>
+          <a:chExt cx="0" cy="0"/>
+        </a:xfrm>
+      </p:grpSpPr>
       <p:sp>
         <p:nvSpPr>
           <p:cNvPr id="2" name="Rectangle 1"/>
@@ -9957,6 +10848,7 @@
           <a:lstStyle/>
           <a:p>
             <a:pPr algn="ctr"/>
+            <a:endParaRPr/>
           </a:p>
         </p:txBody>
       </p:sp>
@@ -10071,6 +10963,7 @@
           <a:lstStyle/>
           <a:p>
             <a:pPr algn="ctr"/>
+            <a:endParaRPr/>
           </a:p>
         </p:txBody>
       </p:sp>
@@ -10170,7 +11063,7 @@
 </file>
 
 <file path=ppt/slides/slide26.xml><?xml version="1.0" encoding="utf-8"?>
-<p:sld xmlns:a="http://schemas.openxmlformats.org/drawingml/2006/main" xmlns:p="http://schemas.openxmlformats.org/presentationml/2006/main" xmlns:r="http://schemas.openxmlformats.org/officeDocument/2006/relationships">
+<p:sld xmlns:a="http://schemas.openxmlformats.org/drawingml/2006/main" xmlns:r="http://schemas.openxmlformats.org/officeDocument/2006/relationships" xmlns:p="http://schemas.openxmlformats.org/presentationml/2006/main">
   <p:cSld>
     <p:spTree>
       <p:nvGrpSpPr>
@@ -10178,7 +11071,14 @@
         <p:cNvGrpSpPr/>
         <p:nvPr/>
       </p:nvGrpSpPr>
-      <p:grpSpPr/>
+      <p:grpSpPr>
+        <a:xfrm>
+          <a:off x="0" y="0"/>
+          <a:ext cx="0" cy="0"/>
+          <a:chOff x="0" y="0"/>
+          <a:chExt cx="0" cy="0"/>
+        </a:xfrm>
+      </p:grpSpPr>
       <p:sp>
         <p:nvSpPr>
           <p:cNvPr id="2" name="Rectangle 1"/>
@@ -10220,6 +11120,7 @@
           <a:lstStyle/>
           <a:p>
             <a:pPr algn="ctr"/>
+            <a:endParaRPr/>
           </a:p>
         </p:txBody>
       </p:sp>
@@ -10421,7 +11322,7 @@
 </file>
 
 <file path=ppt/slides/slide27.xml><?xml version="1.0" encoding="utf-8"?>
-<p:sld xmlns:a="http://schemas.openxmlformats.org/drawingml/2006/main" xmlns:p="http://schemas.openxmlformats.org/presentationml/2006/main" xmlns:r="http://schemas.openxmlformats.org/officeDocument/2006/relationships">
+<p:sld xmlns:a="http://schemas.openxmlformats.org/drawingml/2006/main" xmlns:r="http://schemas.openxmlformats.org/officeDocument/2006/relationships" xmlns:p="http://schemas.openxmlformats.org/presentationml/2006/main">
   <p:cSld>
     <p:spTree>
       <p:nvGrpSpPr>
@@ -10429,7 +11330,14 @@
         <p:cNvGrpSpPr/>
         <p:nvPr/>
       </p:nvGrpSpPr>
-      <p:grpSpPr/>
+      <p:grpSpPr>
+        <a:xfrm>
+          <a:off x="0" y="0"/>
+          <a:ext cx="0" cy="0"/>
+          <a:chOff x="0" y="0"/>
+          <a:chExt cx="0" cy="0"/>
+        </a:xfrm>
+      </p:grpSpPr>
       <p:sp>
         <p:nvSpPr>
           <p:cNvPr id="2" name="Rectangle 1"/>
@@ -10471,6 +11379,7 @@
           <a:lstStyle/>
           <a:p>
             <a:pPr algn="ctr"/>
+            <a:endParaRPr/>
           </a:p>
         </p:txBody>
       </p:sp>
@@ -10585,6 +11494,7 @@
           <a:lstStyle/>
           <a:p>
             <a:pPr algn="ctr"/>
+            <a:endParaRPr/>
           </a:p>
         </p:txBody>
       </p:sp>
@@ -10684,7 +11594,7 @@
 </file>
 
 <file path=ppt/slides/slide28.xml><?xml version="1.0" encoding="utf-8"?>
-<p:sld xmlns:a="http://schemas.openxmlformats.org/drawingml/2006/main" xmlns:p="http://schemas.openxmlformats.org/presentationml/2006/main" xmlns:r="http://schemas.openxmlformats.org/officeDocument/2006/relationships">
+<p:sld xmlns:a="http://schemas.openxmlformats.org/drawingml/2006/main" xmlns:r="http://schemas.openxmlformats.org/officeDocument/2006/relationships" xmlns:p="http://schemas.openxmlformats.org/presentationml/2006/main">
   <p:cSld>
     <p:spTree>
       <p:nvGrpSpPr>
@@ -10692,7 +11602,14 @@
         <p:cNvGrpSpPr/>
         <p:nvPr/>
       </p:nvGrpSpPr>
-      <p:grpSpPr/>
+      <p:grpSpPr>
+        <a:xfrm>
+          <a:off x="0" y="0"/>
+          <a:ext cx="0" cy="0"/>
+          <a:chOff x="0" y="0"/>
+          <a:chExt cx="0" cy="0"/>
+        </a:xfrm>
+      </p:grpSpPr>
       <p:sp>
         <p:nvSpPr>
           <p:cNvPr id="2" name="Rectangle 1"/>
@@ -10734,6 +11651,7 @@
           <a:lstStyle/>
           <a:p>
             <a:pPr algn="ctr"/>
+            <a:endParaRPr/>
           </a:p>
         </p:txBody>
       </p:sp>
@@ -10935,7 +11853,7 @@
 </file>
 
 <file path=ppt/slides/slide29.xml><?xml version="1.0" encoding="utf-8"?>
-<p:sld xmlns:a="http://schemas.openxmlformats.org/drawingml/2006/main" xmlns:p="http://schemas.openxmlformats.org/presentationml/2006/main" xmlns:r="http://schemas.openxmlformats.org/officeDocument/2006/relationships">
+<p:sld xmlns:a="http://schemas.openxmlformats.org/drawingml/2006/main" xmlns:r="http://schemas.openxmlformats.org/officeDocument/2006/relationships" xmlns:p="http://schemas.openxmlformats.org/presentationml/2006/main">
   <p:cSld>
     <p:spTree>
       <p:nvGrpSpPr>
@@ -10943,7 +11861,14 @@
         <p:cNvGrpSpPr/>
         <p:nvPr/>
       </p:nvGrpSpPr>
-      <p:grpSpPr/>
+      <p:grpSpPr>
+        <a:xfrm>
+          <a:off x="0" y="0"/>
+          <a:ext cx="0" cy="0"/>
+          <a:chOff x="0" y="0"/>
+          <a:chExt cx="0" cy="0"/>
+        </a:xfrm>
+      </p:grpSpPr>
       <p:sp>
         <p:nvSpPr>
           <p:cNvPr id="2" name="Rectangle 1"/>
@@ -10985,6 +11910,7 @@
           <a:lstStyle/>
           <a:p>
             <a:pPr algn="ctr"/>
+            <a:endParaRPr/>
           </a:p>
         </p:txBody>
       </p:sp>
@@ -11099,6 +12025,7 @@
           <a:lstStyle/>
           <a:p>
             <a:pPr algn="ctr"/>
+            <a:endParaRPr/>
           </a:p>
         </p:txBody>
       </p:sp>
@@ -11198,7 +12125,7 @@
 </file>
 
 <file path=ppt/slides/slide3.xml><?xml version="1.0" encoding="utf-8"?>
-<p:sld xmlns:a="http://schemas.openxmlformats.org/drawingml/2006/main" xmlns:p="http://schemas.openxmlformats.org/presentationml/2006/main" xmlns:r="http://schemas.openxmlformats.org/officeDocument/2006/relationships">
+<p:sld xmlns:a="http://schemas.openxmlformats.org/drawingml/2006/main" xmlns:r="http://schemas.openxmlformats.org/officeDocument/2006/relationships" xmlns:p="http://schemas.openxmlformats.org/presentationml/2006/main">
   <p:cSld>
     <p:spTree>
       <p:nvGrpSpPr>
@@ -11206,7 +12133,14 @@
         <p:cNvGrpSpPr/>
         <p:nvPr/>
       </p:nvGrpSpPr>
-      <p:grpSpPr/>
+      <p:grpSpPr>
+        <a:xfrm>
+          <a:off x="0" y="0"/>
+          <a:ext cx="0" cy="0"/>
+          <a:chOff x="0" y="0"/>
+          <a:chExt cx="0" cy="0"/>
+        </a:xfrm>
+      </p:grpSpPr>
       <p:sp>
         <p:nvSpPr>
           <p:cNvPr id="2" name="Rectangle 1"/>
@@ -11248,6 +12182,7 @@
           <a:lstStyle/>
           <a:p>
             <a:pPr algn="ctr"/>
+            <a:endParaRPr/>
           </a:p>
         </p:txBody>
       </p:sp>
@@ -11510,7 +12445,7 @@
 </file>
 
 <file path=ppt/slides/slide30.xml><?xml version="1.0" encoding="utf-8"?>
-<p:sld xmlns:a="http://schemas.openxmlformats.org/drawingml/2006/main" xmlns:p="http://schemas.openxmlformats.org/presentationml/2006/main" xmlns:r="http://schemas.openxmlformats.org/officeDocument/2006/relationships">
+<p:sld xmlns:a="http://schemas.openxmlformats.org/drawingml/2006/main" xmlns:r="http://schemas.openxmlformats.org/officeDocument/2006/relationships" xmlns:p="http://schemas.openxmlformats.org/presentationml/2006/main">
   <p:cSld>
     <p:spTree>
       <p:nvGrpSpPr>
@@ -11518,7 +12453,14 @@
         <p:cNvGrpSpPr/>
         <p:nvPr/>
       </p:nvGrpSpPr>
-      <p:grpSpPr/>
+      <p:grpSpPr>
+        <a:xfrm>
+          <a:off x="0" y="0"/>
+          <a:ext cx="0" cy="0"/>
+          <a:chOff x="0" y="0"/>
+          <a:chExt cx="0" cy="0"/>
+        </a:xfrm>
+      </p:grpSpPr>
       <p:sp>
         <p:nvSpPr>
           <p:cNvPr id="2" name="Rectangle 1"/>
@@ -11560,6 +12502,7 @@
           <a:lstStyle/>
           <a:p>
             <a:pPr algn="ctr"/>
+            <a:endParaRPr/>
           </a:p>
         </p:txBody>
       </p:sp>
@@ -11761,7 +12704,7 @@
 </file>
 
 <file path=ppt/slides/slide31.xml><?xml version="1.0" encoding="utf-8"?>
-<p:sld xmlns:a="http://schemas.openxmlformats.org/drawingml/2006/main" xmlns:p="http://schemas.openxmlformats.org/presentationml/2006/main" xmlns:r="http://schemas.openxmlformats.org/officeDocument/2006/relationships">
+<p:sld xmlns:a="http://schemas.openxmlformats.org/drawingml/2006/main" xmlns:r="http://schemas.openxmlformats.org/officeDocument/2006/relationships" xmlns:p="http://schemas.openxmlformats.org/presentationml/2006/main">
   <p:cSld>
     <p:spTree>
       <p:nvGrpSpPr>
@@ -11769,7 +12712,14 @@
         <p:cNvGrpSpPr/>
         <p:nvPr/>
       </p:nvGrpSpPr>
-      <p:grpSpPr/>
+      <p:grpSpPr>
+        <a:xfrm>
+          <a:off x="0" y="0"/>
+          <a:ext cx="0" cy="0"/>
+          <a:chOff x="0" y="0"/>
+          <a:chExt cx="0" cy="0"/>
+        </a:xfrm>
+      </p:grpSpPr>
       <p:sp>
         <p:nvSpPr>
           <p:cNvPr id="2" name="Rectangle 1"/>
@@ -11811,6 +12761,7 @@
           <a:lstStyle/>
           <a:p>
             <a:pPr algn="ctr"/>
+            <a:endParaRPr/>
           </a:p>
         </p:txBody>
       </p:sp>
@@ -11921,22 +12872,40 @@
           </a:fontRef>
         </p:style>
         <p:txBody>
-          <a:bodyPr rtlCol="0" anchor="ctr" wrap="square" lIns="137160" tIns="91440" rIns="137160"/>
-          <a:lstStyle/>
-          <a:p>
-            <a:pPr algn="ctr">
+          <a:bodyPr wrap="square" lIns="137160" tIns="91440" rIns="137160" rtlCol="0" anchor="ctr"/>
+          <a:lstStyle/>
+          <a:p>
+            <a:pPr>
               <a:spcAft>
                 <a:spcPts val="0"/>
               </a:spcAft>
             </a:pPr>
             <a:r>
-              <a:rPr sz="1200">
+              <a:rPr sz="1200" dirty="0">
                 <a:solidFill>
                   <a:srgbClr val="E6E6E6"/>
                 </a:solidFill>
                 <a:latin typeface="Consolas"/>
               </a:rPr>
-              <a:t>SQL&gt; CREATE DISKGROUP flexdg FLEX REDUNDANCY</a:t>
+              <a:t>SQL&gt; CREATE DISKGROUP </a:t>
+            </a:r>
+            <a:r>
+              <a:rPr sz="1200" dirty="0" err="1">
+                <a:solidFill>
+                  <a:srgbClr val="E6E6E6"/>
+                </a:solidFill>
+                <a:latin typeface="Consolas"/>
+              </a:rPr>
+              <a:t>flexdg</a:t>
+            </a:r>
+            <a:r>
+              <a:rPr sz="1200" dirty="0">
+                <a:solidFill>
+                  <a:srgbClr val="E6E6E6"/>
+                </a:solidFill>
+                <a:latin typeface="Consolas"/>
+              </a:rPr>
+              <a:t> FLEX REDUNDANCY</a:t>
             </a:r>
           </a:p>
           <a:p>
@@ -11946,7 +12915,7 @@
               </a:spcAft>
             </a:pPr>
             <a:r>
-              <a:rPr sz="1200">
+              <a:rPr sz="1200" dirty="0">
                 <a:solidFill>
                   <a:srgbClr val="E6E6E6"/>
                 </a:solidFill>
@@ -11962,7 +12931,7 @@
               </a:spcAft>
             </a:pPr>
             <a:r>
-              <a:rPr sz="1200">
+              <a:rPr sz="1200" dirty="0">
                 <a:solidFill>
                   <a:srgbClr val="E6E6E6"/>
                 </a:solidFill>
@@ -11978,7 +12947,7 @@
               </a:spcAft>
             </a:pPr>
             <a:r>
-              <a:rPr sz="1200">
+              <a:rPr sz="1200" dirty="0">
                 <a:solidFill>
                   <a:srgbClr val="E6E6E6"/>
                 </a:solidFill>
@@ -11994,7 +12963,7 @@
               </a:spcAft>
             </a:pPr>
             <a:r>
-              <a:rPr sz="1200">
+              <a:rPr sz="1200" dirty="0">
                 <a:solidFill>
                   <a:srgbClr val="E6E6E6"/>
                 </a:solidFill>
@@ -12010,13 +12979,31 @@
               </a:spcAft>
             </a:pPr>
             <a:r>
-              <a:rPr sz="1200">
+              <a:rPr sz="1200" dirty="0">
                 <a:solidFill>
                   <a:srgbClr val="E6E6E6"/>
                 </a:solidFill>
                 <a:latin typeface="Consolas"/>
               </a:rPr>
-              <a:t>  6              'compatible.rdbms'='19.0.0.0';</a:t>
+              <a:t>  6              '</a:t>
+            </a:r>
+            <a:r>
+              <a:rPr sz="1200" dirty="0" err="1">
+                <a:solidFill>
+                  <a:srgbClr val="E6E6E6"/>
+                </a:solidFill>
+                <a:latin typeface="Consolas"/>
+              </a:rPr>
+              <a:t>compatible.rdbms</a:t>
+            </a:r>
+            <a:r>
+              <a:rPr sz="1200" dirty="0">
+                <a:solidFill>
+                  <a:srgbClr val="E6E6E6"/>
+                </a:solidFill>
+                <a:latin typeface="Consolas"/>
+              </a:rPr>
+              <a:t>'='19.0.0.0';</a:t>
             </a:r>
           </a:p>
           <a:p>
@@ -12025,15 +13012,61 @@
                 <a:spcPts val="0"/>
               </a:spcAft>
             </a:pPr>
-            <a:r>
-              <a:rPr sz="1200">
+            <a:endParaRPr sz="1200" dirty="0">
+              <a:solidFill>
+                <a:srgbClr val="E6E6E6"/>
+              </a:solidFill>
+              <a:latin typeface="Consolas"/>
+            </a:endParaRPr>
+          </a:p>
+          <a:p>
+            <a:pPr>
+              <a:spcAft>
+                <a:spcPts val="0"/>
+              </a:spcAft>
+            </a:pPr>
+            <a:r>
+              <a:rPr sz="1200" dirty="0">
                 <a:solidFill>
                   <a:srgbClr val="E6E6E6"/>
                 </a:solidFill>
                 <a:latin typeface="Consolas"/>
               </a:rPr>
-              <a:t/>
-            </a:r>
+              <a:t>SQL&gt; ALTER DISKGROUP </a:t>
+            </a:r>
+            <a:r>
+              <a:rPr sz="1200" dirty="0" err="1">
+                <a:solidFill>
+                  <a:srgbClr val="E6E6E6"/>
+                </a:solidFill>
+                <a:latin typeface="Consolas"/>
+              </a:rPr>
+              <a:t>flexdg</a:t>
+            </a:r>
+            <a:r>
+              <a:rPr sz="1200" dirty="0">
+                <a:solidFill>
+                  <a:srgbClr val="E6E6E6"/>
+                </a:solidFill>
+                <a:latin typeface="Consolas"/>
+              </a:rPr>
+              <a:t> ADD QUOTAGROUP </a:t>
+            </a:r>
+            <a:r>
+              <a:rPr sz="1200" dirty="0" err="1">
+                <a:solidFill>
+                  <a:srgbClr val="E6E6E6"/>
+                </a:solidFill>
+                <a:latin typeface="Consolas"/>
+              </a:rPr>
+              <a:t>sales_qg</a:t>
+            </a:r>
+            <a:endParaRPr sz="1200" dirty="0">
+              <a:solidFill>
+                <a:srgbClr val="E6E6E6"/>
+              </a:solidFill>
+              <a:latin typeface="Consolas"/>
+            </a:endParaRPr>
           </a:p>
           <a:p>
             <a:pPr>
@@ -12042,13 +13075,13 @@
               </a:spcAft>
             </a:pPr>
             <a:r>
-              <a:rPr sz="1200">
+              <a:rPr sz="1200" dirty="0">
                 <a:solidFill>
                   <a:srgbClr val="E6E6E6"/>
                 </a:solidFill>
                 <a:latin typeface="Consolas"/>
               </a:rPr>
-              <a:t>SQL&gt; ALTER DISKGROUP flexdg ADD QUOTAGROUP sales_qg</a:t>
+              <a:t>  2    SET 'quota'='500G';</a:t>
             </a:r>
           </a:p>
           <a:p>
@@ -12058,14 +13091,47 @@
               </a:spcAft>
             </a:pPr>
             <a:r>
-              <a:rPr sz="1200">
+              <a:rPr sz="1200" dirty="0">
                 <a:solidFill>
                   <a:srgbClr val="E6E6E6"/>
                 </a:solidFill>
                 <a:latin typeface="Consolas"/>
               </a:rPr>
-              <a:t>  2    SET 'quota'='500G';</a:t>
-            </a:r>
+              <a:t>SQL&gt; ALTER DISKGROUP </a:t>
+            </a:r>
+            <a:r>
+              <a:rPr sz="1200" dirty="0" err="1">
+                <a:solidFill>
+                  <a:srgbClr val="E6E6E6"/>
+                </a:solidFill>
+                <a:latin typeface="Consolas"/>
+              </a:rPr>
+              <a:t>flexdg</a:t>
+            </a:r>
+            <a:r>
+              <a:rPr sz="1200" dirty="0">
+                <a:solidFill>
+                  <a:srgbClr val="E6E6E6"/>
+                </a:solidFill>
+                <a:latin typeface="Consolas"/>
+              </a:rPr>
+              <a:t> ADD FILEGROUP </a:t>
+            </a:r>
+            <a:r>
+              <a:rPr sz="1200" dirty="0" err="1">
+                <a:solidFill>
+                  <a:srgbClr val="E6E6E6"/>
+                </a:solidFill>
+                <a:latin typeface="Consolas"/>
+              </a:rPr>
+              <a:t>salespdb</a:t>
+            </a:r>
+            <a:endParaRPr sz="1200" dirty="0">
+              <a:solidFill>
+                <a:srgbClr val="E6E6E6"/>
+              </a:solidFill>
+              <a:latin typeface="Consolas"/>
+            </a:endParaRPr>
           </a:p>
           <a:p>
             <a:pPr>
@@ -12074,13 +13140,31 @@
               </a:spcAft>
             </a:pPr>
             <a:r>
-              <a:rPr sz="1200">
+              <a:rPr sz="1200" dirty="0">
                 <a:solidFill>
                   <a:srgbClr val="E6E6E6"/>
                 </a:solidFill>
                 <a:latin typeface="Consolas"/>
               </a:rPr>
-              <a:t>SQL&gt; ALTER DISKGROUP flexdg ADD FILEGROUP salespdb</a:t>
+              <a:t>  2    DATABASE </a:t>
+            </a:r>
+            <a:r>
+              <a:rPr sz="1200" dirty="0" err="1">
+                <a:solidFill>
+                  <a:srgbClr val="E6E6E6"/>
+                </a:solidFill>
+                <a:latin typeface="Consolas"/>
+              </a:rPr>
+              <a:t>salespdb</a:t>
+            </a:r>
+            <a:r>
+              <a:rPr sz="1200" dirty="0">
+                <a:solidFill>
+                  <a:srgbClr val="E6E6E6"/>
+                </a:solidFill>
+                <a:latin typeface="Consolas"/>
+              </a:rPr>
+              <a:t> SET 'redundancy'='high'</a:t>
             </a:r>
           </a:p>
           <a:p>
@@ -12090,29 +13174,49 @@
               </a:spcAft>
             </a:pPr>
             <a:r>
-              <a:rPr sz="1200">
+              <a:rPr sz="1200" dirty="0">
                 <a:solidFill>
                   <a:srgbClr val="E6E6E6"/>
                 </a:solidFill>
                 <a:latin typeface="Consolas"/>
               </a:rPr>
-              <a:t>  2    DATABASE salespdb SET 'redundancy'='high'</a:t>
-            </a:r>
-          </a:p>
-          <a:p>
-            <a:pPr>
-              <a:spcAft>
-                <a:spcPts val="0"/>
-              </a:spcAft>
-            </a:pPr>
-            <a:r>
-              <a:rPr sz="1200">
+              <a:t>  3    SET '</a:t>
+            </a:r>
+            <a:r>
+              <a:rPr sz="1200" dirty="0" err="1">
                 <a:solidFill>
                   <a:srgbClr val="E6E6E6"/>
                 </a:solidFill>
                 <a:latin typeface="Consolas"/>
               </a:rPr>
-              <a:t>  3    SET 'quota_group'='sales_qg';</a:t>
+              <a:t>quota_group</a:t>
+            </a:r>
+            <a:r>
+              <a:rPr sz="1200" dirty="0">
+                <a:solidFill>
+                  <a:srgbClr val="E6E6E6"/>
+                </a:solidFill>
+                <a:latin typeface="Consolas"/>
+              </a:rPr>
+              <a:t>'='</a:t>
+            </a:r>
+            <a:r>
+              <a:rPr sz="1200" dirty="0" err="1">
+                <a:solidFill>
+                  <a:srgbClr val="E6E6E6"/>
+                </a:solidFill>
+                <a:latin typeface="Consolas"/>
+              </a:rPr>
+              <a:t>sales_qg</a:t>
+            </a:r>
+            <a:r>
+              <a:rPr sz="1200" dirty="0">
+                <a:solidFill>
+                  <a:srgbClr val="E6E6E6"/>
+                </a:solidFill>
+                <a:latin typeface="Consolas"/>
+              </a:rPr>
+              <a:t>';</a:t>
             </a:r>
           </a:p>
         </p:txBody>
@@ -12126,7 +13230,7 @@
 </file>
 
 <file path=ppt/slides/slide32.xml><?xml version="1.0" encoding="utf-8"?>
-<p:sld xmlns:a="http://schemas.openxmlformats.org/drawingml/2006/main" xmlns:p="http://schemas.openxmlformats.org/presentationml/2006/main" xmlns:r="http://schemas.openxmlformats.org/officeDocument/2006/relationships">
+<p:sld xmlns:a="http://schemas.openxmlformats.org/drawingml/2006/main" xmlns:r="http://schemas.openxmlformats.org/officeDocument/2006/relationships" xmlns:p="http://schemas.openxmlformats.org/presentationml/2006/main">
   <p:cSld>
     <p:spTree>
       <p:nvGrpSpPr>
@@ -12134,7 +13238,14 @@
         <p:cNvGrpSpPr/>
         <p:nvPr/>
       </p:nvGrpSpPr>
-      <p:grpSpPr/>
+      <p:grpSpPr>
+        <a:xfrm>
+          <a:off x="0" y="0"/>
+          <a:ext cx="0" cy="0"/>
+          <a:chOff x="0" y="0"/>
+          <a:chExt cx="0" cy="0"/>
+        </a:xfrm>
+      </p:grpSpPr>
       <p:sp>
         <p:nvSpPr>
           <p:cNvPr id="2" name="Rectangle 1"/>
@@ -12176,6 +13287,7 @@
           <a:lstStyle/>
           <a:p>
             <a:pPr algn="ctr"/>
+            <a:endParaRPr/>
           </a:p>
         </p:txBody>
       </p:sp>
@@ -12290,6 +13402,7 @@
           <a:lstStyle/>
           <a:p>
             <a:pPr algn="ctr"/>
+            <a:endParaRPr/>
           </a:p>
         </p:txBody>
       </p:sp>
@@ -12389,7 +13502,7 @@
 </file>
 
 <file path=ppt/slides/slide33.xml><?xml version="1.0" encoding="utf-8"?>
-<p:sld xmlns:a="http://schemas.openxmlformats.org/drawingml/2006/main" xmlns:p="http://schemas.openxmlformats.org/presentationml/2006/main" xmlns:r="http://schemas.openxmlformats.org/officeDocument/2006/relationships">
+<p:sld xmlns:a="http://schemas.openxmlformats.org/drawingml/2006/main" xmlns:r="http://schemas.openxmlformats.org/officeDocument/2006/relationships" xmlns:p="http://schemas.openxmlformats.org/presentationml/2006/main">
   <p:cSld>
     <p:spTree>
       <p:nvGrpSpPr>
@@ -12397,7 +13510,14 @@
         <p:cNvGrpSpPr/>
         <p:nvPr/>
       </p:nvGrpSpPr>
-      <p:grpSpPr/>
+      <p:grpSpPr>
+        <a:xfrm>
+          <a:off x="0" y="0"/>
+          <a:ext cx="0" cy="0"/>
+          <a:chOff x="0" y="0"/>
+          <a:chExt cx="0" cy="0"/>
+        </a:xfrm>
+      </p:grpSpPr>
       <p:sp>
         <p:nvSpPr>
           <p:cNvPr id="2" name="Rectangle 1"/>
@@ -12439,6 +13559,7 @@
           <a:lstStyle/>
           <a:p>
             <a:pPr algn="ctr"/>
+            <a:endParaRPr/>
           </a:p>
         </p:txBody>
       </p:sp>
@@ -12640,7 +13761,7 @@
 </file>
 
 <file path=ppt/slides/slide34.xml><?xml version="1.0" encoding="utf-8"?>
-<p:sld xmlns:a="http://schemas.openxmlformats.org/drawingml/2006/main" xmlns:p="http://schemas.openxmlformats.org/presentationml/2006/main" xmlns:r="http://schemas.openxmlformats.org/officeDocument/2006/relationships">
+<p:sld xmlns:a="http://schemas.openxmlformats.org/drawingml/2006/main" xmlns:r="http://schemas.openxmlformats.org/officeDocument/2006/relationships" xmlns:p="http://schemas.openxmlformats.org/presentationml/2006/main">
   <p:cSld>
     <p:spTree>
       <p:nvGrpSpPr>
@@ -12648,7 +13769,14 @@
         <p:cNvGrpSpPr/>
         <p:nvPr/>
       </p:nvGrpSpPr>
-      <p:grpSpPr/>
+      <p:grpSpPr>
+        <a:xfrm>
+          <a:off x="0" y="0"/>
+          <a:ext cx="0" cy="0"/>
+          <a:chOff x="0" y="0"/>
+          <a:chExt cx="0" cy="0"/>
+        </a:xfrm>
+      </p:grpSpPr>
       <p:sp>
         <p:nvSpPr>
           <p:cNvPr id="2" name="Rectangle 1"/>
@@ -12690,6 +13818,7 @@
           <a:lstStyle/>
           <a:p>
             <a:pPr algn="ctr"/>
+            <a:endParaRPr/>
           </a:p>
         </p:txBody>
       </p:sp>
@@ -12804,6 +13933,7 @@
           <a:lstStyle/>
           <a:p>
             <a:pPr algn="ctr"/>
+            <a:endParaRPr/>
           </a:p>
         </p:txBody>
       </p:sp>
@@ -12903,7 +14033,7 @@
 </file>
 
 <file path=ppt/slides/slide35.xml><?xml version="1.0" encoding="utf-8"?>
-<p:sld xmlns:a="http://schemas.openxmlformats.org/drawingml/2006/main" xmlns:p="http://schemas.openxmlformats.org/presentationml/2006/main" xmlns:r="http://schemas.openxmlformats.org/officeDocument/2006/relationships">
+<p:sld xmlns:a="http://schemas.openxmlformats.org/drawingml/2006/main" xmlns:r="http://schemas.openxmlformats.org/officeDocument/2006/relationships" xmlns:p="http://schemas.openxmlformats.org/presentationml/2006/main">
   <p:cSld>
     <p:spTree>
       <p:nvGrpSpPr>
@@ -12911,7 +14041,14 @@
         <p:cNvGrpSpPr/>
         <p:nvPr/>
       </p:nvGrpSpPr>
-      <p:grpSpPr/>
+      <p:grpSpPr>
+        <a:xfrm>
+          <a:off x="0" y="0"/>
+          <a:ext cx="0" cy="0"/>
+          <a:chOff x="0" y="0"/>
+          <a:chExt cx="0" cy="0"/>
+        </a:xfrm>
+      </p:grpSpPr>
       <p:sp>
         <p:nvSpPr>
           <p:cNvPr id="2" name="Rectangle 1"/>
@@ -12953,6 +14090,7 @@
           <a:lstStyle/>
           <a:p>
             <a:pPr algn="ctr"/>
+            <a:endParaRPr/>
           </a:p>
         </p:txBody>
       </p:sp>
@@ -13154,7 +14292,7 @@
 </file>
 
 <file path=ppt/slides/slide36.xml><?xml version="1.0" encoding="utf-8"?>
-<p:sld xmlns:a="http://schemas.openxmlformats.org/drawingml/2006/main" xmlns:p="http://schemas.openxmlformats.org/presentationml/2006/main" xmlns:r="http://schemas.openxmlformats.org/officeDocument/2006/relationships">
+<p:sld xmlns:a="http://schemas.openxmlformats.org/drawingml/2006/main" xmlns:r="http://schemas.openxmlformats.org/officeDocument/2006/relationships" xmlns:p="http://schemas.openxmlformats.org/presentationml/2006/main">
   <p:cSld>
     <p:spTree>
       <p:nvGrpSpPr>
@@ -13162,7 +14300,14 @@
         <p:cNvGrpSpPr/>
         <p:nvPr/>
       </p:nvGrpSpPr>
-      <p:grpSpPr/>
+      <p:grpSpPr>
+        <a:xfrm>
+          <a:off x="0" y="0"/>
+          <a:ext cx="0" cy="0"/>
+          <a:chOff x="0" y="0"/>
+          <a:chExt cx="0" cy="0"/>
+        </a:xfrm>
+      </p:grpSpPr>
       <p:sp>
         <p:nvSpPr>
           <p:cNvPr id="2" name="Rectangle 1"/>
@@ -13204,6 +14349,7 @@
           <a:lstStyle/>
           <a:p>
             <a:pPr algn="ctr"/>
+            <a:endParaRPr/>
           </a:p>
         </p:txBody>
       </p:sp>
@@ -13314,23 +14460,38 @@
           </a:fontRef>
         </p:style>
         <p:txBody>
-          <a:bodyPr rtlCol="0" anchor="ctr" wrap="square" lIns="137160" tIns="91440" rIns="137160"/>
-          <a:lstStyle/>
-          <a:p>
-            <a:pPr algn="ctr">
+          <a:bodyPr wrap="square" lIns="137160" tIns="91440" rIns="137160" rtlCol="0" anchor="ctr"/>
+          <a:lstStyle/>
+          <a:p>
+            <a:pPr>
               <a:spcAft>
                 <a:spcPts val="0"/>
               </a:spcAft>
             </a:pPr>
             <a:r>
-              <a:rPr sz="1200">
+              <a:rPr sz="1200" dirty="0">
                 <a:solidFill>
                   <a:srgbClr val="E6E6E6"/>
                 </a:solidFill>
                 <a:latin typeface="Consolas"/>
               </a:rPr>
-              <a:t>ASMCMD [+] &gt; lsdg</a:t>
-            </a:r>
+              <a:t>ASMCMD [+] &gt; </a:t>
+            </a:r>
+            <a:r>
+              <a:rPr sz="1200" dirty="0" err="1">
+                <a:solidFill>
+                  <a:srgbClr val="E6E6E6"/>
+                </a:solidFill>
+                <a:latin typeface="Consolas"/>
+              </a:rPr>
+              <a:t>lsdg</a:t>
+            </a:r>
+            <a:endParaRPr sz="1200" dirty="0">
+              <a:solidFill>
+                <a:srgbClr val="E6E6E6"/>
+              </a:solidFill>
+              <a:latin typeface="Consolas"/>
+            </a:endParaRPr>
           </a:p>
           <a:p>
             <a:pPr>
@@ -13339,13 +14500,67 @@
               </a:spcAft>
             </a:pPr>
             <a:r>
-              <a:rPr sz="1200">
+              <a:rPr sz="1200" dirty="0">
                 <a:solidFill>
                   <a:srgbClr val="E6E6E6"/>
                 </a:solidFill>
                 <a:latin typeface="Consolas"/>
               </a:rPr>
-              <a:t>State    Type    Total_MB  Free_MB  Usable_file_MB  Name</a:t>
+              <a:t>State    Type    </a:t>
+            </a:r>
+            <a:r>
+              <a:rPr sz="1200" dirty="0" err="1">
+                <a:solidFill>
+                  <a:srgbClr val="E6E6E6"/>
+                </a:solidFill>
+                <a:latin typeface="Consolas"/>
+              </a:rPr>
+              <a:t>Total_MB</a:t>
+            </a:r>
+            <a:r>
+              <a:rPr sz="1200" dirty="0">
+                <a:solidFill>
+                  <a:srgbClr val="E6E6E6"/>
+                </a:solidFill>
+                <a:latin typeface="Consolas"/>
+              </a:rPr>
+              <a:t>  </a:t>
+            </a:r>
+            <a:r>
+              <a:rPr sz="1200" dirty="0" err="1">
+                <a:solidFill>
+                  <a:srgbClr val="E6E6E6"/>
+                </a:solidFill>
+                <a:latin typeface="Consolas"/>
+              </a:rPr>
+              <a:t>Free_MB</a:t>
+            </a:r>
+            <a:r>
+              <a:rPr sz="1200" dirty="0">
+                <a:solidFill>
+                  <a:srgbClr val="E6E6E6"/>
+                </a:solidFill>
+                <a:latin typeface="Consolas"/>
+              </a:rPr>
+              <a:t>  </a:t>
+            </a:r>
+            <a:r>
+              <a:rPr sz="1200" dirty="0" err="1">
+                <a:solidFill>
+                  <a:srgbClr val="E6E6E6"/>
+                </a:solidFill>
+                <a:latin typeface="Consolas"/>
+              </a:rPr>
+              <a:t>Usable_file_MB</a:t>
+            </a:r>
+            <a:r>
+              <a:rPr sz="1200" dirty="0">
+                <a:solidFill>
+                  <a:srgbClr val="E6E6E6"/>
+                </a:solidFill>
+                <a:latin typeface="Consolas"/>
+              </a:rPr>
+              <a:t>  Name</a:t>
             </a:r>
           </a:p>
           <a:p>
@@ -13355,7 +14570,7 @@
               </a:spcAft>
             </a:pPr>
             <a:r>
-              <a:rPr sz="1200">
+              <a:rPr sz="1200" dirty="0">
                 <a:solidFill>
                   <a:srgbClr val="E6E6E6"/>
                 </a:solidFill>
@@ -13371,7 +14586,7 @@
               </a:spcAft>
             </a:pPr>
             <a:r>
-              <a:rPr sz="1200">
+              <a:rPr sz="1200" dirty="0">
                 <a:solidFill>
                   <a:srgbClr val="E6E6E6"/>
                 </a:solidFill>
@@ -13386,14 +14601,45 @@
                 <a:spcPts val="0"/>
               </a:spcAft>
             </a:pPr>
-            <a:r>
-              <a:rPr sz="1200">
+            <a:endParaRPr sz="1200" dirty="0">
+              <a:solidFill>
+                <a:srgbClr val="E6E6E6"/>
+              </a:solidFill>
+              <a:latin typeface="Consolas"/>
+            </a:endParaRPr>
+          </a:p>
+          <a:p>
+            <a:pPr>
+              <a:spcAft>
+                <a:spcPts val="0"/>
+              </a:spcAft>
+            </a:pPr>
+            <a:r>
+              <a:rPr sz="1200" dirty="0">
                 <a:solidFill>
                   <a:srgbClr val="E6E6E6"/>
                 </a:solidFill>
                 <a:latin typeface="Consolas"/>
               </a:rPr>
-              <a:t/>
+              <a:t>ASMCMD [+] &gt; cd +DATA/</a:t>
+            </a:r>
+            <a:r>
+              <a:rPr sz="1200" dirty="0" err="1">
+                <a:solidFill>
+                  <a:srgbClr val="E6E6E6"/>
+                </a:solidFill>
+                <a:latin typeface="Consolas"/>
+              </a:rPr>
+              <a:t>orcl</a:t>
+            </a:r>
+            <a:r>
+              <a:rPr sz="1200" dirty="0">
+                <a:solidFill>
+                  <a:srgbClr val="E6E6E6"/>
+                </a:solidFill>
+                <a:latin typeface="Consolas"/>
+              </a:rPr>
+              <a:t>/datafile</a:t>
             </a:r>
           </a:p>
           <a:p>
@@ -13403,13 +14649,13 @@
               </a:spcAft>
             </a:pPr>
             <a:r>
-              <a:rPr sz="1200">
+              <a:rPr sz="1200" dirty="0">
                 <a:solidFill>
                   <a:srgbClr val="E6E6E6"/>
                 </a:solidFill>
                 <a:latin typeface="Consolas"/>
               </a:rPr>
-              <a:t>ASMCMD [+] &gt; cd +DATA/orcl/datafile</a:t>
+              <a:t>ASMCMD &gt; ls -l</a:t>
             </a:r>
           </a:p>
           <a:p>
@@ -13419,13 +14665,31 @@
               </a:spcAft>
             </a:pPr>
             <a:r>
-              <a:rPr sz="1200">
+              <a:rPr sz="1200" dirty="0">
                 <a:solidFill>
                   <a:srgbClr val="E6E6E6"/>
                 </a:solidFill>
                 <a:latin typeface="Consolas"/>
               </a:rPr>
-              <a:t>ASMCMD &gt; ls -l</a:t>
+              <a:t>Type      </a:t>
+            </a:r>
+            <a:r>
+              <a:rPr sz="1200" dirty="0" err="1">
+                <a:solidFill>
+                  <a:srgbClr val="E6E6E6"/>
+                </a:solidFill>
+                <a:latin typeface="Consolas"/>
+              </a:rPr>
+              <a:t>Redund</a:t>
+            </a:r>
+            <a:r>
+              <a:rPr sz="1200" dirty="0">
+                <a:solidFill>
+                  <a:srgbClr val="E6E6E6"/>
+                </a:solidFill>
+                <a:latin typeface="Consolas"/>
+              </a:rPr>
+              <a:t>  Striped  Sys  Name</a:t>
             </a:r>
           </a:p>
           <a:p>
@@ -13435,13 +14699,13 @@
               </a:spcAft>
             </a:pPr>
             <a:r>
-              <a:rPr sz="1200">
+              <a:rPr sz="1200" dirty="0">
                 <a:solidFill>
                   <a:srgbClr val="E6E6E6"/>
                 </a:solidFill>
                 <a:latin typeface="Consolas"/>
               </a:rPr>
-              <a:t>Type      Redund  Striped  Sys  Name</a:t>
+              <a:t>DATAFILE  MIRROR  COARSE   Y    users.259.1048576789</a:t>
             </a:r>
           </a:p>
           <a:p>
@@ -13450,47 +14714,61 @@
                 <a:spcPts val="0"/>
               </a:spcAft>
             </a:pPr>
-            <a:r>
-              <a:rPr sz="1200">
+            <a:endParaRPr sz="1200" dirty="0">
+              <a:solidFill>
+                <a:srgbClr val="E6E6E6"/>
+              </a:solidFill>
+              <a:latin typeface="Consolas"/>
+            </a:endParaRPr>
+          </a:p>
+          <a:p>
+            <a:pPr>
+              <a:spcAft>
+                <a:spcPts val="0"/>
+              </a:spcAft>
+            </a:pPr>
+            <a:r>
+              <a:rPr sz="1200" dirty="0">
                 <a:solidFill>
                   <a:srgbClr val="E6E6E6"/>
                 </a:solidFill>
                 <a:latin typeface="Consolas"/>
               </a:rPr>
-              <a:t>DATAFILE  MIRROR  COARSE   Y    users.259.1048576789</a:t>
-            </a:r>
-          </a:p>
-          <a:p>
-            <a:pPr>
-              <a:spcAft>
-                <a:spcPts val="0"/>
-              </a:spcAft>
-            </a:pPr>
-            <a:r>
-              <a:rPr sz="1200">
+              <a:t>ASMCMD &gt; cp +DATA/</a:t>
+            </a:r>
+            <a:r>
+              <a:rPr sz="1200" dirty="0" err="1">
                 <a:solidFill>
                   <a:srgbClr val="E6E6E6"/>
                 </a:solidFill>
                 <a:latin typeface="Consolas"/>
               </a:rPr>
-              <a:t/>
-            </a:r>
-          </a:p>
-          <a:p>
-            <a:pPr>
-              <a:spcAft>
-                <a:spcPts val="0"/>
-              </a:spcAft>
-            </a:pPr>
-            <a:r>
-              <a:rPr sz="1200">
+              <a:t>orcl</a:t>
+            </a:r>
+            <a:r>
+              <a:rPr sz="1200" dirty="0">
                 <a:solidFill>
                   <a:srgbClr val="E6E6E6"/>
                 </a:solidFill>
                 <a:latin typeface="Consolas"/>
               </a:rPr>
-              <a:t>ASMCMD &gt; cp +DATA/orcl/datafile/users.259... /backup/users.dbf</a:t>
-            </a:r>
+              <a:t>/datafile/users.259... /backup/</a:t>
+            </a:r>
+            <a:r>
+              <a:rPr sz="1200" dirty="0" err="1">
+                <a:solidFill>
+                  <a:srgbClr val="E6E6E6"/>
+                </a:solidFill>
+                <a:latin typeface="Consolas"/>
+              </a:rPr>
+              <a:t>users.dbf</a:t>
+            </a:r>
+            <a:endParaRPr sz="1200" dirty="0">
+              <a:solidFill>
+                <a:srgbClr val="E6E6E6"/>
+              </a:solidFill>
+              <a:latin typeface="Consolas"/>
+            </a:endParaRPr>
           </a:p>
         </p:txBody>
       </p:sp>
@@ -13503,7 +14781,7 @@
 </file>
 
 <file path=ppt/slides/slide37.xml><?xml version="1.0" encoding="utf-8"?>
-<p:sld xmlns:a="http://schemas.openxmlformats.org/drawingml/2006/main" xmlns:p="http://schemas.openxmlformats.org/presentationml/2006/main" xmlns:r="http://schemas.openxmlformats.org/officeDocument/2006/relationships">
+<p:sld xmlns:a="http://schemas.openxmlformats.org/drawingml/2006/main" xmlns:r="http://schemas.openxmlformats.org/officeDocument/2006/relationships" xmlns:p="http://schemas.openxmlformats.org/presentationml/2006/main">
   <p:cSld>
     <p:spTree>
       <p:nvGrpSpPr>
@@ -13511,7 +14789,14 @@
         <p:cNvGrpSpPr/>
         <p:nvPr/>
       </p:nvGrpSpPr>
-      <p:grpSpPr/>
+      <p:grpSpPr>
+        <a:xfrm>
+          <a:off x="0" y="0"/>
+          <a:ext cx="0" cy="0"/>
+          <a:chOff x="0" y="0"/>
+          <a:chExt cx="0" cy="0"/>
+        </a:xfrm>
+      </p:grpSpPr>
       <p:sp>
         <p:nvSpPr>
           <p:cNvPr id="2" name="Rectangle 1"/>
@@ -13553,6 +14838,7 @@
           <a:lstStyle/>
           <a:p>
             <a:pPr algn="ctr"/>
+            <a:endParaRPr/>
           </a:p>
         </p:txBody>
       </p:sp>
@@ -13754,7 +15040,7 @@
 </file>
 
 <file path=ppt/slides/slide38.xml><?xml version="1.0" encoding="utf-8"?>
-<p:sld xmlns:a="http://schemas.openxmlformats.org/drawingml/2006/main" xmlns:p="http://schemas.openxmlformats.org/presentationml/2006/main" xmlns:r="http://schemas.openxmlformats.org/officeDocument/2006/relationships">
+<p:sld xmlns:a="http://schemas.openxmlformats.org/drawingml/2006/main" xmlns:r="http://schemas.openxmlformats.org/officeDocument/2006/relationships" xmlns:p="http://schemas.openxmlformats.org/presentationml/2006/main">
   <p:cSld>
     <p:spTree>
       <p:nvGrpSpPr>
@@ -13762,7 +15048,14 @@
         <p:cNvGrpSpPr/>
         <p:nvPr/>
       </p:nvGrpSpPr>
-      <p:grpSpPr/>
+      <p:grpSpPr>
+        <a:xfrm>
+          <a:off x="0" y="0"/>
+          <a:ext cx="0" cy="0"/>
+          <a:chOff x="0" y="0"/>
+          <a:chExt cx="0" cy="0"/>
+        </a:xfrm>
+      </p:grpSpPr>
       <p:sp>
         <p:nvSpPr>
           <p:cNvPr id="2" name="Rectangle 1"/>
@@ -13804,6 +15097,7 @@
           <a:lstStyle/>
           <a:p>
             <a:pPr algn="ctr"/>
+            <a:endParaRPr/>
           </a:p>
         </p:txBody>
       </p:sp>
@@ -13914,22 +15208,40 @@
           </a:fontRef>
         </p:style>
         <p:txBody>
-          <a:bodyPr rtlCol="0" anchor="ctr" wrap="square" lIns="137160" tIns="91440" rIns="137160"/>
-          <a:lstStyle/>
-          <a:p>
-            <a:pPr algn="ctr">
+          <a:bodyPr wrap="square" lIns="137160" tIns="91440" rIns="137160" rtlCol="0" anchor="ctr"/>
+          <a:lstStyle/>
+          <a:p>
+            <a:pPr>
               <a:spcAft>
                 <a:spcPts val="0"/>
               </a:spcAft>
             </a:pPr>
             <a:r>
-              <a:rPr sz="1200">
+              <a:rPr sz="1200" dirty="0">
                 <a:solidFill>
                   <a:srgbClr val="E6E6E6"/>
                 </a:solidFill>
                 <a:latin typeface="Consolas"/>
               </a:rPr>
-              <a:t>SQL&gt; ALTER SYSTEM SET db_create_file_dest='+DATA'</a:t>
+              <a:t>SQL&gt; ALTER SYSTEM SET </a:t>
+            </a:r>
+            <a:r>
+              <a:rPr sz="1200" dirty="0" err="1">
+                <a:solidFill>
+                  <a:srgbClr val="E6E6E6"/>
+                </a:solidFill>
+                <a:latin typeface="Consolas"/>
+              </a:rPr>
+              <a:t>db_create_file_dest</a:t>
+            </a:r>
+            <a:r>
+              <a:rPr sz="1200" dirty="0">
+                <a:solidFill>
+                  <a:srgbClr val="E6E6E6"/>
+                </a:solidFill>
+                <a:latin typeface="Consolas"/>
+              </a:rPr>
+              <a:t>='+DATA'</a:t>
             </a:r>
           </a:p>
           <a:p>
@@ -13939,7 +15251,7 @@
               </a:spcAft>
             </a:pPr>
             <a:r>
-              <a:rPr sz="1200">
+              <a:rPr sz="1200" dirty="0">
                 <a:solidFill>
                   <a:srgbClr val="E6E6E6"/>
                 </a:solidFill>
@@ -13954,14 +15266,45 @@
                 <a:spcPts val="0"/>
               </a:spcAft>
             </a:pPr>
-            <a:r>
-              <a:rPr sz="1200">
+            <a:endParaRPr sz="1200" dirty="0">
+              <a:solidFill>
+                <a:srgbClr val="E6E6E6"/>
+              </a:solidFill>
+              <a:latin typeface="Consolas"/>
+            </a:endParaRPr>
+          </a:p>
+          <a:p>
+            <a:pPr>
+              <a:spcAft>
+                <a:spcPts val="0"/>
+              </a:spcAft>
+            </a:pPr>
+            <a:r>
+              <a:rPr sz="1200" dirty="0">
                 <a:solidFill>
                   <a:srgbClr val="E6E6E6"/>
                 </a:solidFill>
                 <a:latin typeface="Consolas"/>
               </a:rPr>
-              <a:t/>
+              <a:t>$ </a:t>
+            </a:r>
+            <a:r>
+              <a:rPr sz="1200" dirty="0" err="1">
+                <a:solidFill>
+                  <a:srgbClr val="E6E6E6"/>
+                </a:solidFill>
+                <a:latin typeface="Consolas"/>
+              </a:rPr>
+              <a:t>rman</a:t>
+            </a:r>
+            <a:r>
+              <a:rPr sz="1200" dirty="0">
+                <a:solidFill>
+                  <a:srgbClr val="E6E6E6"/>
+                </a:solidFill>
+                <a:latin typeface="Consolas"/>
+              </a:rPr>
+              <a:t> target /</a:t>
             </a:r>
           </a:p>
           <a:p>
@@ -13971,13 +15314,13 @@
               </a:spcAft>
             </a:pPr>
             <a:r>
-              <a:rPr sz="1200">
+              <a:rPr sz="1200" dirty="0">
                 <a:solidFill>
                   <a:srgbClr val="E6E6E6"/>
                 </a:solidFill>
                 <a:latin typeface="Consolas"/>
               </a:rPr>
-              <a:t>$ rman target /</a:t>
+              <a:t>RMAN&gt; STARTUP MOUNT;</a:t>
             </a:r>
           </a:p>
           <a:p>
@@ -13987,13 +15330,13 @@
               </a:spcAft>
             </a:pPr>
             <a:r>
-              <a:rPr sz="1200">
+              <a:rPr sz="1200" dirty="0">
                 <a:solidFill>
                   <a:srgbClr val="E6E6E6"/>
                 </a:solidFill>
                 <a:latin typeface="Consolas"/>
               </a:rPr>
-              <a:t>RMAN&gt; STARTUP MOUNT;</a:t>
+              <a:t>RMAN&gt; BACKUP AS COPY DATABASE FORMAT '+DATA';</a:t>
             </a:r>
           </a:p>
           <a:p>
@@ -14003,13 +15346,13 @@
               </a:spcAft>
             </a:pPr>
             <a:r>
-              <a:rPr sz="1200">
+              <a:rPr sz="1200" dirty="0">
                 <a:solidFill>
                   <a:srgbClr val="E6E6E6"/>
                 </a:solidFill>
                 <a:latin typeface="Consolas"/>
               </a:rPr>
-              <a:t>RMAN&gt; BACKUP AS COPY DATABASE FORMAT '+DATA';</a:t>
+              <a:t>RMAN&gt; SWITCH DATABASE TO COPY;</a:t>
             </a:r>
           </a:p>
           <a:p>
@@ -14019,13 +15362,13 @@
               </a:spcAft>
             </a:pPr>
             <a:r>
-              <a:rPr sz="1200">
+              <a:rPr sz="1200" dirty="0">
                 <a:solidFill>
                   <a:srgbClr val="E6E6E6"/>
                 </a:solidFill>
                 <a:latin typeface="Consolas"/>
               </a:rPr>
-              <a:t>RMAN&gt; SWITCH DATABASE TO COPY;</a:t>
+              <a:t>RMAN&gt; SQL "ALTER DATABASE ADD LOGFILE '+DATA' SIZE 200M";</a:t>
             </a:r>
           </a:p>
           <a:p>
@@ -14035,13 +15378,13 @@
               </a:spcAft>
             </a:pPr>
             <a:r>
-              <a:rPr sz="1200">
+              <a:rPr sz="1200" dirty="0">
                 <a:solidFill>
                   <a:srgbClr val="E6E6E6"/>
                 </a:solidFill>
                 <a:latin typeface="Consolas"/>
               </a:rPr>
-              <a:t>RMAN&gt; SQL "ALTER DATABASE ADD LOGFILE '+DATA' SIZE 200M";</a:t>
+              <a:t>RMAN&gt; ALTER DATABASE OPEN;</a:t>
             </a:r>
           </a:p>
           <a:p>
@@ -14051,29 +15394,49 @@
               </a:spcAft>
             </a:pPr>
             <a:r>
-              <a:rPr sz="1200">
+              <a:rPr sz="1200" dirty="0">
                 <a:solidFill>
                   <a:srgbClr val="E6E6E6"/>
                 </a:solidFill>
                 <a:latin typeface="Consolas"/>
               </a:rPr>
-              <a:t>RMAN&gt; ALTER DATABASE OPEN;</a:t>
-            </a:r>
-          </a:p>
-          <a:p>
-            <a:pPr>
-              <a:spcAft>
-                <a:spcPts val="0"/>
-              </a:spcAft>
-            </a:pPr>
-            <a:r>
-              <a:rPr sz="1200">
+              <a:t>SQL&gt; SELECT name FROM </a:t>
+            </a:r>
+            <a:r>
+              <a:rPr sz="1200" dirty="0" err="1">
                 <a:solidFill>
                   <a:srgbClr val="E6E6E6"/>
                 </a:solidFill>
                 <a:latin typeface="Consolas"/>
               </a:rPr>
-              <a:t>SQL&gt; SELECT name FROM v$datafile;  -- 모두 +DATA/...</a:t>
+              <a:t>v$datafile</a:t>
+            </a:r>
+            <a:r>
+              <a:rPr sz="1200" dirty="0">
+                <a:solidFill>
+                  <a:srgbClr val="E6E6E6"/>
+                </a:solidFill>
+                <a:latin typeface="Consolas"/>
+              </a:rPr>
+              <a:t>;  -- </a:t>
+            </a:r>
+            <a:r>
+              <a:rPr sz="1200" dirty="0" err="1">
+                <a:solidFill>
+                  <a:srgbClr val="E6E6E6"/>
+                </a:solidFill>
+                <a:latin typeface="Consolas"/>
+              </a:rPr>
+              <a:t>모두</a:t>
+            </a:r>
+            <a:r>
+              <a:rPr sz="1200" dirty="0">
+                <a:solidFill>
+                  <a:srgbClr val="E6E6E6"/>
+                </a:solidFill>
+                <a:latin typeface="Consolas"/>
+              </a:rPr>
+              <a:t> +DATA/...</a:t>
             </a:r>
           </a:p>
         </p:txBody>
@@ -14087,7 +15450,7 @@
 </file>
 
 <file path=ppt/slides/slide39.xml><?xml version="1.0" encoding="utf-8"?>
-<p:sld xmlns:a="http://schemas.openxmlformats.org/drawingml/2006/main" xmlns:p="http://schemas.openxmlformats.org/presentationml/2006/main" xmlns:r="http://schemas.openxmlformats.org/officeDocument/2006/relationships">
+<p:sld xmlns:a="http://schemas.openxmlformats.org/drawingml/2006/main" xmlns:r="http://schemas.openxmlformats.org/officeDocument/2006/relationships" xmlns:p="http://schemas.openxmlformats.org/presentationml/2006/main">
   <p:cSld>
     <p:spTree>
       <p:nvGrpSpPr>
@@ -14095,7 +15458,14 @@
         <p:cNvGrpSpPr/>
         <p:nvPr/>
       </p:nvGrpSpPr>
-      <p:grpSpPr/>
+      <p:grpSpPr>
+        <a:xfrm>
+          <a:off x="0" y="0"/>
+          <a:ext cx="0" cy="0"/>
+          <a:chOff x="0" y="0"/>
+          <a:chExt cx="0" cy="0"/>
+        </a:xfrm>
+      </p:grpSpPr>
       <p:sp>
         <p:nvSpPr>
           <p:cNvPr id="2" name="Rectangle 1"/>
@@ -14137,6 +15507,7 @@
           <a:lstStyle/>
           <a:p>
             <a:pPr algn="ctr"/>
+            <a:endParaRPr/>
           </a:p>
         </p:txBody>
       </p:sp>
@@ -14290,7 +15661,7 @@
 </file>
 
 <file path=ppt/slides/slide4.xml><?xml version="1.0" encoding="utf-8"?>
-<p:sld xmlns:a="http://schemas.openxmlformats.org/drawingml/2006/main" xmlns:p="http://schemas.openxmlformats.org/presentationml/2006/main" xmlns:r="http://schemas.openxmlformats.org/officeDocument/2006/relationships">
+<p:sld xmlns:a="http://schemas.openxmlformats.org/drawingml/2006/main" xmlns:r="http://schemas.openxmlformats.org/officeDocument/2006/relationships" xmlns:p="http://schemas.openxmlformats.org/presentationml/2006/main">
   <p:cSld>
     <p:spTree>
       <p:nvGrpSpPr>
@@ -14298,7 +15669,14 @@
         <p:cNvGrpSpPr/>
         <p:nvPr/>
       </p:nvGrpSpPr>
-      <p:grpSpPr/>
+      <p:grpSpPr>
+        <a:xfrm>
+          <a:off x="0" y="0"/>
+          <a:ext cx="0" cy="0"/>
+          <a:chOff x="0" y="0"/>
+          <a:chExt cx="0" cy="0"/>
+        </a:xfrm>
+      </p:grpSpPr>
       <p:sp>
         <p:nvSpPr>
           <p:cNvPr id="2" name="Rectangle 1"/>
@@ -14340,6 +15718,7 @@
           <a:lstStyle/>
           <a:p>
             <a:pPr algn="ctr"/>
+            <a:endParaRPr/>
           </a:p>
         </p:txBody>
       </p:sp>
@@ -14454,6 +15833,7 @@
           <a:lstStyle/>
           <a:p>
             <a:pPr algn="ctr"/>
+            <a:endParaRPr/>
           </a:p>
         </p:txBody>
       </p:sp>
@@ -14553,7 +15933,7 @@
 </file>
 
 <file path=ppt/slides/slide40.xml><?xml version="1.0" encoding="utf-8"?>
-<p:sld xmlns:a="http://schemas.openxmlformats.org/drawingml/2006/main" xmlns:p="http://schemas.openxmlformats.org/presentationml/2006/main" xmlns:r="http://schemas.openxmlformats.org/officeDocument/2006/relationships">
+<p:sld xmlns:a="http://schemas.openxmlformats.org/drawingml/2006/main" xmlns:r="http://schemas.openxmlformats.org/officeDocument/2006/relationships" xmlns:p="http://schemas.openxmlformats.org/presentationml/2006/main">
   <p:cSld>
     <p:spTree>
       <p:nvGrpSpPr>
@@ -14561,7 +15941,14 @@
         <p:cNvGrpSpPr/>
         <p:nvPr/>
       </p:nvGrpSpPr>
-      <p:grpSpPr/>
+      <p:grpSpPr>
+        <a:xfrm>
+          <a:off x="0" y="0"/>
+          <a:ext cx="0" cy="0"/>
+          <a:chOff x="0" y="0"/>
+          <a:chExt cx="0" cy="0"/>
+        </a:xfrm>
+      </p:grpSpPr>
       <p:sp>
         <p:nvSpPr>
           <p:cNvPr id="2" name="Rectangle 1"/>
@@ -14603,6 +15990,7 @@
           <a:lstStyle/>
           <a:p>
             <a:pPr algn="ctr"/>
+            <a:endParaRPr/>
           </a:p>
         </p:txBody>
       </p:sp>
@@ -14756,7 +16144,7 @@
 </file>
 
 <file path=ppt/slides/slide41.xml><?xml version="1.0" encoding="utf-8"?>
-<p:sld xmlns:a="http://schemas.openxmlformats.org/drawingml/2006/main" xmlns:p="http://schemas.openxmlformats.org/presentationml/2006/main" xmlns:r="http://schemas.openxmlformats.org/officeDocument/2006/relationships">
+<p:sld xmlns:a="http://schemas.openxmlformats.org/drawingml/2006/main" xmlns:r="http://schemas.openxmlformats.org/officeDocument/2006/relationships" xmlns:p="http://schemas.openxmlformats.org/presentationml/2006/main">
   <p:cSld>
     <p:spTree>
       <p:nvGrpSpPr>
@@ -14764,7 +16152,14 @@
         <p:cNvGrpSpPr/>
         <p:nvPr/>
       </p:nvGrpSpPr>
-      <p:grpSpPr/>
+      <p:grpSpPr>
+        <a:xfrm>
+          <a:off x="0" y="0"/>
+          <a:ext cx="0" cy="0"/>
+          <a:chOff x="0" y="0"/>
+          <a:chExt cx="0" cy="0"/>
+        </a:xfrm>
+      </p:grpSpPr>
       <p:sp>
         <p:nvSpPr>
           <p:cNvPr id="2" name="Rectangle 1"/>
@@ -14806,6 +16201,7 @@
           <a:lstStyle/>
           <a:p>
             <a:pPr algn="ctr"/>
+            <a:endParaRPr/>
           </a:p>
         </p:txBody>
       </p:sp>
@@ -15020,7 +16416,7 @@
 </file>
 
 <file path=ppt/slides/slide42.xml><?xml version="1.0" encoding="utf-8"?>
-<p:sld xmlns:a="http://schemas.openxmlformats.org/drawingml/2006/main" xmlns:p="http://schemas.openxmlformats.org/presentationml/2006/main" xmlns:r="http://schemas.openxmlformats.org/officeDocument/2006/relationships">
+<p:sld xmlns:a="http://schemas.openxmlformats.org/drawingml/2006/main" xmlns:r="http://schemas.openxmlformats.org/officeDocument/2006/relationships" xmlns:p="http://schemas.openxmlformats.org/presentationml/2006/main">
   <p:cSld>
     <p:spTree>
       <p:nvGrpSpPr>
@@ -15028,7 +16424,14 @@
         <p:cNvGrpSpPr/>
         <p:nvPr/>
       </p:nvGrpSpPr>
-      <p:grpSpPr/>
+      <p:grpSpPr>
+        <a:xfrm>
+          <a:off x="0" y="0"/>
+          <a:ext cx="0" cy="0"/>
+          <a:chOff x="0" y="0"/>
+          <a:chExt cx="0" cy="0"/>
+        </a:xfrm>
+      </p:grpSpPr>
       <p:sp>
         <p:nvSpPr>
           <p:cNvPr id="2" name="Rectangle 1"/>
@@ -15070,6 +16473,7 @@
           <a:lstStyle/>
           <a:p>
             <a:pPr algn="ctr"/>
+            <a:endParaRPr/>
           </a:p>
         </p:txBody>
       </p:sp>
@@ -15300,7 +16704,7 @@
 </file>
 
 <file path=ppt/slides/slide5.xml><?xml version="1.0" encoding="utf-8"?>
-<p:sld xmlns:a="http://schemas.openxmlformats.org/drawingml/2006/main" xmlns:p="http://schemas.openxmlformats.org/presentationml/2006/main" xmlns:r="http://schemas.openxmlformats.org/officeDocument/2006/relationships">
+<p:sld xmlns:a="http://schemas.openxmlformats.org/drawingml/2006/main" xmlns:r="http://schemas.openxmlformats.org/officeDocument/2006/relationships" xmlns:p="http://schemas.openxmlformats.org/presentationml/2006/main">
   <p:cSld>
     <p:spTree>
       <p:nvGrpSpPr>
@@ -15308,7 +16712,14 @@
         <p:cNvGrpSpPr/>
         <p:nvPr/>
       </p:nvGrpSpPr>
-      <p:grpSpPr/>
+      <p:grpSpPr>
+        <a:xfrm>
+          <a:off x="0" y="0"/>
+          <a:ext cx="0" cy="0"/>
+          <a:chOff x="0" y="0"/>
+          <a:chExt cx="0" cy="0"/>
+        </a:xfrm>
+      </p:grpSpPr>
       <p:sp>
         <p:nvSpPr>
           <p:cNvPr id="2" name="Rectangle 1"/>
@@ -15350,6 +16761,7 @@
           <a:lstStyle/>
           <a:p>
             <a:pPr algn="ctr"/>
+            <a:endParaRPr/>
           </a:p>
         </p:txBody>
       </p:sp>
@@ -15535,7 +16947,7 @@
 </file>
 
 <file path=ppt/slides/slide6.xml><?xml version="1.0" encoding="utf-8"?>
-<p:sld xmlns:a="http://schemas.openxmlformats.org/drawingml/2006/main" xmlns:p="http://schemas.openxmlformats.org/presentationml/2006/main" xmlns:r="http://schemas.openxmlformats.org/officeDocument/2006/relationships">
+<p:sld xmlns:a="http://schemas.openxmlformats.org/drawingml/2006/main" xmlns:r="http://schemas.openxmlformats.org/officeDocument/2006/relationships" xmlns:p="http://schemas.openxmlformats.org/presentationml/2006/main">
   <p:cSld>
     <p:spTree>
       <p:nvGrpSpPr>
@@ -15543,7 +16955,14 @@
         <p:cNvGrpSpPr/>
         <p:nvPr/>
       </p:nvGrpSpPr>
-      <p:grpSpPr/>
+      <p:grpSpPr>
+        <a:xfrm>
+          <a:off x="0" y="0"/>
+          <a:ext cx="0" cy="0"/>
+          <a:chOff x="0" y="0"/>
+          <a:chExt cx="0" cy="0"/>
+        </a:xfrm>
+      </p:grpSpPr>
       <p:sp>
         <p:nvSpPr>
           <p:cNvPr id="2" name="Rectangle 1"/>
@@ -15585,6 +17004,7 @@
           <a:lstStyle/>
           <a:p>
             <a:pPr algn="ctr"/>
+            <a:endParaRPr/>
           </a:p>
         </p:txBody>
       </p:sp>
@@ -15786,7 +17206,7 @@
 </file>
 
 <file path=ppt/slides/slide7.xml><?xml version="1.0" encoding="utf-8"?>
-<p:sld xmlns:a="http://schemas.openxmlformats.org/drawingml/2006/main" xmlns:p="http://schemas.openxmlformats.org/presentationml/2006/main" xmlns:r="http://schemas.openxmlformats.org/officeDocument/2006/relationships">
+<p:sld xmlns:a="http://schemas.openxmlformats.org/drawingml/2006/main" xmlns:r="http://schemas.openxmlformats.org/officeDocument/2006/relationships" xmlns:p="http://schemas.openxmlformats.org/presentationml/2006/main">
   <p:cSld>
     <p:spTree>
       <p:nvGrpSpPr>
@@ -15794,7 +17214,14 @@
         <p:cNvGrpSpPr/>
         <p:nvPr/>
       </p:nvGrpSpPr>
-      <p:grpSpPr/>
+      <p:grpSpPr>
+        <a:xfrm>
+          <a:off x="0" y="0"/>
+          <a:ext cx="0" cy="0"/>
+          <a:chOff x="0" y="0"/>
+          <a:chExt cx="0" cy="0"/>
+        </a:xfrm>
+      </p:grpSpPr>
       <p:sp>
         <p:nvSpPr>
           <p:cNvPr id="2" name="Rectangle 1"/>
@@ -15836,6 +17263,7 @@
           <a:lstStyle/>
           <a:p>
             <a:pPr algn="ctr"/>
+            <a:endParaRPr/>
           </a:p>
         </p:txBody>
       </p:sp>
@@ -16021,7 +17449,7 @@
 </file>
 
 <file path=ppt/slides/slide8.xml><?xml version="1.0" encoding="utf-8"?>
-<p:sld xmlns:a="http://schemas.openxmlformats.org/drawingml/2006/main" xmlns:p="http://schemas.openxmlformats.org/presentationml/2006/main" xmlns:r="http://schemas.openxmlformats.org/officeDocument/2006/relationships">
+<p:sld xmlns:a="http://schemas.openxmlformats.org/drawingml/2006/main" xmlns:r="http://schemas.openxmlformats.org/officeDocument/2006/relationships" xmlns:p="http://schemas.openxmlformats.org/presentationml/2006/main">
   <p:cSld>
     <p:spTree>
       <p:nvGrpSpPr>
@@ -16029,7 +17457,14 @@
         <p:cNvGrpSpPr/>
         <p:nvPr/>
       </p:nvGrpSpPr>
-      <p:grpSpPr/>
+      <p:grpSpPr>
+        <a:xfrm>
+          <a:off x="0" y="0"/>
+          <a:ext cx="0" cy="0"/>
+          <a:chOff x="0" y="0"/>
+          <a:chExt cx="0" cy="0"/>
+        </a:xfrm>
+      </p:grpSpPr>
       <p:sp>
         <p:nvSpPr>
           <p:cNvPr id="2" name="Rectangle 1"/>
@@ -16071,6 +17506,7 @@
           <a:lstStyle/>
           <a:p>
             <a:pPr algn="ctr"/>
+            <a:endParaRPr/>
           </a:p>
         </p:txBody>
       </p:sp>
@@ -16185,6 +17621,7 @@
           <a:lstStyle/>
           <a:p>
             <a:pPr algn="ctr"/>
+            <a:endParaRPr/>
           </a:p>
         </p:txBody>
       </p:sp>
@@ -16284,7 +17721,7 @@
 </file>
 
 <file path=ppt/slides/slide9.xml><?xml version="1.0" encoding="utf-8"?>
-<p:sld xmlns:a="http://schemas.openxmlformats.org/drawingml/2006/main" xmlns:p="http://schemas.openxmlformats.org/presentationml/2006/main" xmlns:r="http://schemas.openxmlformats.org/officeDocument/2006/relationships">
+<p:sld xmlns:a="http://schemas.openxmlformats.org/drawingml/2006/main" xmlns:r="http://schemas.openxmlformats.org/officeDocument/2006/relationships" xmlns:p="http://schemas.openxmlformats.org/presentationml/2006/main">
   <p:cSld>
     <p:spTree>
       <p:nvGrpSpPr>
@@ -16292,7 +17729,14 @@
         <p:cNvGrpSpPr/>
         <p:nvPr/>
       </p:nvGrpSpPr>
-      <p:grpSpPr/>
+      <p:grpSpPr>
+        <a:xfrm>
+          <a:off x="0" y="0"/>
+          <a:ext cx="0" cy="0"/>
+          <a:chOff x="0" y="0"/>
+          <a:chExt cx="0" cy="0"/>
+        </a:xfrm>
+      </p:grpSpPr>
       <p:sp>
         <p:nvSpPr>
           <p:cNvPr id="2" name="Rectangle 1"/>
@@ -16334,6 +17778,7 @@
           <a:lstStyle/>
           <a:p>
             <a:pPr algn="ctr"/>
+            <a:endParaRPr/>
           </a:p>
         </p:txBody>
       </p:sp>
@@ -16855,7 +18300,7 @@
 </file>
 
 <file path=ppt/theme/theme2.xml><?xml version="1.0" encoding="utf-8"?>
-<a:theme xmlns:a="http://schemas.openxmlformats.org/drawingml/2006/main" name="Office Theme">
+<a:theme xmlns:a="http://schemas.openxmlformats.org/drawingml/2006/main" name="Office 테마">
   <a:themeElements>
     <a:clrScheme name="Office">
       <a:dk1>
@@ -16865,44 +18310,44 @@
         <a:sysClr val="window" lastClr="FFFFFF"/>
       </a:lt1>
       <a:dk2>
-        <a:srgbClr val="1F497D"/>
+        <a:srgbClr val="0E2841"/>
       </a:dk2>
       <a:lt2>
-        <a:srgbClr val="EEECE1"/>
+        <a:srgbClr val="E8E8E8"/>
       </a:lt2>
       <a:accent1>
-        <a:srgbClr val="4F81BD"/>
+        <a:srgbClr val="156082"/>
       </a:accent1>
       <a:accent2>
-        <a:srgbClr val="C0504D"/>
+        <a:srgbClr val="E97132"/>
       </a:accent2>
       <a:accent3>
-        <a:srgbClr val="9BBB59"/>
+        <a:srgbClr val="196B24"/>
       </a:accent3>
       <a:accent4>
-        <a:srgbClr val="8064A2"/>
+        <a:srgbClr val="0F9ED5"/>
       </a:accent4>
       <a:accent5>
-        <a:srgbClr val="4BACC6"/>
+        <a:srgbClr val="A02B93"/>
       </a:accent5>
       <a:accent6>
-        <a:srgbClr val="F79646"/>
+        <a:srgbClr val="4EA72E"/>
       </a:accent6>
       <a:hlink>
-        <a:srgbClr val="0000FF"/>
+        <a:srgbClr val="467886"/>
       </a:hlink>
       <a:folHlink>
-        <a:srgbClr val="800080"/>
+        <a:srgbClr val="96607D"/>
       </a:folHlink>
     </a:clrScheme>
     <a:fontScheme name="Office">
       <a:majorFont>
-        <a:latin typeface="Calibri"/>
+        <a:latin typeface="맑은 고딕" panose="02110004020202020204"/>
         <a:ea typeface=""/>
         <a:cs typeface=""/>
-        <a:font script="Jpan" typeface="ＭＳ Ｐゴシック"/>
+        <a:font script="Jpan" typeface="游ゴシック Light"/>
         <a:font script="Hang" typeface="맑은 고딕"/>
-        <a:font script="Hans" typeface="宋体"/>
+        <a:font script="Hans" typeface="等线 Light"/>
         <a:font script="Hant" typeface="新細明體"/>
         <a:font script="Arab" typeface="Times New Roman"/>
         <a:font script="Hebr" typeface="Times New Roman"/>
@@ -16930,14 +18375,31 @@
         <a:font script="Viet" typeface="Times New Roman"/>
         <a:font script="Uigh" typeface="Microsoft Uighur"/>
         <a:font script="Geor" typeface="Sylfaen"/>
+        <a:font script="Armn" typeface="Arial"/>
+        <a:font script="Bugi" typeface="Leelawadee UI"/>
+        <a:font script="Bopo" typeface="Microsoft JhengHei"/>
+        <a:font script="Java" typeface="Javanese Text"/>
+        <a:font script="Lisu" typeface="Segoe UI"/>
+        <a:font script="Mymr" typeface="Myanmar Text"/>
+        <a:font script="Nkoo" typeface="Ebrima"/>
+        <a:font script="Olck" typeface="Nirmala UI"/>
+        <a:font script="Osma" typeface="Ebrima"/>
+        <a:font script="Phag" typeface="Phagspa"/>
+        <a:font script="Syrn" typeface="Estrangelo Edessa"/>
+        <a:font script="Syrj" typeface="Estrangelo Edessa"/>
+        <a:font script="Syre" typeface="Estrangelo Edessa"/>
+        <a:font script="Sora" typeface="Nirmala UI"/>
+        <a:font script="Tale" typeface="Microsoft Tai Le"/>
+        <a:font script="Talu" typeface="Microsoft New Tai Lue"/>
+        <a:font script="Tfng" typeface="Ebrima"/>
       </a:majorFont>
       <a:minorFont>
-        <a:latin typeface="Calibri"/>
+        <a:latin typeface="맑은 고딕" panose="02110004020202020204"/>
         <a:ea typeface=""/>
         <a:cs typeface=""/>
-        <a:font script="Jpan" typeface="ＭＳ Ｐゴシック"/>
+        <a:font script="Jpan" typeface="游ゴシック"/>
         <a:font script="Hang" typeface="맑은 고딕"/>
-        <a:font script="Hans" typeface="宋体"/>
+        <a:font script="Hans" typeface="等线"/>
         <a:font script="Hant" typeface="新細明體"/>
         <a:font script="Arab" typeface="Arial"/>
         <a:font script="Hebr" typeface="Arial"/>
@@ -16965,6 +18427,23 @@
         <a:font script="Viet" typeface="Arial"/>
         <a:font script="Uigh" typeface="Microsoft Uighur"/>
         <a:font script="Geor" typeface="Sylfaen"/>
+        <a:font script="Armn" typeface="Arial"/>
+        <a:font script="Bugi" typeface="Leelawadee UI"/>
+        <a:font script="Bopo" typeface="Microsoft JhengHei"/>
+        <a:font script="Java" typeface="Javanese Text"/>
+        <a:font script="Lisu" typeface="Segoe UI"/>
+        <a:font script="Mymr" typeface="Myanmar Text"/>
+        <a:font script="Nkoo" typeface="Ebrima"/>
+        <a:font script="Olck" typeface="Nirmala UI"/>
+        <a:font script="Osma" typeface="Ebrima"/>
+        <a:font script="Phag" typeface="Phagspa"/>
+        <a:font script="Syrn" typeface="Estrangelo Edessa"/>
+        <a:font script="Syrj" typeface="Estrangelo Edessa"/>
+        <a:font script="Syre" typeface="Estrangelo Edessa"/>
+        <a:font script="Sora" typeface="Nirmala UI"/>
+        <a:font script="Tale" typeface="Microsoft Tai Le"/>
+        <a:font script="Talu" typeface="Microsoft New Tai Lue"/>
+        <a:font script="Tfng" typeface="Ebrima"/>
       </a:minorFont>
     </a:fontScheme>
     <a:fmtScheme name="Office">
@@ -16976,180 +18455,136 @@
           <a:gsLst>
             <a:gs pos="0">
               <a:schemeClr val="phClr">
-                <a:tint val="50000"/>
-                <a:satMod val="300000"/>
+                <a:lumMod val="110000"/>
+                <a:satMod val="105000"/>
+                <a:tint val="67000"/>
               </a:schemeClr>
             </a:gs>
-            <a:gs pos="35000">
+            <a:gs pos="50000">
               <a:schemeClr val="phClr">
-                <a:tint val="37000"/>
-                <a:satMod val="300000"/>
+                <a:lumMod val="105000"/>
+                <a:satMod val="103000"/>
+                <a:tint val="73000"/>
               </a:schemeClr>
             </a:gs>
             <a:gs pos="100000">
               <a:schemeClr val="phClr">
-                <a:tint val="15000"/>
-                <a:satMod val="350000"/>
+                <a:lumMod val="105000"/>
+                <a:satMod val="109000"/>
+                <a:tint val="81000"/>
               </a:schemeClr>
             </a:gs>
           </a:gsLst>
-          <a:lin ang="16200000" scaled="1"/>
+          <a:lin ang="5400000" scaled="0"/>
         </a:gradFill>
         <a:gradFill rotWithShape="1">
           <a:gsLst>
             <a:gs pos="0">
               <a:schemeClr val="phClr">
-                <a:tint val="100000"/>
+                <a:satMod val="103000"/>
+                <a:lumMod val="102000"/>
+                <a:tint val="94000"/>
+              </a:schemeClr>
+            </a:gs>
+            <a:gs pos="50000">
+              <a:schemeClr val="phClr">
+                <a:satMod val="110000"/>
+                <a:lumMod val="100000"/>
                 <a:shade val="100000"/>
-                <a:satMod val="130000"/>
               </a:schemeClr>
             </a:gs>
             <a:gs pos="100000">
               <a:schemeClr val="phClr">
-                <a:tint val="50000"/>
-                <a:shade val="100000"/>
-                <a:satMod val="350000"/>
+                <a:lumMod val="99000"/>
+                <a:satMod val="120000"/>
+                <a:shade val="78000"/>
               </a:schemeClr>
             </a:gs>
           </a:gsLst>
-          <a:lin ang="16200000" scaled="0"/>
+          <a:lin ang="5400000" scaled="0"/>
         </a:gradFill>
       </a:fillStyleLst>
       <a:lnStyleLst>
-        <a:ln w="9525" cap="flat" cmpd="sng" algn="ctr">
+        <a:ln w="12700" cap="flat" cmpd="sng" algn="ctr">
           <a:solidFill>
-            <a:schemeClr val="phClr">
-              <a:shade val="95000"/>
-              <a:satMod val="105000"/>
-            </a:schemeClr>
+            <a:schemeClr val="phClr"/>
           </a:solidFill>
           <a:prstDash val="solid"/>
+          <a:miter lim="800000"/>
+        </a:ln>
+        <a:ln w="19050" cap="flat" cmpd="sng" algn="ctr">
+          <a:solidFill>
+            <a:schemeClr val="phClr"/>
+          </a:solidFill>
+          <a:prstDash val="solid"/>
+          <a:miter lim="800000"/>
         </a:ln>
         <a:ln w="25400" cap="flat" cmpd="sng" algn="ctr">
           <a:solidFill>
             <a:schemeClr val="phClr"/>
           </a:solidFill>
           <a:prstDash val="solid"/>
-        </a:ln>
-        <a:ln w="38100" cap="flat" cmpd="sng" algn="ctr">
-          <a:solidFill>
-            <a:schemeClr val="phClr"/>
-          </a:solidFill>
-          <a:prstDash val="solid"/>
+          <a:miter lim="800000"/>
         </a:ln>
       </a:lnStyleLst>
       <a:effectStyleLst>
         <a:effectStyle>
+          <a:effectLst/>
+        </a:effectStyle>
+        <a:effectStyle>
+          <a:effectLst/>
+        </a:effectStyle>
+        <a:effectStyle>
           <a:effectLst>
-            <a:outerShdw blurRad="40000" dist="20000" dir="5400000" rotWithShape="0">
+            <a:outerShdw blurRad="57150" dist="19050" dir="5400000" algn="ctr" rotWithShape="0">
               <a:srgbClr val="000000">
-                <a:alpha val="38000"/>
+                <a:alpha val="63000"/>
               </a:srgbClr>
             </a:outerShdw>
           </a:effectLst>
-        </a:effectStyle>
-        <a:effectStyle>
-          <a:effectLst>
-            <a:outerShdw blurRad="40000" dist="23000" dir="5400000" rotWithShape="0">
-              <a:srgbClr val="000000">
-                <a:alpha val="35000"/>
-              </a:srgbClr>
-            </a:outerShdw>
-          </a:effectLst>
-        </a:effectStyle>
-        <a:effectStyle>
-          <a:effectLst>
-            <a:outerShdw blurRad="40000" dist="23000" dir="5400000" rotWithShape="0">
-              <a:srgbClr val="000000">
-                <a:alpha val="35000"/>
-              </a:srgbClr>
-            </a:outerShdw>
-          </a:effectLst>
-          <a:scene3d>
-            <a:camera prst="orthographicFront">
-              <a:rot lat="0" lon="0" rev="0"/>
-            </a:camera>
-            <a:lightRig rig="threePt" dir="t">
-              <a:rot lat="0" lon="0" rev="1200000"/>
-            </a:lightRig>
-          </a:scene3d>
-          <a:sp3d>
-            <a:bevelT w="63500" h="25400"/>
-          </a:sp3d>
         </a:effectStyle>
       </a:effectStyleLst>
       <a:bgFillStyleLst>
         <a:solidFill>
           <a:schemeClr val="phClr"/>
         </a:solidFill>
+        <a:solidFill>
+          <a:schemeClr val="phClr">
+            <a:tint val="95000"/>
+            <a:satMod val="170000"/>
+          </a:schemeClr>
+        </a:solidFill>
         <a:gradFill rotWithShape="1">
           <a:gsLst>
             <a:gs pos="0">
               <a:schemeClr val="phClr">
-                <a:tint val="40000"/>
-                <a:satMod val="350000"/>
+                <a:tint val="93000"/>
+                <a:satMod val="150000"/>
+                <a:shade val="98000"/>
+                <a:lumMod val="102000"/>
               </a:schemeClr>
             </a:gs>
-            <a:gs pos="40000">
+            <a:gs pos="50000">
               <a:schemeClr val="phClr">
-                <a:tint val="45000"/>
-                <a:shade val="99000"/>
-                <a:satMod val="350000"/>
+                <a:tint val="98000"/>
+                <a:satMod val="130000"/>
+                <a:shade val="90000"/>
+                <a:lumMod val="103000"/>
               </a:schemeClr>
             </a:gs>
             <a:gs pos="100000">
               <a:schemeClr val="phClr">
-                <a:shade val="20000"/>
-                <a:satMod val="255000"/>
+                <a:shade val="63000"/>
+                <a:satMod val="120000"/>
               </a:schemeClr>
             </a:gs>
           </a:gsLst>
-          <a:path path="circle">
-            <a:fillToRect l="50000" t="-80000" r="50000" b="180000"/>
-          </a:path>
-        </a:gradFill>
-        <a:gradFill rotWithShape="1">
-          <a:gsLst>
-            <a:gs pos="0">
-              <a:schemeClr val="phClr">
-                <a:tint val="80000"/>
-                <a:satMod val="300000"/>
-              </a:schemeClr>
-            </a:gs>
-            <a:gs pos="100000">
-              <a:schemeClr val="phClr">
-                <a:shade val="30000"/>
-                <a:satMod val="200000"/>
-              </a:schemeClr>
-            </a:gs>
-          </a:gsLst>
-          <a:path path="circle">
-            <a:fillToRect l="50000" t="50000" r="50000" b="50000"/>
-          </a:path>
+          <a:lin ang="5400000" scaled="0"/>
         </a:gradFill>
       </a:bgFillStyleLst>
     </a:fmtScheme>
   </a:themeElements>
   <a:objectDefaults>
-    <a:spDef>
-      <a:spPr/>
-      <a:bodyPr/>
-      <a:lstStyle/>
-      <a:style>
-        <a:lnRef idx="1">
-          <a:schemeClr val="accent1"/>
-        </a:lnRef>
-        <a:fillRef idx="3">
-          <a:schemeClr val="accent1"/>
-        </a:fillRef>
-        <a:effectRef idx="2">
-          <a:schemeClr val="accent1"/>
-        </a:effectRef>
-        <a:fontRef idx="minor">
-          <a:schemeClr val="lt1"/>
-        </a:fontRef>
-      </a:style>
-    </a:spDef>
     <a:lnDef>
       <a:spPr/>
       <a:bodyPr/>
@@ -17171,5 +18606,10 @@
     </a:lnDef>
   </a:objectDefaults>
   <a:extraClrSchemeLst/>
+  <a:extLst>
+    <a:ext uri="{05A4C25C-085E-4340-85A3-A5531E510DB2}">
+      <thm15:themeFamily xmlns:thm15="http://schemas.microsoft.com/office/thememl/2012/main" name="Office Theme" id="{2E142A2C-CD16-42D6-873A-C26D2A0506FA}" vid="{1BDDFF52-6CD6-40A5-AB3C-68EB2F1E4D0A}"/>
+    </a:ext>
+  </a:extLst>
 </a:theme>
 </file>